--- a/documentattion/ProTech_Presentation.pptx
+++ b/documentattion/ProTech_Presentation.pptx
@@ -4,48 +4,54 @@
   <p:sldMasterIdLst>
     <p:sldMasterId id="2147483648" r:id="rId1"/>
   </p:sldMasterIdLst>
+  <p:notesMasterIdLst>
+    <p:notesMasterId r:id="rId44"/>
+  </p:notesMasterIdLst>
   <p:sldIdLst>
-    <p:sldId id="256" r:id="rId7"/>
-    <p:sldId id="257" r:id="rId9"/>
-    <p:sldId id="258" r:id="rId10"/>
-    <p:sldId id="259" r:id="rId11"/>
-    <p:sldId id="260" r:id="rId12"/>
-    <p:sldId id="261" r:id="rId13"/>
-    <p:sldId id="262" r:id="rId14"/>
-    <p:sldId id="263" r:id="rId15"/>
-    <p:sldId id="264" r:id="rId16"/>
-    <p:sldId id="265" r:id="rId17"/>
-    <p:sldId id="266" r:id="rId18"/>
-    <p:sldId id="267" r:id="rId19"/>
-    <p:sldId id="268" r:id="rId20"/>
-    <p:sldId id="269" r:id="rId21"/>
-    <p:sldId id="270" r:id="rId22"/>
-    <p:sldId id="271" r:id="rId23"/>
-    <p:sldId id="272" r:id="rId24"/>
-    <p:sldId id="273" r:id="rId25"/>
-    <p:sldId id="274" r:id="rId26"/>
-    <p:sldId id="275" r:id="rId27"/>
-    <p:sldId id="276" r:id="rId28"/>
-    <p:sldId id="277" r:id="rId29"/>
-    <p:sldId id="278" r:id="rId30"/>
-    <p:sldId id="279" r:id="rId31"/>
-    <p:sldId id="280" r:id="rId32"/>
-    <p:sldId id="281" r:id="rId33"/>
-    <p:sldId id="282" r:id="rId34"/>
-    <p:sldId id="283" r:id="rId35"/>
-    <p:sldId id="284" r:id="rId36" show="0"/>
-    <p:sldId id="285" r:id="rId37" show="0"/>
-    <p:sldId id="286" r:id="rId38" show="0"/>
-    <p:sldId id="287" r:id="rId39" show="0"/>
-    <p:sldId id="288" r:id="rId40" show="0"/>
-    <p:sldId id="289" r:id="rId41" show="0"/>
-    <p:sldId id="290" r:id="rId42" show="0"/>
-    <p:sldId id="291" r:id="rId43" show="0"/>
-    <p:sldId id="292" r:id="rId44" show="0"/>
-    <p:sldId id="293" r:id="rId45" show="0"/>
-    <p:sldId id="294" r:id="rId46" show="0"/>
+    <p:sldId id="256" r:id="rId2"/>
+    <p:sldId id="257" r:id="rId3"/>
+    <p:sldId id="258" r:id="rId4"/>
+    <p:sldId id="259" r:id="rId5"/>
+    <p:sldId id="260" r:id="rId6"/>
+    <p:sldId id="261" r:id="rId7"/>
+    <p:sldId id="262" r:id="rId8"/>
+    <p:sldId id="263" r:id="rId9"/>
+    <p:sldId id="264" r:id="rId10"/>
+    <p:sldId id="265" r:id="rId11"/>
+    <p:sldId id="266" r:id="rId12"/>
+    <p:sldId id="267" r:id="rId13"/>
+    <p:sldId id="268" r:id="rId14"/>
+    <p:sldId id="269" r:id="rId15"/>
+    <p:sldId id="270" r:id="rId16"/>
+    <p:sldId id="271" r:id="rId17"/>
+    <p:sldId id="272" r:id="rId18"/>
+    <p:sldId id="273" r:id="rId19"/>
+    <p:sldId id="274" r:id="rId20"/>
+    <p:sldId id="275" r:id="rId21"/>
+    <p:sldId id="276" r:id="rId22"/>
+    <p:sldId id="277" r:id="rId23"/>
+    <p:sldId id="278" r:id="rId24"/>
+    <p:sldId id="279" r:id="rId25"/>
+    <p:sldId id="280" r:id="rId26"/>
+    <p:sldId id="281" r:id="rId27"/>
+    <p:sldId id="282" r:id="rId28"/>
+    <p:sldId id="283" r:id="rId29"/>
+    <p:sldId id="284" r:id="rId30"/>
+    <p:sldId id="285" r:id="rId31"/>
+    <p:sldId id="286" r:id="rId32"/>
+    <p:sldId id="287" r:id="rId33"/>
+    <p:sldId id="288" r:id="rId34"/>
+    <p:sldId id="289" r:id="rId35"/>
+    <p:sldId id="290" r:id="rId36"/>
+    <p:sldId id="291" r:id="rId37"/>
+    <p:sldId id="292" r:id="rId38"/>
+    <p:sldId id="293" r:id="rId39"/>
+    <p:sldId id="294" r:id="rId40"/>
+    <p:sldId id="295" r:id="rId41"/>
+    <p:sldId id="296" r:id="rId42"/>
+    <p:sldId id="297" r:id="rId43"/>
   </p:sldIdLst>
-  <p:sldSz cx="12191695" cy="6858000" type="screen4x3"/>
+  <p:sldSz cx="12192000" cy="6858000"/>
   <p:notesSz cx="6858000" cy="9144000"/>
   <p:defaultTextStyle>
     <a:defPPr>
@@ -142,11 +148,27 @@
       </a:defRPr>
     </a:lvl9pPr>
   </p:defaultTextStyle>
+  <p:extLst>
+    <p:ext uri="{EFAFB233-063F-42B5-8137-9DF3F51BA10A}">
+      <p15:sldGuideLst xmlns:p15="http://schemas.microsoft.com/office/powerpoint/2012/main">
+        <p15:guide id="1" orient="horz" pos="2160">
+          <p15:clr>
+            <a:srgbClr val="A4A3A4"/>
+          </p15:clr>
+        </p15:guide>
+        <p15:guide id="2" pos="2880">
+          <p15:clr>
+            <a:srgbClr val="A4A3A4"/>
+          </p15:clr>
+        </p15:guide>
+      </p15:sldGuideLst>
+    </p:ext>
+  </p:extLst>
 </p:presentation>
 </file>
 
 <file path=ppt/notesMasters/notesMaster1.xml><?xml version="1.0" encoding="utf-8"?>
-<p:notesMaster xmlns:a="http://schemas.openxmlformats.org/drawingml/2006/main" xmlns:p="http://schemas.openxmlformats.org/presentationml/2006/main" xmlns:r="http://schemas.openxmlformats.org/officeDocument/2006/relationships">
+<p:notesMaster xmlns:a="http://schemas.openxmlformats.org/drawingml/2006/main" xmlns:r="http://schemas.openxmlformats.org/officeDocument/2006/relationships" xmlns:p="http://schemas.openxmlformats.org/presentationml/2006/main">
   <p:cSld>
     <p:bg>
       <p:bgRef idx="1001">
@@ -167,241 +189,16 @@
           <a:chExt cx="0" cy="0"/>
         </a:xfrm>
       </p:grpSpPr>
-      <p:sp>
-        <p:nvSpPr>
-          <p:cNvPr id="2" name="Header Placeholder 1"/>
-          <p:cNvSpPr>
-            <a:spLocks noGrp="1"/>
-          </p:cNvSpPr>
-          <p:nvPr>
-            <p:ph type="hdr" sz="quarter"/>
-          </p:nvPr>
-        </p:nvSpPr>
-        <p:spPr>
-          <a:xfrm>
-            <a:off x="0" y="0"/>
-            <a:ext cx="2971800" cy="457200"/>
-          </a:xfrm>
-          <a:prstGeom prst="rect">
-            <a:avLst/>
-          </a:prstGeom>
-        </p:spPr>
-        <p:txBody>
-          <a:bodyPr vert="horz" lIns="91440" tIns="45720" rIns="91440" bIns="45720" rtlCol="0"/>
-          <a:lstStyle>
-            <a:lvl1pPr algn="l">
-              <a:defRPr sz="1200"/>
-            </a:lvl1pPr>
-          </a:lstStyle>
-          <a:p>
-            <a:endParaRPr lang="en-US"/>
-          </a:p>
-        </p:txBody>
-      </p:sp>
-      <p:sp>
-        <p:nvSpPr>
-          <p:cNvPr id="3" name="Date Placeholder 2"/>
-          <p:cNvSpPr>
-            <a:spLocks noGrp="1"/>
-          </p:cNvSpPr>
-          <p:nvPr>
-            <p:ph type="dt" idx="1"/>
-          </p:nvPr>
-        </p:nvSpPr>
-        <p:spPr>
-          <a:xfrm>
-            <a:off x="3884613" y="0"/>
-            <a:ext cx="2971800" cy="457200"/>
-          </a:xfrm>
-          <a:prstGeom prst="rect">
-            <a:avLst/>
-          </a:prstGeom>
-        </p:spPr>
-        <p:txBody>
-          <a:bodyPr vert="horz" lIns="91440" tIns="45720" rIns="91440" bIns="45720" rtlCol="0"/>
-          <a:lstStyle>
-            <a:lvl1pPr algn="r">
-              <a:defRPr sz="1200"/>
-            </a:lvl1pPr>
-          </a:lstStyle>
-          <a:p>
-            <a:fld id="{0F89C1C7-3DCD-1040-A9CF-14679D8B5DDD}" type="datetimeFigureOut">
-              <a:rPr lang="en-US" smtClean="0"/>
-              <a:t>10/17/16</a:t>
-            </a:fld>
-            <a:endParaRPr lang="en-US"/>
-          </a:p>
-        </p:txBody>
-      </p:sp>
-      <p:sp>
-        <p:nvSpPr>
-          <p:cNvPr id="4" name="Slide Image Placeholder 3"/>
-          <p:cNvSpPr>
-            <a:spLocks noGrp="1" noRot="1" noChangeAspect="1"/>
-          </p:cNvSpPr>
-          <p:nvPr>
-            <p:ph type="sldImg" idx="2"/>
-          </p:nvPr>
-        </p:nvSpPr>
-        <p:spPr>
-          <a:xfrm>
-            <a:off x="1143000" y="685800"/>
-            <a:ext cx="4572000" cy="3429000"/>
-          </a:xfrm>
-          <a:prstGeom prst="rect">
-            <a:avLst/>
-          </a:prstGeom>
-          <a:noFill/>
-          <a:ln w="12700">
-            <a:solidFill>
-              <a:prstClr val="black"/>
-            </a:solidFill>
-          </a:ln>
-        </p:spPr>
-        <p:txBody>
-          <a:bodyPr vert="horz" lIns="91440" tIns="45720" rIns="91440" bIns="45720" rtlCol="0" anchor="ctr"/>
-          <a:lstStyle/>
-          <a:p>
-            <a:endParaRPr lang="en-US"/>
-          </a:p>
-        </p:txBody>
-      </p:sp>
-      <p:sp>
-        <p:nvSpPr>
-          <p:cNvPr id="5" name="Notes Placeholder 4"/>
-          <p:cNvSpPr>
-            <a:spLocks noGrp="1"/>
-          </p:cNvSpPr>
-          <p:nvPr>
-            <p:ph type="body" sz="quarter" idx="3"/>
-          </p:nvPr>
-        </p:nvSpPr>
-        <p:spPr>
-          <a:xfrm>
-            <a:off x="685800" y="4343400"/>
-            <a:ext cx="5486400" cy="4114800"/>
-          </a:xfrm>
-          <a:prstGeom prst="rect">
-            <a:avLst/>
-          </a:prstGeom>
-        </p:spPr>
-        <p:txBody>
-          <a:bodyPr vert="horz" lIns="91440" tIns="45720" rIns="91440" bIns="45720" rtlCol="0"/>
-          <a:lstStyle/>
-          <a:p>
-            <a:pPr lvl="0"/>
-            <a:r>
-              <a:rPr lang="en-US" smtClean="0"/>
-              <a:t>Click to edit Master text styles</a:t>
-            </a:r>
-          </a:p>
-          <a:p>
-            <a:pPr lvl="1"/>
-            <a:r>
-              <a:rPr lang="en-US" smtClean="0"/>
-              <a:t>Second level</a:t>
-            </a:r>
-          </a:p>
-          <a:p>
-            <a:pPr lvl="2"/>
-            <a:r>
-              <a:rPr lang="en-US" smtClean="0"/>
-              <a:t>Third level</a:t>
-            </a:r>
-          </a:p>
-          <a:p>
-            <a:pPr lvl="3"/>
-            <a:r>
-              <a:rPr lang="en-US" smtClean="0"/>
-              <a:t>Fourth level</a:t>
-            </a:r>
-          </a:p>
-          <a:p>
-            <a:pPr lvl="4"/>
-            <a:r>
-              <a:rPr lang="en-US" smtClean="0"/>
-              <a:t>Fifth level</a:t>
-            </a:r>
-            <a:endParaRPr lang="en-US"/>
-          </a:p>
-        </p:txBody>
-      </p:sp>
-      <p:sp>
-        <p:nvSpPr>
-          <p:cNvPr id="6" name="Footer Placeholder 5"/>
-          <p:cNvSpPr>
-            <a:spLocks noGrp="1"/>
-          </p:cNvSpPr>
-          <p:nvPr>
-            <p:ph type="ftr" sz="quarter" idx="4"/>
-          </p:nvPr>
-        </p:nvSpPr>
-        <p:spPr>
-          <a:xfrm>
-            <a:off x="0" y="8685213"/>
-            <a:ext cx="2971800" cy="457200"/>
-          </a:xfrm>
-          <a:prstGeom prst="rect">
-            <a:avLst/>
-          </a:prstGeom>
-        </p:spPr>
-        <p:txBody>
-          <a:bodyPr vert="horz" lIns="91440" tIns="45720" rIns="91440" bIns="45720" rtlCol="0" anchor="b"/>
-          <a:lstStyle>
-            <a:lvl1pPr algn="l">
-              <a:defRPr sz="1200"/>
-            </a:lvl1pPr>
-          </a:lstStyle>
-          <a:p>
-            <a:endParaRPr lang="en-US"/>
-          </a:p>
-        </p:txBody>
-      </p:sp>
-      <p:sp>
-        <p:nvSpPr>
-          <p:cNvPr id="7" name="Slide Number Placeholder 6"/>
-          <p:cNvSpPr>
-            <a:spLocks noGrp="1"/>
-          </p:cNvSpPr>
-          <p:nvPr>
-            <p:ph type="sldNum" sz="quarter" idx="5"/>
-          </p:nvPr>
-        </p:nvSpPr>
-        <p:spPr>
-          <a:xfrm>
-            <a:off x="3884613" y="8685213"/>
-            <a:ext cx="2971800" cy="457200"/>
-          </a:xfrm>
-          <a:prstGeom prst="rect">
-            <a:avLst/>
-          </a:prstGeom>
-        </p:spPr>
-        <p:txBody>
-          <a:bodyPr vert="horz" lIns="91440" tIns="45720" rIns="91440" bIns="45720" rtlCol="0" anchor="b"/>
-          <a:lstStyle>
-            <a:lvl1pPr algn="r">
-              <a:defRPr sz="1200"/>
-            </a:lvl1pPr>
-          </a:lstStyle>
-          <a:p>
-            <a:fld id="{BB5E49A5-4136-284D-997B-48E1D791AD67}" type="slidenum">
-              <a:rPr lang="en-US" smtClean="0"/>
-              <a:t>‹#›</a:t>
-            </a:fld>
-            <a:endParaRPr lang="en-US"/>
-          </a:p>
-        </p:txBody>
-      </p:sp>
     </p:spTree>
     <p:extLst>
       <p:ext uri="{BB962C8B-B14F-4D97-AF65-F5344CB8AC3E}">
-        <p14:creationId xmlns:p14="http://schemas.microsoft.com/office/powerpoint/2010/main" val="2623252185"/>
+        <p14:creationId xmlns:p14="http://schemas.microsoft.com/office/powerpoint/2010/main" val="596921325"/>
       </p:ext>
     </p:extLst>
   </p:cSld>
   <p:clrMap bg1="lt1" tx1="dk1" bg2="lt2" tx2="dk2" accent1="accent1" accent2="accent2" accent3="accent3" accent4="accent4" accent5="accent5" accent6="accent6" hlink="hlink" folHlink="folHlink"/>
   <p:notesStyle>
-    <a:lvl1pPr marL="0" algn="l" defTabSz="457200" rtl="0" eaLnBrk="1" latinLnBrk="0" hangingPunct="1">
+    <a:lvl1pPr marL="0" algn="l" defTabSz="914400" rtl="0" eaLnBrk="1" latinLnBrk="0" hangingPunct="1">
       <a:defRPr sz="1200" kern="1200">
         <a:solidFill>
           <a:schemeClr val="tx1"/>
@@ -411,7 +208,7 @@
         <a:cs typeface="+mn-cs"/>
       </a:defRPr>
     </a:lvl1pPr>
-    <a:lvl2pPr marL="457200" algn="l" defTabSz="457200" rtl="0" eaLnBrk="1" latinLnBrk="0" hangingPunct="1">
+    <a:lvl2pPr marL="457200" algn="l" defTabSz="914400" rtl="0" eaLnBrk="1" latinLnBrk="0" hangingPunct="1">
       <a:defRPr sz="1200" kern="1200">
         <a:solidFill>
           <a:schemeClr val="tx1"/>
@@ -421,7 +218,7 @@
         <a:cs typeface="+mn-cs"/>
       </a:defRPr>
     </a:lvl2pPr>
-    <a:lvl3pPr marL="914400" algn="l" defTabSz="457200" rtl="0" eaLnBrk="1" latinLnBrk="0" hangingPunct="1">
+    <a:lvl3pPr marL="914400" algn="l" defTabSz="914400" rtl="0" eaLnBrk="1" latinLnBrk="0" hangingPunct="1">
       <a:defRPr sz="1200" kern="1200">
         <a:solidFill>
           <a:schemeClr val="tx1"/>
@@ -431,7 +228,7 @@
         <a:cs typeface="+mn-cs"/>
       </a:defRPr>
     </a:lvl3pPr>
-    <a:lvl4pPr marL="1371600" algn="l" defTabSz="457200" rtl="0" eaLnBrk="1" latinLnBrk="0" hangingPunct="1">
+    <a:lvl4pPr marL="1371600" algn="l" defTabSz="914400" rtl="0" eaLnBrk="1" latinLnBrk="0" hangingPunct="1">
       <a:defRPr sz="1200" kern="1200">
         <a:solidFill>
           <a:schemeClr val="tx1"/>
@@ -441,7 +238,7 @@
         <a:cs typeface="+mn-cs"/>
       </a:defRPr>
     </a:lvl4pPr>
-    <a:lvl5pPr marL="1828800" algn="l" defTabSz="457200" rtl="0" eaLnBrk="1" latinLnBrk="0" hangingPunct="1">
+    <a:lvl5pPr marL="1828800" algn="l" defTabSz="914400" rtl="0" eaLnBrk="1" latinLnBrk="0" hangingPunct="1">
       <a:defRPr sz="1200" kern="1200">
         <a:solidFill>
           <a:schemeClr val="tx1"/>
@@ -451,7 +248,7 @@
         <a:cs typeface="+mn-cs"/>
       </a:defRPr>
     </a:lvl5pPr>
-    <a:lvl6pPr marL="2286000" algn="l" defTabSz="457200" rtl="0" eaLnBrk="1" latinLnBrk="0" hangingPunct="1">
+    <a:lvl6pPr marL="2286000" algn="l" defTabSz="914400" rtl="0" eaLnBrk="1" latinLnBrk="0" hangingPunct="1">
       <a:defRPr sz="1200" kern="1200">
         <a:solidFill>
           <a:schemeClr val="tx1"/>
@@ -461,7 +258,7 @@
         <a:cs typeface="+mn-cs"/>
       </a:defRPr>
     </a:lvl6pPr>
-    <a:lvl7pPr marL="2743200" algn="l" defTabSz="457200" rtl="0" eaLnBrk="1" latinLnBrk="0" hangingPunct="1">
+    <a:lvl7pPr marL="2743200" algn="l" defTabSz="914400" rtl="0" eaLnBrk="1" latinLnBrk="0" hangingPunct="1">
       <a:defRPr sz="1200" kern="1200">
         <a:solidFill>
           <a:schemeClr val="tx1"/>
@@ -471,7 +268,7 @@
         <a:cs typeface="+mn-cs"/>
       </a:defRPr>
     </a:lvl7pPr>
-    <a:lvl8pPr marL="3200400" algn="l" defTabSz="457200" rtl="0" eaLnBrk="1" latinLnBrk="0" hangingPunct="1">
+    <a:lvl8pPr marL="3200400" algn="l" defTabSz="914400" rtl="0" eaLnBrk="1" latinLnBrk="0" hangingPunct="1">
       <a:defRPr sz="1200" kern="1200">
         <a:solidFill>
           <a:schemeClr val="tx1"/>
@@ -481,7 +278,7 @@
         <a:cs typeface="+mn-cs"/>
       </a:defRPr>
     </a:lvl8pPr>
-    <a:lvl9pPr marL="3657600" algn="l" defTabSz="457200" rtl="0" eaLnBrk="1" latinLnBrk="0" hangingPunct="1">
+    <a:lvl9pPr marL="3657600" algn="l" defTabSz="914400" rtl="0" eaLnBrk="1" latinLnBrk="0" hangingPunct="1">
       <a:defRPr sz="1200" kern="1200">
         <a:solidFill>
           <a:schemeClr val="tx1"/>
@@ -496,7 +293,7 @@
 </file>
 
 <file path=ppt/notesSlides/notesSlide1.xml><?xml version="1.0" encoding="utf-8"?>
-<p:notes xmlns:a="http://schemas.openxmlformats.org/drawingml/2006/main" xmlns:p="http://schemas.openxmlformats.org/presentationml/2006/main" xmlns:r="http://schemas.openxmlformats.org/officeDocument/2006/relationships">
+<p:notes xmlns:a="http://schemas.openxmlformats.org/drawingml/2006/main" xmlns:r="http://schemas.openxmlformats.org/officeDocument/2006/relationships" xmlns:p="http://schemas.openxmlformats.org/presentationml/2006/main">
   <p:cSld>
     <p:spTree>
       <p:nvGrpSpPr>
@@ -516,7 +313,7 @@
         <p:nvSpPr>
           <p:cNvPr id="2" name="Slide Image Placeholder 1"/>
           <p:cNvSpPr>
-            <a:spLocks noGrp="1"/>
+            <a:spLocks noGrp="1" noRot="1" noChangeAspect="1"/>
           </p:cNvSpPr>
           <p:nvPr>
             <p:ph type="sldImg" idx="2"/>
@@ -531,7 +328,7 @@
             <a:spLocks noGrp="1"/>
           </p:cNvSpPr>
           <p:nvPr>
-            <p:ph type="body" idx="3" sz="quarter"/>
+            <p:ph type="body" sz="quarter" idx="3"/>
           </p:nvPr>
         </p:nvSpPr>
         <p:spPr/>
@@ -552,7 +349,7 @@
             <a:spLocks noGrp="1"/>
           </p:cNvSpPr>
           <p:nvPr>
-            <p:ph type="sldNum" idx="5" sz="quarter"/>
+            <p:ph type="sldNum" sz="quarter" idx="5"/>
           </p:nvPr>
         </p:nvSpPr>
         <p:spPr/>
@@ -565,8 +362,8 @@
 </p:notes>
 </file>
 
-<file path=ppt/notesSlides/notesSlide2.xml><?xml version="1.0" encoding="utf-8"?>
-<p:notes xmlns:a="http://schemas.openxmlformats.org/drawingml/2006/main" xmlns:p="http://schemas.openxmlformats.org/presentationml/2006/main" xmlns:r="http://schemas.openxmlformats.org/officeDocument/2006/relationships">
+<file path=ppt/notesSlides/notesSlide10.xml><?xml version="1.0" encoding="utf-8"?>
+<p:notes xmlns:a="http://schemas.openxmlformats.org/drawingml/2006/main" xmlns:r="http://schemas.openxmlformats.org/officeDocument/2006/relationships" xmlns:p="http://schemas.openxmlformats.org/presentationml/2006/main">
   <p:cSld>
     <p:spTree>
       <p:nvGrpSpPr>
@@ -586,7 +383,7 @@
         <p:nvSpPr>
           <p:cNvPr id="2" name="Slide Image Placeholder 1"/>
           <p:cNvSpPr>
-            <a:spLocks noGrp="1"/>
+            <a:spLocks noGrp="1" noRot="1" noChangeAspect="1"/>
           </p:cNvSpPr>
           <p:nvPr>
             <p:ph type="sldImg" idx="2"/>
@@ -601,7 +398,7 @@
             <a:spLocks noGrp="1"/>
           </p:cNvSpPr>
           <p:nvPr>
-            <p:ph type="body" idx="3" sz="quarter"/>
+            <p:ph type="body" sz="quarter" idx="3"/>
           </p:nvPr>
         </p:nvSpPr>
         <p:spPr/>
@@ -610,7 +407,7 @@
           <a:lstStyle/>
           <a:p>
             <a:r>
-              <a:t>~8–10 minute defence. Backup slides follow for Q&amp;A.</a:t>
+              <a:t>Thank the panel. Offer live demo if time allows.</a:t>
             </a:r>
           </a:p>
         </p:txBody>
@@ -622,7 +419,7 @@
             <a:spLocks noGrp="1"/>
           </p:cNvSpPr>
           <p:nvPr>
-            <p:ph type="sldNum" idx="5" sz="quarter"/>
+            <p:ph type="sldNum" sz="quarter" idx="5"/>
           </p:nvPr>
         </p:nvSpPr>
         <p:spPr/>
@@ -635,8 +432,8 @@
 </p:notes>
 </file>
 
-<file path=ppt/notesSlides/notesSlide3.xml><?xml version="1.0" encoding="utf-8"?>
-<p:notes xmlns:a="http://schemas.openxmlformats.org/drawingml/2006/main" xmlns:p="http://schemas.openxmlformats.org/presentationml/2006/main" xmlns:r="http://schemas.openxmlformats.org/officeDocument/2006/relationships">
+<file path=ppt/notesSlides/notesSlide11.xml><?xml version="1.0" encoding="utf-8"?>
+<p:notes xmlns:a="http://schemas.openxmlformats.org/drawingml/2006/main" xmlns:r="http://schemas.openxmlformats.org/officeDocument/2006/relationships" xmlns:p="http://schemas.openxmlformats.org/presentationml/2006/main">
   <p:cSld>
     <p:spTree>
       <p:nvGrpSpPr>
@@ -656,7 +453,7 @@
         <p:nvSpPr>
           <p:cNvPr id="2" name="Slide Image Placeholder 1"/>
           <p:cNvSpPr>
-            <a:spLocks noGrp="1"/>
+            <a:spLocks noGrp="1" noRot="1" noChangeAspect="1"/>
           </p:cNvSpPr>
           <p:nvPr>
             <p:ph type="sldImg" idx="2"/>
@@ -671,7 +468,7 @@
             <a:spLocks noGrp="1"/>
           </p:cNvSpPr>
           <p:nvPr>
-            <p:ph type="body" idx="3" sz="quarter"/>
+            <p:ph type="body" sz="quarter" idx="3"/>
           </p:nvPr>
         </p:nvSpPr>
         <p:spPr/>
@@ -680,7 +477,7 @@
           <a:lstStyle/>
           <a:p>
             <a:r>
-              <a:t>Keep to 60 seconds. Make the problem relatable.</a:t>
+              <a:t>Pause for questions. Have demo ready at http://localhost.</a:t>
             </a:r>
           </a:p>
         </p:txBody>
@@ -692,7 +489,7 @@
             <a:spLocks noGrp="1"/>
           </p:cNvSpPr>
           <p:nvPr>
-            <p:ph type="sldNum" idx="5" sz="quarter"/>
+            <p:ph type="sldNum" sz="quarter" idx="5"/>
           </p:nvPr>
         </p:nvSpPr>
         <p:spPr/>
@@ -705,8 +502,8 @@
 </p:notes>
 </file>
 
-<file path=ppt/notesSlides/notesSlide4.xml><?xml version="1.0" encoding="utf-8"?>
-<p:notes xmlns:a="http://schemas.openxmlformats.org/drawingml/2006/main" xmlns:p="http://schemas.openxmlformats.org/presentationml/2006/main" xmlns:r="http://schemas.openxmlformats.org/officeDocument/2006/relationships">
+<file path=ppt/notesSlides/notesSlide2.xml><?xml version="1.0" encoding="utf-8"?>
+<p:notes xmlns:a="http://schemas.openxmlformats.org/drawingml/2006/main" xmlns:r="http://schemas.openxmlformats.org/officeDocument/2006/relationships" xmlns:p="http://schemas.openxmlformats.org/presentationml/2006/main">
   <p:cSld>
     <p:spTree>
       <p:nvGrpSpPr>
@@ -726,7 +523,7 @@
         <p:nvSpPr>
           <p:cNvPr id="2" name="Slide Image Placeholder 1"/>
           <p:cNvSpPr>
-            <a:spLocks noGrp="1"/>
+            <a:spLocks noGrp="1" noRot="1" noChangeAspect="1"/>
           </p:cNvSpPr>
           <p:nvPr>
             <p:ph type="sldImg" idx="2"/>
@@ -741,7 +538,7 @@
             <a:spLocks noGrp="1"/>
           </p:cNvSpPr>
           <p:nvPr>
-            <p:ph type="body" idx="3" sz="quarter"/>
+            <p:ph type="body" sz="quarter" idx="3"/>
           </p:nvPr>
         </p:nvSpPr>
         <p:spPr/>
@@ -750,7 +547,7 @@
           <a:lstStyle/>
           <a:p>
             <a:r>
-              <a:t>Walk through each tier. Emphasise Nginx offloads static files, Django handles business logic, PostgreSQL is source of truth, Redis speeds up sessions and worker search.</a:t>
+              <a:t>~8–10 minute defence. Backup slides follow for Q&amp;A.</a:t>
             </a:r>
           </a:p>
         </p:txBody>
@@ -762,7 +559,7 @@
             <a:spLocks noGrp="1"/>
           </p:cNvSpPr>
           <p:nvPr>
-            <p:ph type="sldNum" idx="5" sz="quarter"/>
+            <p:ph type="sldNum" sz="quarter" idx="5"/>
           </p:nvPr>
         </p:nvSpPr>
         <p:spPr/>
@@ -775,8 +572,8 @@
 </p:notes>
 </file>
 
-<file path=ppt/notesSlides/notesSlide5.xml><?xml version="1.0" encoding="utf-8"?>
-<p:notes xmlns:a="http://schemas.openxmlformats.org/drawingml/2006/main" xmlns:p="http://schemas.openxmlformats.org/presentationml/2006/main" xmlns:r="http://schemas.openxmlformats.org/officeDocument/2006/relationships">
+<file path=ppt/notesSlides/notesSlide3.xml><?xml version="1.0" encoding="utf-8"?>
+<p:notes xmlns:a="http://schemas.openxmlformats.org/drawingml/2006/main" xmlns:r="http://schemas.openxmlformats.org/officeDocument/2006/relationships" xmlns:p="http://schemas.openxmlformats.org/presentationml/2006/main">
   <p:cSld>
     <p:spTree>
       <p:nvGrpSpPr>
@@ -796,7 +593,7 @@
         <p:nvSpPr>
           <p:cNvPr id="2" name="Slide Image Placeholder 1"/>
           <p:cNvSpPr>
-            <a:spLocks noGrp="1"/>
+            <a:spLocks noGrp="1" noRot="1" noChangeAspect="1"/>
           </p:cNvSpPr>
           <p:nvPr>
             <p:ph type="sldImg" idx="2"/>
@@ -811,7 +608,7 @@
             <a:spLocks noGrp="1"/>
           </p:cNvSpPr>
           <p:nvPr>
-            <p:ph type="body" idx="3" sz="quarter"/>
+            <p:ph type="body" sz="quarter" idx="3"/>
           </p:nvPr>
         </p:nvSpPr>
         <p:spPr/>
@@ -820,7 +617,7 @@
           <a:lstStyle/>
           <a:p>
             <a:r>
-              <a:t>Key differentiator. Mention Decimal + atomic DB transactions.</a:t>
+              <a:t>Keep to 60 seconds. Make the problem relatable.</a:t>
             </a:r>
           </a:p>
         </p:txBody>
@@ -832,7 +629,7 @@
             <a:spLocks noGrp="1"/>
           </p:cNvSpPr>
           <p:nvPr>
-            <p:ph type="sldNum" idx="5" sz="quarter"/>
+            <p:ph type="sldNum" sz="quarter" idx="5"/>
           </p:nvPr>
         </p:nvSpPr>
         <p:spPr/>
@@ -845,8 +642,8 @@
 </p:notes>
 </file>
 
-<file path=ppt/notesSlides/notesSlide6.xml><?xml version="1.0" encoding="utf-8"?>
-<p:notes xmlns:a="http://schemas.openxmlformats.org/drawingml/2006/main" xmlns:p="http://schemas.openxmlformats.org/presentationml/2006/main" xmlns:r="http://schemas.openxmlformats.org/officeDocument/2006/relationships">
+<file path=ppt/notesSlides/notesSlide4.xml><?xml version="1.0" encoding="utf-8"?>
+<p:notes xmlns:a="http://schemas.openxmlformats.org/drawingml/2006/main" xmlns:r="http://schemas.openxmlformats.org/officeDocument/2006/relationships" xmlns:p="http://schemas.openxmlformats.org/presentationml/2006/main">
   <p:cSld>
     <p:spTree>
       <p:nvGrpSpPr>
@@ -866,7 +663,7 @@
         <p:nvSpPr>
           <p:cNvPr id="2" name="Slide Image Placeholder 1"/>
           <p:cNvSpPr>
-            <a:spLocks noGrp="1"/>
+            <a:spLocks noGrp="1" noRot="1" noChangeAspect="1"/>
           </p:cNvSpPr>
           <p:nvPr>
             <p:ph type="sldImg" idx="2"/>
@@ -881,7 +678,7 @@
             <a:spLocks noGrp="1"/>
           </p:cNvSpPr>
           <p:nvPr>
-            <p:ph type="body" idx="3" sz="quarter"/>
+            <p:ph type="body" sz="quarter" idx="3"/>
           </p:nvPr>
         </p:nvSpPr>
         <p:spPr/>
@@ -890,7 +687,7 @@
           <a:lstStyle/>
           <a:p>
             <a:r>
-              <a:t>Full rubric table is in the technical report Appendix D.</a:t>
+              <a:t>Walk through formulas. Charts on next slides show worker job thresholds and platform crossover.</a:t>
             </a:r>
           </a:p>
         </p:txBody>
@@ -902,7 +699,7 @@
             <a:spLocks noGrp="1"/>
           </p:cNvSpPr>
           <p:nvPr>
-            <p:ph type="sldNum" idx="5" sz="quarter"/>
+            <p:ph type="sldNum" sz="quarter" idx="5"/>
           </p:nvPr>
         </p:nvSpPr>
         <p:spPr/>
@@ -915,8 +712,8 @@
 </p:notes>
 </file>
 
-<file path=ppt/notesSlides/notesSlide7.xml><?xml version="1.0" encoding="utf-8"?>
-<p:notes xmlns:a="http://schemas.openxmlformats.org/drawingml/2006/main" xmlns:p="http://schemas.openxmlformats.org/presentationml/2006/main" xmlns:r="http://schemas.openxmlformats.org/officeDocument/2006/relationships">
+<file path=ppt/notesSlides/notesSlide5.xml><?xml version="1.0" encoding="utf-8"?>
+<p:notes xmlns:a="http://schemas.openxmlformats.org/drawingml/2006/main" xmlns:r="http://schemas.openxmlformats.org/officeDocument/2006/relationships" xmlns:p="http://schemas.openxmlformats.org/presentationml/2006/main">
   <p:cSld>
     <p:spTree>
       <p:nvGrpSpPr>
@@ -936,7 +733,7 @@
         <p:nvSpPr>
           <p:cNvPr id="2" name="Slide Image Placeholder 1"/>
           <p:cNvSpPr>
-            <a:spLocks noGrp="1"/>
+            <a:spLocks noGrp="1" noRot="1" noChangeAspect="1"/>
           </p:cNvSpPr>
           <p:nvPr>
             <p:ph type="sldImg" idx="2"/>
@@ -951,7 +748,7 @@
             <a:spLocks noGrp="1"/>
           </p:cNvSpPr>
           <p:nvPr>
-            <p:ph type="body" idx="3" sz="quarter"/>
+            <p:ph type="body" sz="quarter" idx="3"/>
           </p:nvPr>
         </p:nvSpPr>
         <p:spPr/>
@@ -960,7 +757,7 @@
           <a:lstStyle/>
           <a:p>
             <a:r>
-              <a:t>Thank the panel. Offer live demo if time allows.</a:t>
+              <a:t>Shaded red = deficit, green = surplus. Dotted line = phased fixed-cost baseline.</a:t>
             </a:r>
           </a:p>
         </p:txBody>
@@ -972,7 +769,7 @@
             <a:spLocks noGrp="1"/>
           </p:cNvSpPr>
           <p:nvPr>
-            <p:ph type="sldNum" idx="5" sz="quarter"/>
+            <p:ph type="sldNum" sz="quarter" idx="5"/>
           </p:nvPr>
         </p:nvSpPr>
         <p:spPr/>
@@ -985,8 +782,8 @@
 </p:notes>
 </file>
 
-<file path=ppt/notesSlides/notesSlide8.xml><?xml version="1.0" encoding="utf-8"?>
-<p:notes xmlns:a="http://schemas.openxmlformats.org/drawingml/2006/main" xmlns:p="http://schemas.openxmlformats.org/presentationml/2006/main" xmlns:r="http://schemas.openxmlformats.org/officeDocument/2006/relationships">
+<file path=ppt/notesSlides/notesSlide6.xml><?xml version="1.0" encoding="utf-8"?>
+<p:notes xmlns:a="http://schemas.openxmlformats.org/drawingml/2006/main" xmlns:r="http://schemas.openxmlformats.org/officeDocument/2006/relationships" xmlns:p="http://schemas.openxmlformats.org/presentationml/2006/main">
   <p:cSld>
     <p:spTree>
       <p:nvGrpSpPr>
@@ -1006,7 +803,7 @@
         <p:nvSpPr>
           <p:cNvPr id="2" name="Slide Image Placeholder 1"/>
           <p:cNvSpPr>
-            <a:spLocks noGrp="1"/>
+            <a:spLocks noGrp="1" noRot="1" noChangeAspect="1"/>
           </p:cNvSpPr>
           <p:nvPr>
             <p:ph type="sldImg" idx="2"/>
@@ -1021,7 +818,7 @@
             <a:spLocks noGrp="1"/>
           </p:cNvSpPr>
           <p:nvPr>
-            <p:ph type="body" idx="3" sz="quarter"/>
+            <p:ph type="body" sz="quarter" idx="3"/>
           </p:nvPr>
         </p:nvSpPr>
         <p:spPr/>
@@ -1030,7 +827,7 @@
           <a:lstStyle/>
           <a:p>
             <a:r>
-              <a:t>Pause for questions. Have demo ready at http://localhost.</a:t>
+              <a:t>At $200 avg job: Pro ≈15 jobs, Premium ≈15 jobs. Featured placement adds upside.</a:t>
             </a:r>
           </a:p>
         </p:txBody>
@@ -1042,7 +839,217 @@
             <a:spLocks noGrp="1"/>
           </p:cNvSpPr>
           <p:nvPr>
-            <p:ph type="sldNum" idx="5" sz="quarter"/>
+            <p:ph type="sldNum" sz="quarter" idx="5"/>
+          </p:nvPr>
+        </p:nvSpPr>
+        <p:spPr/>
+      </p:sp>
+    </p:spTree>
+  </p:cSld>
+  <p:clrMapOvr>
+    <a:masterClrMapping/>
+  </p:clrMapOvr>
+</p:notes>
+</file>
+
+<file path=ppt/notesSlides/notesSlide7.xml><?xml version="1.0" encoding="utf-8"?>
+<p:notes xmlns:a="http://schemas.openxmlformats.org/drawingml/2006/main" xmlns:r="http://schemas.openxmlformats.org/officeDocument/2006/relationships" xmlns:p="http://schemas.openxmlformats.org/presentationml/2006/main">
+  <p:cSld>
+    <p:spTree>
+      <p:nvGrpSpPr>
+        <p:cNvPr id="1" name=""/>
+        <p:cNvGrpSpPr/>
+        <p:nvPr/>
+      </p:nvGrpSpPr>
+      <p:grpSpPr>
+        <a:xfrm>
+          <a:off x="0" y="0"/>
+          <a:ext cx="0" cy="0"/>
+          <a:chOff x="0" y="0"/>
+          <a:chExt cx="0" cy="0"/>
+        </a:xfrm>
+      </p:grpSpPr>
+      <p:sp>
+        <p:nvSpPr>
+          <p:cNvPr id="2" name="Slide Image Placeholder 1"/>
+          <p:cNvSpPr>
+            <a:spLocks noGrp="1" noRot="1" noChangeAspect="1"/>
+          </p:cNvSpPr>
+          <p:nvPr>
+            <p:ph type="sldImg" idx="2"/>
+          </p:nvPr>
+        </p:nvSpPr>
+        <p:spPr/>
+      </p:sp>
+      <p:sp>
+        <p:nvSpPr>
+          <p:cNvPr id="3" name="Notes Placeholder 2"/>
+          <p:cNvSpPr>
+            <a:spLocks noGrp="1"/>
+          </p:cNvSpPr>
+          <p:nvPr>
+            <p:ph type="body" sz="quarter" idx="3"/>
+          </p:nvPr>
+        </p:nvSpPr>
+        <p:spPr/>
+        <p:txBody>
+          <a:bodyPr/>
+          <a:lstStyle/>
+          <a:p>
+            <a:r>
+              <a:t>Walk through each tier. Emphasise Nginx offloads static files, Django handles business logic, PostgreSQL is source of truth, Redis speeds up sessions and worker search.</a:t>
+            </a:r>
+          </a:p>
+        </p:txBody>
+      </p:sp>
+      <p:sp>
+        <p:nvSpPr>
+          <p:cNvPr id="4" name="Slide Number Placeholder 3"/>
+          <p:cNvSpPr>
+            <a:spLocks noGrp="1"/>
+          </p:cNvSpPr>
+          <p:nvPr>
+            <p:ph type="sldNum" sz="quarter" idx="5"/>
+          </p:nvPr>
+        </p:nvSpPr>
+        <p:spPr/>
+      </p:sp>
+    </p:spTree>
+  </p:cSld>
+  <p:clrMapOvr>
+    <a:masterClrMapping/>
+  </p:clrMapOvr>
+</p:notes>
+</file>
+
+<file path=ppt/notesSlides/notesSlide8.xml><?xml version="1.0" encoding="utf-8"?>
+<p:notes xmlns:a="http://schemas.openxmlformats.org/drawingml/2006/main" xmlns:r="http://schemas.openxmlformats.org/officeDocument/2006/relationships" xmlns:p="http://schemas.openxmlformats.org/presentationml/2006/main">
+  <p:cSld>
+    <p:spTree>
+      <p:nvGrpSpPr>
+        <p:cNvPr id="1" name=""/>
+        <p:cNvGrpSpPr/>
+        <p:nvPr/>
+      </p:nvGrpSpPr>
+      <p:grpSpPr>
+        <a:xfrm>
+          <a:off x="0" y="0"/>
+          <a:ext cx="0" cy="0"/>
+          <a:chOff x="0" y="0"/>
+          <a:chExt cx="0" cy="0"/>
+        </a:xfrm>
+      </p:grpSpPr>
+      <p:sp>
+        <p:nvSpPr>
+          <p:cNvPr id="2" name="Slide Image Placeholder 1"/>
+          <p:cNvSpPr>
+            <a:spLocks noGrp="1" noRot="1" noChangeAspect="1"/>
+          </p:cNvSpPr>
+          <p:nvPr>
+            <p:ph type="sldImg" idx="2"/>
+          </p:nvPr>
+        </p:nvSpPr>
+        <p:spPr/>
+      </p:sp>
+      <p:sp>
+        <p:nvSpPr>
+          <p:cNvPr id="3" name="Notes Placeholder 2"/>
+          <p:cNvSpPr>
+            <a:spLocks noGrp="1"/>
+          </p:cNvSpPr>
+          <p:nvPr>
+            <p:ph type="body" sz="quarter" idx="3"/>
+          </p:nvPr>
+        </p:nvSpPr>
+        <p:spPr/>
+        <p:txBody>
+          <a:bodyPr/>
+          <a:lstStyle/>
+          <a:p>
+            <a:r>
+              <a:t>Key differentiator. Mention Decimal + atomic DB transactions.</a:t>
+            </a:r>
+          </a:p>
+        </p:txBody>
+      </p:sp>
+      <p:sp>
+        <p:nvSpPr>
+          <p:cNvPr id="4" name="Slide Number Placeholder 3"/>
+          <p:cNvSpPr>
+            <a:spLocks noGrp="1"/>
+          </p:cNvSpPr>
+          <p:nvPr>
+            <p:ph type="sldNum" sz="quarter" idx="5"/>
+          </p:nvPr>
+        </p:nvSpPr>
+        <p:spPr/>
+      </p:sp>
+    </p:spTree>
+  </p:cSld>
+  <p:clrMapOvr>
+    <a:masterClrMapping/>
+  </p:clrMapOvr>
+</p:notes>
+</file>
+
+<file path=ppt/notesSlides/notesSlide9.xml><?xml version="1.0" encoding="utf-8"?>
+<p:notes xmlns:a="http://schemas.openxmlformats.org/drawingml/2006/main" xmlns:r="http://schemas.openxmlformats.org/officeDocument/2006/relationships" xmlns:p="http://schemas.openxmlformats.org/presentationml/2006/main">
+  <p:cSld>
+    <p:spTree>
+      <p:nvGrpSpPr>
+        <p:cNvPr id="1" name=""/>
+        <p:cNvGrpSpPr/>
+        <p:nvPr/>
+      </p:nvGrpSpPr>
+      <p:grpSpPr>
+        <a:xfrm>
+          <a:off x="0" y="0"/>
+          <a:ext cx="0" cy="0"/>
+          <a:chOff x="0" y="0"/>
+          <a:chExt cx="0" cy="0"/>
+        </a:xfrm>
+      </p:grpSpPr>
+      <p:sp>
+        <p:nvSpPr>
+          <p:cNvPr id="2" name="Slide Image Placeholder 1"/>
+          <p:cNvSpPr>
+            <a:spLocks noGrp="1" noRot="1" noChangeAspect="1"/>
+          </p:cNvSpPr>
+          <p:nvPr>
+            <p:ph type="sldImg" idx="2"/>
+          </p:nvPr>
+        </p:nvSpPr>
+        <p:spPr/>
+      </p:sp>
+      <p:sp>
+        <p:nvSpPr>
+          <p:cNvPr id="3" name="Notes Placeholder 2"/>
+          <p:cNvSpPr>
+            <a:spLocks noGrp="1"/>
+          </p:cNvSpPr>
+          <p:nvPr>
+            <p:ph type="body" sz="quarter" idx="3"/>
+          </p:nvPr>
+        </p:nvSpPr>
+        <p:spPr/>
+        <p:txBody>
+          <a:bodyPr/>
+          <a:lstStyle/>
+          <a:p>
+            <a:r>
+              <a:t>Full rubric table is in the technical report Appendix D.</a:t>
+            </a:r>
+          </a:p>
+        </p:txBody>
+      </p:sp>
+      <p:sp>
+        <p:nvSpPr>
+          <p:cNvPr id="4" name="Slide Number Placeholder 3"/>
+          <p:cNvSpPr>
+            <a:spLocks noGrp="1"/>
+          </p:cNvSpPr>
+          <p:nvPr>
+            <p:ph type="sldNum" sz="quarter" idx="5"/>
           </p:nvPr>
         </p:nvSpPr>
         <p:spPr/>
@@ -1236,7 +1243,7 @@
           <a:p>
             <a:fld id="{5BCAD085-E8A6-8845-BD4E-CB4CCA059FC4}" type="datetimeFigureOut">
               <a:rPr lang="en-US" smtClean="0"/>
-              <a:t>1/27/13</a:t>
+              <a:t>6/9/2026</a:t>
             </a:fld>
             <a:endParaRPr lang="en-US"/>
           </a:p>
@@ -1278,7 +1285,7 @@
           <a:p>
             <a:fld id="{C1FF6DA9-008F-8B48-92A6-B652298478BF}" type="slidenum">
               <a:rPr lang="en-US" smtClean="0"/>
-              <a:t>‹#›</a:t>
+              <a:t>‹N°›</a:t>
             </a:fld>
             <a:endParaRPr lang="en-US"/>
           </a:p>
@@ -1406,7 +1413,7 @@
           <a:p>
             <a:fld id="{5BCAD085-E8A6-8845-BD4E-CB4CCA059FC4}" type="datetimeFigureOut">
               <a:rPr lang="en-US" smtClean="0"/>
-              <a:t>1/27/13</a:t>
+              <a:t>6/9/2026</a:t>
             </a:fld>
             <a:endParaRPr lang="en-US"/>
           </a:p>
@@ -1448,7 +1455,7 @@
           <a:p>
             <a:fld id="{C1FF6DA9-008F-8B48-92A6-B652298478BF}" type="slidenum">
               <a:rPr lang="en-US" smtClean="0"/>
-              <a:t>‹#›</a:t>
+              <a:t>‹N°›</a:t>
             </a:fld>
             <a:endParaRPr lang="en-US"/>
           </a:p>
@@ -1586,7 +1593,7 @@
           <a:p>
             <a:fld id="{5BCAD085-E8A6-8845-BD4E-CB4CCA059FC4}" type="datetimeFigureOut">
               <a:rPr lang="en-US" smtClean="0"/>
-              <a:t>1/27/13</a:t>
+              <a:t>6/9/2026</a:t>
             </a:fld>
             <a:endParaRPr lang="en-US"/>
           </a:p>
@@ -1628,7 +1635,7 @@
           <a:p>
             <a:fld id="{C1FF6DA9-008F-8B48-92A6-B652298478BF}" type="slidenum">
               <a:rPr lang="en-US" smtClean="0"/>
-              <a:t>‹#›</a:t>
+              <a:t>‹N°›</a:t>
             </a:fld>
             <a:endParaRPr lang="en-US"/>
           </a:p>
@@ -1756,7 +1763,7 @@
           <a:p>
             <a:fld id="{5BCAD085-E8A6-8845-BD4E-CB4CCA059FC4}" type="datetimeFigureOut">
               <a:rPr lang="en-US" smtClean="0"/>
-              <a:t>1/27/13</a:t>
+              <a:t>6/9/2026</a:t>
             </a:fld>
             <a:endParaRPr lang="en-US"/>
           </a:p>
@@ -1798,7 +1805,7 @@
           <a:p>
             <a:fld id="{C1FF6DA9-008F-8B48-92A6-B652298478BF}" type="slidenum">
               <a:rPr lang="en-US" smtClean="0"/>
-              <a:t>‹#›</a:t>
+              <a:t>‹N°›</a:t>
             </a:fld>
             <a:endParaRPr lang="en-US"/>
           </a:p>
@@ -2002,7 +2009,7 @@
           <a:p>
             <a:fld id="{5BCAD085-E8A6-8845-BD4E-CB4CCA059FC4}" type="datetimeFigureOut">
               <a:rPr lang="en-US" smtClean="0"/>
-              <a:t>1/27/13</a:t>
+              <a:t>6/9/2026</a:t>
             </a:fld>
             <a:endParaRPr lang="en-US"/>
           </a:p>
@@ -2044,7 +2051,7 @@
           <a:p>
             <a:fld id="{C1FF6DA9-008F-8B48-92A6-B652298478BF}" type="slidenum">
               <a:rPr lang="en-US" smtClean="0"/>
-              <a:t>‹#›</a:t>
+              <a:t>‹N°›</a:t>
             </a:fld>
             <a:endParaRPr lang="en-US"/>
           </a:p>
@@ -2290,7 +2297,7 @@
           <a:p>
             <a:fld id="{5BCAD085-E8A6-8845-BD4E-CB4CCA059FC4}" type="datetimeFigureOut">
               <a:rPr lang="en-US" smtClean="0"/>
-              <a:t>1/27/13</a:t>
+              <a:t>6/9/2026</a:t>
             </a:fld>
             <a:endParaRPr lang="en-US"/>
           </a:p>
@@ -2332,7 +2339,7 @@
           <a:p>
             <a:fld id="{C1FF6DA9-008F-8B48-92A6-B652298478BF}" type="slidenum">
               <a:rPr lang="en-US" smtClean="0"/>
-              <a:t>‹#›</a:t>
+              <a:t>‹N°›</a:t>
             </a:fld>
             <a:endParaRPr lang="en-US"/>
           </a:p>
@@ -2712,7 +2719,7 @@
           <a:p>
             <a:fld id="{5BCAD085-E8A6-8845-BD4E-CB4CCA059FC4}" type="datetimeFigureOut">
               <a:rPr lang="en-US" smtClean="0"/>
-              <a:t>1/27/13</a:t>
+              <a:t>6/9/2026</a:t>
             </a:fld>
             <a:endParaRPr lang="en-US"/>
           </a:p>
@@ -2754,7 +2761,7 @@
           <a:p>
             <a:fld id="{C1FF6DA9-008F-8B48-92A6-B652298478BF}" type="slidenum">
               <a:rPr lang="en-US" smtClean="0"/>
-              <a:t>‹#›</a:t>
+              <a:t>‹N°›</a:t>
             </a:fld>
             <a:endParaRPr lang="en-US"/>
           </a:p>
@@ -2830,7 +2837,7 @@
           <a:p>
             <a:fld id="{5BCAD085-E8A6-8845-BD4E-CB4CCA059FC4}" type="datetimeFigureOut">
               <a:rPr lang="en-US" smtClean="0"/>
-              <a:t>1/27/13</a:t>
+              <a:t>6/9/2026</a:t>
             </a:fld>
             <a:endParaRPr lang="en-US"/>
           </a:p>
@@ -2872,7 +2879,7 @@
           <a:p>
             <a:fld id="{C1FF6DA9-008F-8B48-92A6-B652298478BF}" type="slidenum">
               <a:rPr lang="en-US" smtClean="0"/>
-              <a:t>‹#›</a:t>
+              <a:t>‹N°›</a:t>
             </a:fld>
             <a:endParaRPr lang="en-US"/>
           </a:p>
@@ -2925,7 +2932,7 @@
           <a:p>
             <a:fld id="{5BCAD085-E8A6-8845-BD4E-CB4CCA059FC4}" type="datetimeFigureOut">
               <a:rPr lang="en-US" smtClean="0"/>
-              <a:t>1/27/13</a:t>
+              <a:t>6/9/2026</a:t>
             </a:fld>
             <a:endParaRPr lang="en-US"/>
           </a:p>
@@ -2967,7 +2974,7 @@
           <a:p>
             <a:fld id="{C1FF6DA9-008F-8B48-92A6-B652298478BF}" type="slidenum">
               <a:rPr lang="en-US" smtClean="0"/>
-              <a:t>‹#›</a:t>
+              <a:t>‹N°›</a:t>
             </a:fld>
             <a:endParaRPr lang="en-US"/>
           </a:p>
@@ -3202,7 +3209,7 @@
           <a:p>
             <a:fld id="{5BCAD085-E8A6-8845-BD4E-CB4CCA059FC4}" type="datetimeFigureOut">
               <a:rPr lang="en-US" smtClean="0"/>
-              <a:t>1/27/13</a:t>
+              <a:t>6/9/2026</a:t>
             </a:fld>
             <a:endParaRPr lang="en-US"/>
           </a:p>
@@ -3244,7 +3251,7 @@
           <a:p>
             <a:fld id="{C1FF6DA9-008F-8B48-92A6-B652298478BF}" type="slidenum">
               <a:rPr lang="en-US" smtClean="0"/>
-              <a:t>‹#›</a:t>
+              <a:t>‹N°›</a:t>
             </a:fld>
             <a:endParaRPr lang="en-US"/>
           </a:p>
@@ -3455,7 +3462,7 @@
           <a:p>
             <a:fld id="{5BCAD085-E8A6-8845-BD4E-CB4CCA059FC4}" type="datetimeFigureOut">
               <a:rPr lang="en-US" smtClean="0"/>
-              <a:t>1/27/13</a:t>
+              <a:t>6/9/2026</a:t>
             </a:fld>
             <a:endParaRPr lang="en-US"/>
           </a:p>
@@ -3497,7 +3504,7 @@
           <a:p>
             <a:fld id="{C1FF6DA9-008F-8B48-92A6-B652298478BF}" type="slidenum">
               <a:rPr lang="en-US" smtClean="0"/>
-              <a:t>‹#›</a:t>
+              <a:t>‹N°›</a:t>
             </a:fld>
             <a:endParaRPr lang="en-US"/>
           </a:p>
@@ -3668,7 +3675,7 @@
           <a:p>
             <a:fld id="{5BCAD085-E8A6-8845-BD4E-CB4CCA059FC4}" type="datetimeFigureOut">
               <a:rPr lang="en-US" smtClean="0"/>
-              <a:t>1/27/13</a:t>
+              <a:t>6/9/2026</a:t>
             </a:fld>
             <a:endParaRPr lang="en-US"/>
           </a:p>
@@ -3746,7 +3753,7 @@
           <a:p>
             <a:fld id="{C1FF6DA9-008F-8B48-92A6-B652298478BF}" type="slidenum">
               <a:rPr lang="en-US" smtClean="0"/>
-              <a:t>‹#›</a:t>
+              <a:t>‹N°›</a:t>
             </a:fld>
             <a:endParaRPr lang="en-US"/>
           </a:p>
@@ -4027,7 +4034,7 @@
 </file>
 
 <file path=ppt/slides/slide1.xml><?xml version="1.0" encoding="utf-8"?>
-<p:sld xmlns:a="http://schemas.openxmlformats.org/drawingml/2006/main" xmlns:p="http://schemas.openxmlformats.org/presentationml/2006/main" xmlns:r="http://schemas.openxmlformats.org/officeDocument/2006/relationships">
+<p:sld xmlns:a="http://schemas.openxmlformats.org/drawingml/2006/main" xmlns:r="http://schemas.openxmlformats.org/officeDocument/2006/relationships" xmlns:p="http://schemas.openxmlformats.org/presentationml/2006/main">
   <p:cSld>
     <p:bg>
       <p:bgPr>
@@ -4043,7 +4050,14 @@
         <p:cNvGrpSpPr/>
         <p:nvPr/>
       </p:nvGrpSpPr>
-      <p:grpSpPr/>
+      <p:grpSpPr>
+        <a:xfrm>
+          <a:off x="0" y="0"/>
+          <a:ext cx="0" cy="0"/>
+          <a:chOff x="0" y="0"/>
+          <a:chExt cx="0" cy="0"/>
+        </a:xfrm>
+      </p:grpSpPr>
       <p:sp>
         <p:nvSpPr>
           <p:cNvPr id="2" name="TextBox 1"/>
@@ -4259,6 +4273,7 @@
           <a:lstStyle/>
           <a:p>
             <a:pPr algn="ctr"/>
+            <a:endParaRPr/>
           </a:p>
         </p:txBody>
       </p:sp>
@@ -4327,7 +4342,7 @@
                 </a:solidFill>
                 <a:latin typeface="Calibri"/>
               </a:rPr>
-              <a:t>June 07, 2026</a:t>
+              <a:t>June 09, 2026</a:t>
             </a:r>
           </a:p>
         </p:txBody>
@@ -4376,7 +4391,7 @@
 </file>
 
 <file path=ppt/slides/slide10.xml><?xml version="1.0" encoding="utf-8"?>
-<p:sld xmlns:a="http://schemas.openxmlformats.org/drawingml/2006/main" xmlns:p="http://schemas.openxmlformats.org/presentationml/2006/main" xmlns:r="http://schemas.openxmlformats.org/officeDocument/2006/relationships">
+<p:sld xmlns:a="http://schemas.openxmlformats.org/drawingml/2006/main" xmlns:r="http://schemas.openxmlformats.org/officeDocument/2006/relationships" xmlns:p="http://schemas.openxmlformats.org/presentationml/2006/main">
   <p:cSld>
     <p:spTree>
       <p:nvGrpSpPr>
@@ -4384,7 +4399,14 @@
         <p:cNvGrpSpPr/>
         <p:nvPr/>
       </p:nvGrpSpPr>
-      <p:grpSpPr/>
+      <p:grpSpPr>
+        <a:xfrm>
+          <a:off x="0" y="0"/>
+          <a:ext cx="0" cy="0"/>
+          <a:chOff x="0" y="0"/>
+          <a:chExt cx="0" cy="0"/>
+        </a:xfrm>
+      </p:grpSpPr>
       <p:sp>
         <p:nvSpPr>
           <p:cNvPr id="2" name="Rectangle 1"/>
@@ -4425,6 +4447,7 @@
           <a:lstStyle/>
           <a:p>
             <a:pPr algn="ctr"/>
+            <a:endParaRPr/>
           </a:p>
         </p:txBody>
       </p:sp>
@@ -4458,29 +4481,29 @@
                 </a:solidFill>
                 <a:latin typeface="Calibri"/>
               </a:rPr>
-              <a:t>Revenue Growth (MRR)</a:t>
+              <a:t>Platform Break-Even</a:t>
             </a:r>
           </a:p>
         </p:txBody>
       </p:sp>
       <p:pic>
         <p:nvPicPr>
-          <p:cNvPr id="4" name="Picture 3" descr="revenue_growth.png"/>
+          <p:cNvPr id="4" name="Picture 3" descr="break_even_platform.png"/>
           <p:cNvPicPr>
             <a:picLocks noChangeAspect="1"/>
           </p:cNvPicPr>
           <p:nvPr/>
         </p:nvPicPr>
         <p:blipFill>
-          <a:blip r:embed="rId2"/>
+          <a:blip r:embed="rId3"/>
           <a:stretch>
             <a:fillRect/>
           </a:stretch>
         </p:blipFill>
         <p:spPr>
           <a:xfrm>
-            <a:off x="502920" y="1234440"/>
-            <a:ext cx="11185855" cy="6249875"/>
+            <a:off x="2048512" y="1252728"/>
+            <a:ext cx="8094670" cy="4625526"/>
           </a:xfrm>
           <a:prstGeom prst="rect">
             <a:avLst/>
@@ -4517,7 +4540,7 @@
                 </a:solidFill>
                 <a:latin typeface="Calibri"/>
               </a:rPr>
-              <a:t>Month 24: ~$50k MRR — commission + subscriptions</a:t>
+              <a:t>Revenue vs operating cost — break-even at Month 25 (illustrative)</a:t>
             </a:r>
           </a:p>
         </p:txBody>
@@ -4552,7 +4575,7 @@
                 </a:solidFill>
                 <a:latin typeface="Calibri"/>
               </a:rPr>
-              <a:t>Manye Patrice  |  IT Innovation in Business — Master's Degree  |  Slide 10 of 28</a:t>
+              <a:t>Manye Patrice  |  IT Innovation in Business — Master's Degree  |  Slide 10 of 31</a:t>
             </a:r>
           </a:p>
         </p:txBody>
@@ -4566,7 +4589,7 @@
 </file>
 
 <file path=ppt/slides/slide11.xml><?xml version="1.0" encoding="utf-8"?>
-<p:sld xmlns:a="http://schemas.openxmlformats.org/drawingml/2006/main" xmlns:p="http://schemas.openxmlformats.org/presentationml/2006/main" xmlns:r="http://schemas.openxmlformats.org/officeDocument/2006/relationships">
+<p:sld xmlns:a="http://schemas.openxmlformats.org/drawingml/2006/main" xmlns:r="http://schemas.openxmlformats.org/officeDocument/2006/relationships" xmlns:p="http://schemas.openxmlformats.org/presentationml/2006/main">
   <p:cSld>
     <p:spTree>
       <p:nvGrpSpPr>
@@ -4574,7 +4597,14 @@
         <p:cNvGrpSpPr/>
         <p:nvPr/>
       </p:nvGrpSpPr>
-      <p:grpSpPr/>
+      <p:grpSpPr>
+        <a:xfrm>
+          <a:off x="0" y="0"/>
+          <a:ext cx="0" cy="0"/>
+          <a:chOff x="0" y="0"/>
+          <a:chExt cx="0" cy="0"/>
+        </a:xfrm>
+      </p:grpSpPr>
       <p:sp>
         <p:nvSpPr>
           <p:cNvPr id="2" name="Rectangle 1"/>
@@ -4615,6 +4645,7 @@
           <a:lstStyle/>
           <a:p>
             <a:pPr algn="ctr"/>
+            <a:endParaRPr/>
           </a:p>
         </p:txBody>
       </p:sp>
@@ -4648,29 +4679,29 @@
                 </a:solidFill>
                 <a:latin typeface="Calibri"/>
               </a:rPr>
-              <a:t>Bookings &amp; GMV</a:t>
+              <a:t>Worker Subscription Break-Even</a:t>
             </a:r>
           </a:p>
         </p:txBody>
       </p:sp>
       <p:pic>
         <p:nvPicPr>
-          <p:cNvPr id="4" name="Picture 3" descr="bookings_gmv_growth.png"/>
+          <p:cNvPr id="4" name="Picture 3" descr="break_even_worker.png"/>
           <p:cNvPicPr>
             <a:picLocks noChangeAspect="1"/>
           </p:cNvPicPr>
           <p:nvPr/>
         </p:nvPicPr>
         <p:blipFill>
-          <a:blip r:embed="rId2"/>
+          <a:blip r:embed="rId3"/>
           <a:stretch>
             <a:fillRect/>
           </a:stretch>
         </p:blipFill>
         <p:spPr>
           <a:xfrm>
-            <a:off x="502920" y="1234440"/>
-            <a:ext cx="11185855" cy="6249875"/>
+            <a:off x="1351560" y="1234441"/>
+            <a:ext cx="9488573" cy="4631328"/>
           </a:xfrm>
           <a:prstGeom prst="rect">
             <a:avLst/>
@@ -4707,7 +4738,7 @@
                 </a:solidFill>
                 <a:latin typeface="Calibri"/>
               </a:rPr>
-              <a:t>Completed jobs and gross merchandise volume</a:t>
+              <a:t>Jobs per month to offset plan cost via commission savings only</a:t>
             </a:r>
           </a:p>
         </p:txBody>
@@ -4742,7 +4773,7 @@
                 </a:solidFill>
                 <a:latin typeface="Calibri"/>
               </a:rPr>
-              <a:t>Manye Patrice  |  IT Innovation in Business — Master's Degree  |  Slide 11 of 28</a:t>
+              <a:t>Manye Patrice  |  IT Innovation in Business — Master's Degree  |  Slide 11 of 31</a:t>
             </a:r>
           </a:p>
         </p:txBody>
@@ -4756,7 +4787,601 @@
 </file>
 
 <file path=ppt/slides/slide12.xml><?xml version="1.0" encoding="utf-8"?>
-<p:sld xmlns:a="http://schemas.openxmlformats.org/drawingml/2006/main" xmlns:p="http://schemas.openxmlformats.org/presentationml/2006/main" xmlns:r="http://schemas.openxmlformats.org/officeDocument/2006/relationships">
+<p:sld xmlns:a="http://schemas.openxmlformats.org/drawingml/2006/main" xmlns:r="http://schemas.openxmlformats.org/officeDocument/2006/relationships" xmlns:p="http://schemas.openxmlformats.org/presentationml/2006/main">
+  <p:cSld>
+    <p:spTree>
+      <p:nvGrpSpPr>
+        <p:cNvPr id="1" name=""/>
+        <p:cNvGrpSpPr/>
+        <p:nvPr/>
+      </p:nvGrpSpPr>
+      <p:grpSpPr>
+        <a:xfrm>
+          <a:off x="0" y="0"/>
+          <a:ext cx="0" cy="0"/>
+          <a:chOff x="0" y="0"/>
+          <a:chExt cx="0" cy="0"/>
+        </a:xfrm>
+      </p:grpSpPr>
+      <p:sp>
+        <p:nvSpPr>
+          <p:cNvPr id="2" name="Rectangle 1"/>
+          <p:cNvSpPr/>
+          <p:nvPr/>
+        </p:nvSpPr>
+        <p:spPr>
+          <a:xfrm>
+            <a:off x="0" y="0"/>
+            <a:ext cx="12191695" cy="1051560"/>
+          </a:xfrm>
+          <a:prstGeom prst="rect">
+            <a:avLst/>
+          </a:prstGeom>
+          <a:solidFill>
+            <a:srgbClr val="1E3A8A"/>
+          </a:solidFill>
+          <a:ln>
+            <a:noFill/>
+          </a:ln>
+        </p:spPr>
+        <p:style>
+          <a:lnRef idx="1">
+            <a:schemeClr val="accent1"/>
+          </a:lnRef>
+          <a:fillRef idx="3">
+            <a:schemeClr val="accent1"/>
+          </a:fillRef>
+          <a:effectRef idx="2">
+            <a:schemeClr val="accent1"/>
+          </a:effectRef>
+          <a:fontRef idx="minor">
+            <a:schemeClr val="lt1"/>
+          </a:fontRef>
+        </p:style>
+        <p:txBody>
+          <a:bodyPr rtlCol="0" anchor="ctr"/>
+          <a:lstStyle/>
+          <a:p>
+            <a:pPr algn="ctr"/>
+            <a:endParaRPr/>
+          </a:p>
+        </p:txBody>
+      </p:sp>
+      <p:sp>
+        <p:nvSpPr>
+          <p:cNvPr id="3" name="TextBox 2"/>
+          <p:cNvSpPr txBox="1"/>
+          <p:nvPr/>
+        </p:nvSpPr>
+        <p:spPr>
+          <a:xfrm>
+            <a:off x="502920" y="201168"/>
+            <a:ext cx="11185855" cy="502920"/>
+          </a:xfrm>
+          <a:prstGeom prst="rect">
+            <a:avLst/>
+          </a:prstGeom>
+          <a:noFill/>
+        </p:spPr>
+        <p:txBody>
+          <a:bodyPr wrap="square" anchor="t">
+            <a:spAutoFit/>
+          </a:bodyPr>
+          <a:lstStyle/>
+          <a:p>
+            <a:pPr algn="l"/>
+            <a:r>
+              <a:rPr sz="2800" b="1">
+                <a:solidFill>
+                  <a:srgbClr val="FFFFFF"/>
+                </a:solidFill>
+                <a:latin typeface="Calibri"/>
+              </a:rPr>
+              <a:t>Traffic Growth Projection</a:t>
+            </a:r>
+          </a:p>
+        </p:txBody>
+      </p:sp>
+      <p:pic>
+        <p:nvPicPr>
+          <p:cNvPr id="4" name="Picture 3" descr="traffic_growth.png"/>
+          <p:cNvPicPr>
+            <a:picLocks noChangeAspect="1"/>
+          </p:cNvPicPr>
+          <p:nvPr/>
+        </p:nvPicPr>
+        <p:blipFill>
+          <a:blip r:embed="rId2"/>
+          <a:stretch>
+            <a:fillRect/>
+          </a:stretch>
+        </p:blipFill>
+        <p:spPr>
+          <a:xfrm>
+            <a:off x="1948151" y="1252728"/>
+            <a:ext cx="8295392" cy="4634886"/>
+          </a:xfrm>
+          <a:prstGeom prst="rect">
+            <a:avLst/>
+          </a:prstGeom>
+        </p:spPr>
+      </p:pic>
+      <p:sp>
+        <p:nvSpPr>
+          <p:cNvPr id="5" name="TextBox 4"/>
+          <p:cNvSpPr txBox="1"/>
+          <p:nvPr/>
+        </p:nvSpPr>
+        <p:spPr>
+          <a:xfrm>
+            <a:off x="502920" y="5806440"/>
+            <a:ext cx="11185855" cy="320040"/>
+          </a:xfrm>
+          <a:prstGeom prst="rect">
+            <a:avLst/>
+          </a:prstGeom>
+          <a:noFill/>
+        </p:spPr>
+        <p:txBody>
+          <a:bodyPr wrap="square" anchor="t">
+            <a:spAutoFit/>
+          </a:bodyPr>
+          <a:lstStyle/>
+          <a:p>
+            <a:pPr algn="ctr"/>
+            <a:r>
+              <a:rPr sz="1000" b="0">
+                <a:solidFill>
+                  <a:srgbClr val="64748B"/>
+                </a:solidFill>
+                <a:latin typeface="Calibri"/>
+              </a:rPr>
+              <a:t>Month 24: ~9,500 visitors/mo (illustrative)</a:t>
+            </a:r>
+          </a:p>
+        </p:txBody>
+      </p:sp>
+      <p:sp>
+        <p:nvSpPr>
+          <p:cNvPr id="6" name="TextBox 5"/>
+          <p:cNvSpPr txBox="1"/>
+          <p:nvPr/>
+        </p:nvSpPr>
+        <p:spPr>
+          <a:xfrm>
+            <a:off x="502920" y="6446520"/>
+            <a:ext cx="11185855" cy="320040"/>
+          </a:xfrm>
+          <a:prstGeom prst="rect">
+            <a:avLst/>
+          </a:prstGeom>
+          <a:noFill/>
+        </p:spPr>
+        <p:txBody>
+          <a:bodyPr wrap="square" anchor="t">
+            <a:spAutoFit/>
+          </a:bodyPr>
+          <a:lstStyle/>
+          <a:p>
+            <a:pPr algn="ctr"/>
+            <a:r>
+              <a:rPr sz="900" b="0">
+                <a:solidFill>
+                  <a:srgbClr val="64748B"/>
+                </a:solidFill>
+                <a:latin typeface="Calibri"/>
+              </a:rPr>
+              <a:t>Manye Patrice  |  IT Innovation in Business — Master's Degree  |  Slide 12 of 31</a:t>
+            </a:r>
+          </a:p>
+        </p:txBody>
+      </p:sp>
+    </p:spTree>
+  </p:cSld>
+  <p:clrMapOvr>
+    <a:masterClrMapping/>
+  </p:clrMapOvr>
+</p:sld>
+</file>
+
+<file path=ppt/slides/slide13.xml><?xml version="1.0" encoding="utf-8"?>
+<p:sld xmlns:a="http://schemas.openxmlformats.org/drawingml/2006/main" xmlns:r="http://schemas.openxmlformats.org/officeDocument/2006/relationships" xmlns:p="http://schemas.openxmlformats.org/presentationml/2006/main">
+  <p:cSld>
+    <p:spTree>
+      <p:nvGrpSpPr>
+        <p:cNvPr id="1" name=""/>
+        <p:cNvGrpSpPr/>
+        <p:nvPr/>
+      </p:nvGrpSpPr>
+      <p:grpSpPr>
+        <a:xfrm>
+          <a:off x="0" y="0"/>
+          <a:ext cx="0" cy="0"/>
+          <a:chOff x="0" y="0"/>
+          <a:chExt cx="0" cy="0"/>
+        </a:xfrm>
+      </p:grpSpPr>
+      <p:sp>
+        <p:nvSpPr>
+          <p:cNvPr id="2" name="Rectangle 1"/>
+          <p:cNvSpPr/>
+          <p:nvPr/>
+        </p:nvSpPr>
+        <p:spPr>
+          <a:xfrm>
+            <a:off x="0" y="0"/>
+            <a:ext cx="12191695" cy="1051560"/>
+          </a:xfrm>
+          <a:prstGeom prst="rect">
+            <a:avLst/>
+          </a:prstGeom>
+          <a:solidFill>
+            <a:srgbClr val="1E3A8A"/>
+          </a:solidFill>
+          <a:ln>
+            <a:noFill/>
+          </a:ln>
+        </p:spPr>
+        <p:style>
+          <a:lnRef idx="1">
+            <a:schemeClr val="accent1"/>
+          </a:lnRef>
+          <a:fillRef idx="3">
+            <a:schemeClr val="accent1"/>
+          </a:fillRef>
+          <a:effectRef idx="2">
+            <a:schemeClr val="accent1"/>
+          </a:effectRef>
+          <a:fontRef idx="minor">
+            <a:schemeClr val="lt1"/>
+          </a:fontRef>
+        </p:style>
+        <p:txBody>
+          <a:bodyPr rtlCol="0" anchor="ctr"/>
+          <a:lstStyle/>
+          <a:p>
+            <a:pPr algn="ctr"/>
+            <a:endParaRPr/>
+          </a:p>
+        </p:txBody>
+      </p:sp>
+      <p:sp>
+        <p:nvSpPr>
+          <p:cNvPr id="3" name="TextBox 2"/>
+          <p:cNvSpPr txBox="1"/>
+          <p:nvPr/>
+        </p:nvSpPr>
+        <p:spPr>
+          <a:xfrm>
+            <a:off x="502920" y="201168"/>
+            <a:ext cx="11185855" cy="502920"/>
+          </a:xfrm>
+          <a:prstGeom prst="rect">
+            <a:avLst/>
+          </a:prstGeom>
+          <a:noFill/>
+        </p:spPr>
+        <p:txBody>
+          <a:bodyPr wrap="square" anchor="t">
+            <a:spAutoFit/>
+          </a:bodyPr>
+          <a:lstStyle/>
+          <a:p>
+            <a:pPr algn="l"/>
+            <a:r>
+              <a:rPr sz="2800" b="1">
+                <a:solidFill>
+                  <a:srgbClr val="FFFFFF"/>
+                </a:solidFill>
+                <a:latin typeface="Calibri"/>
+              </a:rPr>
+              <a:t>Revenue Growth (MRR)</a:t>
+            </a:r>
+          </a:p>
+        </p:txBody>
+      </p:sp>
+      <p:pic>
+        <p:nvPicPr>
+          <p:cNvPr id="4" name="Picture 3" descr="revenue_growth.png"/>
+          <p:cNvPicPr>
+            <a:picLocks noChangeAspect="1"/>
+          </p:cNvPicPr>
+          <p:nvPr/>
+        </p:nvPicPr>
+        <p:blipFill>
+          <a:blip r:embed="rId2"/>
+          <a:stretch>
+            <a:fillRect/>
+          </a:stretch>
+        </p:blipFill>
+        <p:spPr>
+          <a:xfrm>
+            <a:off x="1807614" y="1252728"/>
+            <a:ext cx="8351148" cy="4666039"/>
+          </a:xfrm>
+          <a:prstGeom prst="rect">
+            <a:avLst/>
+          </a:prstGeom>
+        </p:spPr>
+      </p:pic>
+      <p:sp>
+        <p:nvSpPr>
+          <p:cNvPr id="5" name="TextBox 4"/>
+          <p:cNvSpPr txBox="1"/>
+          <p:nvPr/>
+        </p:nvSpPr>
+        <p:spPr>
+          <a:xfrm>
+            <a:off x="502920" y="5806440"/>
+            <a:ext cx="11185855" cy="320040"/>
+          </a:xfrm>
+          <a:prstGeom prst="rect">
+            <a:avLst/>
+          </a:prstGeom>
+          <a:noFill/>
+        </p:spPr>
+        <p:txBody>
+          <a:bodyPr wrap="square" anchor="t">
+            <a:spAutoFit/>
+          </a:bodyPr>
+          <a:lstStyle/>
+          <a:p>
+            <a:pPr algn="ctr"/>
+            <a:r>
+              <a:rPr sz="1000" b="0">
+                <a:solidFill>
+                  <a:srgbClr val="64748B"/>
+                </a:solidFill>
+                <a:latin typeface="Calibri"/>
+              </a:rPr>
+              <a:t>Month 24: ~$50k MRR — commission + subscriptions</a:t>
+            </a:r>
+          </a:p>
+        </p:txBody>
+      </p:sp>
+      <p:sp>
+        <p:nvSpPr>
+          <p:cNvPr id="6" name="TextBox 5"/>
+          <p:cNvSpPr txBox="1"/>
+          <p:nvPr/>
+        </p:nvSpPr>
+        <p:spPr>
+          <a:xfrm>
+            <a:off x="502920" y="6446520"/>
+            <a:ext cx="11185855" cy="320040"/>
+          </a:xfrm>
+          <a:prstGeom prst="rect">
+            <a:avLst/>
+          </a:prstGeom>
+          <a:noFill/>
+        </p:spPr>
+        <p:txBody>
+          <a:bodyPr wrap="square" anchor="t">
+            <a:spAutoFit/>
+          </a:bodyPr>
+          <a:lstStyle/>
+          <a:p>
+            <a:pPr algn="ctr"/>
+            <a:r>
+              <a:rPr sz="900" b="0">
+                <a:solidFill>
+                  <a:srgbClr val="64748B"/>
+                </a:solidFill>
+                <a:latin typeface="Calibri"/>
+              </a:rPr>
+              <a:t>Manye Patrice  |  IT Innovation in Business — Master's Degree  |  Slide 13 of 31</a:t>
+            </a:r>
+          </a:p>
+        </p:txBody>
+      </p:sp>
+    </p:spTree>
+  </p:cSld>
+  <p:clrMapOvr>
+    <a:masterClrMapping/>
+  </p:clrMapOvr>
+</p:sld>
+</file>
+
+<file path=ppt/slides/slide14.xml><?xml version="1.0" encoding="utf-8"?>
+<p:sld xmlns:a="http://schemas.openxmlformats.org/drawingml/2006/main" xmlns:r="http://schemas.openxmlformats.org/officeDocument/2006/relationships" xmlns:p="http://schemas.openxmlformats.org/presentationml/2006/main">
+  <p:cSld>
+    <p:spTree>
+      <p:nvGrpSpPr>
+        <p:cNvPr id="1" name=""/>
+        <p:cNvGrpSpPr/>
+        <p:nvPr/>
+      </p:nvGrpSpPr>
+      <p:grpSpPr>
+        <a:xfrm>
+          <a:off x="0" y="0"/>
+          <a:ext cx="0" cy="0"/>
+          <a:chOff x="0" y="0"/>
+          <a:chExt cx="0" cy="0"/>
+        </a:xfrm>
+      </p:grpSpPr>
+      <p:sp>
+        <p:nvSpPr>
+          <p:cNvPr id="2" name="Rectangle 1"/>
+          <p:cNvSpPr/>
+          <p:nvPr/>
+        </p:nvSpPr>
+        <p:spPr>
+          <a:xfrm>
+            <a:off x="0" y="0"/>
+            <a:ext cx="12191695" cy="1051560"/>
+          </a:xfrm>
+          <a:prstGeom prst="rect">
+            <a:avLst/>
+          </a:prstGeom>
+          <a:solidFill>
+            <a:srgbClr val="1E3A8A"/>
+          </a:solidFill>
+          <a:ln>
+            <a:noFill/>
+          </a:ln>
+        </p:spPr>
+        <p:style>
+          <a:lnRef idx="1">
+            <a:schemeClr val="accent1"/>
+          </a:lnRef>
+          <a:fillRef idx="3">
+            <a:schemeClr val="accent1"/>
+          </a:fillRef>
+          <a:effectRef idx="2">
+            <a:schemeClr val="accent1"/>
+          </a:effectRef>
+          <a:fontRef idx="minor">
+            <a:schemeClr val="lt1"/>
+          </a:fontRef>
+        </p:style>
+        <p:txBody>
+          <a:bodyPr rtlCol="0" anchor="ctr"/>
+          <a:lstStyle/>
+          <a:p>
+            <a:pPr algn="ctr"/>
+            <a:endParaRPr/>
+          </a:p>
+        </p:txBody>
+      </p:sp>
+      <p:sp>
+        <p:nvSpPr>
+          <p:cNvPr id="3" name="TextBox 2"/>
+          <p:cNvSpPr txBox="1"/>
+          <p:nvPr/>
+        </p:nvSpPr>
+        <p:spPr>
+          <a:xfrm>
+            <a:off x="502920" y="201168"/>
+            <a:ext cx="11185855" cy="502920"/>
+          </a:xfrm>
+          <a:prstGeom prst="rect">
+            <a:avLst/>
+          </a:prstGeom>
+          <a:noFill/>
+        </p:spPr>
+        <p:txBody>
+          <a:bodyPr wrap="square" anchor="t">
+            <a:spAutoFit/>
+          </a:bodyPr>
+          <a:lstStyle/>
+          <a:p>
+            <a:pPr algn="l"/>
+            <a:r>
+              <a:rPr sz="2800" b="1">
+                <a:solidFill>
+                  <a:srgbClr val="FFFFFF"/>
+                </a:solidFill>
+                <a:latin typeface="Calibri"/>
+              </a:rPr>
+              <a:t>Bookings &amp; GMV</a:t>
+            </a:r>
+          </a:p>
+        </p:txBody>
+      </p:sp>
+      <p:pic>
+        <p:nvPicPr>
+          <p:cNvPr id="4" name="Picture 3" descr="bookings_gmv_growth.png"/>
+          <p:cNvPicPr>
+            <a:picLocks noChangeAspect="1"/>
+          </p:cNvPicPr>
+          <p:nvPr/>
+        </p:nvPicPr>
+        <p:blipFill>
+          <a:blip r:embed="rId2"/>
+          <a:stretch>
+            <a:fillRect/>
+          </a:stretch>
+        </p:blipFill>
+        <p:spPr>
+          <a:xfrm>
+            <a:off x="2108697" y="1252728"/>
+            <a:ext cx="8217334" cy="4591273"/>
+          </a:xfrm>
+          <a:prstGeom prst="rect">
+            <a:avLst/>
+          </a:prstGeom>
+        </p:spPr>
+      </p:pic>
+      <p:sp>
+        <p:nvSpPr>
+          <p:cNvPr id="5" name="TextBox 4"/>
+          <p:cNvSpPr txBox="1"/>
+          <p:nvPr/>
+        </p:nvSpPr>
+        <p:spPr>
+          <a:xfrm>
+            <a:off x="502920" y="5806440"/>
+            <a:ext cx="11185855" cy="320040"/>
+          </a:xfrm>
+          <a:prstGeom prst="rect">
+            <a:avLst/>
+          </a:prstGeom>
+          <a:noFill/>
+        </p:spPr>
+        <p:txBody>
+          <a:bodyPr wrap="square" anchor="t">
+            <a:spAutoFit/>
+          </a:bodyPr>
+          <a:lstStyle/>
+          <a:p>
+            <a:pPr algn="ctr"/>
+            <a:r>
+              <a:rPr sz="1000" b="0">
+                <a:solidFill>
+                  <a:srgbClr val="64748B"/>
+                </a:solidFill>
+                <a:latin typeface="Calibri"/>
+              </a:rPr>
+              <a:t>Completed jobs and gross merchandise volume</a:t>
+            </a:r>
+          </a:p>
+        </p:txBody>
+      </p:sp>
+      <p:sp>
+        <p:nvSpPr>
+          <p:cNvPr id="6" name="TextBox 5"/>
+          <p:cNvSpPr txBox="1"/>
+          <p:nvPr/>
+        </p:nvSpPr>
+        <p:spPr>
+          <a:xfrm>
+            <a:off x="502920" y="6446520"/>
+            <a:ext cx="11185855" cy="320040"/>
+          </a:xfrm>
+          <a:prstGeom prst="rect">
+            <a:avLst/>
+          </a:prstGeom>
+          <a:noFill/>
+        </p:spPr>
+        <p:txBody>
+          <a:bodyPr wrap="square" anchor="t">
+            <a:spAutoFit/>
+          </a:bodyPr>
+          <a:lstStyle/>
+          <a:p>
+            <a:pPr algn="ctr"/>
+            <a:r>
+              <a:rPr sz="900" b="0">
+                <a:solidFill>
+                  <a:srgbClr val="64748B"/>
+                </a:solidFill>
+                <a:latin typeface="Calibri"/>
+              </a:rPr>
+              <a:t>Manye Patrice  |  IT Innovation in Business — Master's Degree  |  Slide 14 of 31</a:t>
+            </a:r>
+          </a:p>
+        </p:txBody>
+      </p:sp>
+    </p:spTree>
+  </p:cSld>
+  <p:clrMapOvr>
+    <a:masterClrMapping/>
+  </p:clrMapOvr>
+</p:sld>
+</file>
+
+<file path=ppt/slides/slide15.xml><?xml version="1.0" encoding="utf-8"?>
+<p:sld xmlns:a="http://schemas.openxmlformats.org/drawingml/2006/main" xmlns:r="http://schemas.openxmlformats.org/officeDocument/2006/relationships" xmlns:p="http://schemas.openxmlformats.org/presentationml/2006/main">
   <p:cSld>
     <p:bg>
       <p:bgPr>
@@ -4772,7 +5397,14 @@
         <p:cNvGrpSpPr/>
         <p:nvPr/>
       </p:nvGrpSpPr>
-      <p:grpSpPr/>
+      <p:grpSpPr>
+        <a:xfrm>
+          <a:off x="0" y="0"/>
+          <a:ext cx="0" cy="0"/>
+          <a:chOff x="0" y="0"/>
+          <a:chExt cx="0" cy="0"/>
+        </a:xfrm>
+      </p:grpSpPr>
       <p:sp>
         <p:nvSpPr>
           <p:cNvPr id="2" name="TextBox 1"/>
@@ -4873,7 +5505,7 @@
                 </a:solidFill>
                 <a:latin typeface="Calibri"/>
               </a:rPr>
-              <a:t>Manye Patrice  |  IT Innovation in Business — Master's Degree  |  Slide 12 of 28</a:t>
+              <a:t>Manye Patrice  |  IT Innovation in Business — Master's Degree  |  Slide 15 of 31</a:t>
             </a:r>
           </a:p>
         </p:txBody>
@@ -4886,8 +5518,8 @@
 </p:sld>
 </file>
 
-<file path=ppt/slides/slide13.xml><?xml version="1.0" encoding="utf-8"?>
-<p:sld xmlns:a="http://schemas.openxmlformats.org/drawingml/2006/main" xmlns:p="http://schemas.openxmlformats.org/presentationml/2006/main" xmlns:r="http://schemas.openxmlformats.org/officeDocument/2006/relationships">
+<file path=ppt/slides/slide16.xml><?xml version="1.0" encoding="utf-8"?>
+<p:sld xmlns:a="http://schemas.openxmlformats.org/drawingml/2006/main" xmlns:r="http://schemas.openxmlformats.org/officeDocument/2006/relationships" xmlns:p="http://schemas.openxmlformats.org/presentationml/2006/main">
   <p:cSld>
     <p:spTree>
       <p:nvGrpSpPr>
@@ -4895,7 +5527,14 @@
         <p:cNvGrpSpPr/>
         <p:nvPr/>
       </p:nvGrpSpPr>
-      <p:grpSpPr/>
+      <p:grpSpPr>
+        <a:xfrm>
+          <a:off x="0" y="0"/>
+          <a:ext cx="0" cy="0"/>
+          <a:chOff x="0" y="0"/>
+          <a:chExt cx="0" cy="0"/>
+        </a:xfrm>
+      </p:grpSpPr>
       <p:sp>
         <p:nvSpPr>
           <p:cNvPr id="2" name="Rectangle 1"/>
@@ -4936,6 +5575,7 @@
           <a:lstStyle/>
           <a:p>
             <a:pPr algn="ctr"/>
+            <a:endParaRPr/>
           </a:p>
         </p:txBody>
       </p:sp>
@@ -5049,6 +5689,7 @@
           <a:lstStyle/>
           <a:p>
             <a:pPr algn="ctr"/>
+            <a:endParaRPr/>
           </a:p>
         </p:txBody>
       </p:sp>
@@ -5197,6 +5838,7 @@
           <a:lstStyle/>
           <a:p>
             <a:pPr algn="ctr"/>
+            <a:endParaRPr/>
           </a:p>
         </p:txBody>
       </p:sp>
@@ -5345,6 +5987,7 @@
           <a:lstStyle/>
           <a:p>
             <a:pPr algn="ctr"/>
+            <a:endParaRPr/>
           </a:p>
         </p:txBody>
       </p:sp>
@@ -5493,6 +6136,7 @@
           <a:lstStyle/>
           <a:p>
             <a:pPr algn="ctr"/>
+            <a:endParaRPr/>
           </a:p>
         </p:txBody>
       </p:sp>
@@ -5596,7 +6240,7 @@
                 </a:solidFill>
                 <a:latin typeface="Calibri"/>
               </a:rPr>
-              <a:t>Manye Patrice  |  IT Innovation in Business — Master's Degree  |  Slide 13 of 28</a:t>
+              <a:t>Manye Patrice  |  IT Innovation in Business — Master's Degree  |  Slide 16 of 31</a:t>
             </a:r>
           </a:p>
         </p:txBody>
@@ -5609,8 +6253,8 @@
 </p:sld>
 </file>
 
-<file path=ppt/slides/slide14.xml><?xml version="1.0" encoding="utf-8"?>
-<p:sld xmlns:a="http://schemas.openxmlformats.org/drawingml/2006/main" xmlns:p="http://schemas.openxmlformats.org/presentationml/2006/main" xmlns:r="http://schemas.openxmlformats.org/officeDocument/2006/relationships">
+<file path=ppt/slides/slide17.xml><?xml version="1.0" encoding="utf-8"?>
+<p:sld xmlns:a="http://schemas.openxmlformats.org/drawingml/2006/main" xmlns:r="http://schemas.openxmlformats.org/officeDocument/2006/relationships" xmlns:p="http://schemas.openxmlformats.org/presentationml/2006/main">
   <p:cSld>
     <p:spTree>
       <p:nvGrpSpPr>
@@ -5618,7 +6262,14 @@
         <p:cNvGrpSpPr/>
         <p:nvPr/>
       </p:nvGrpSpPr>
-      <p:grpSpPr/>
+      <p:grpSpPr>
+        <a:xfrm>
+          <a:off x="0" y="0"/>
+          <a:ext cx="0" cy="0"/>
+          <a:chOff x="0" y="0"/>
+          <a:chExt cx="0" cy="0"/>
+        </a:xfrm>
+      </p:grpSpPr>
       <p:sp>
         <p:nvSpPr>
           <p:cNvPr id="2" name="Rectangle 1"/>
@@ -5659,6 +6310,7 @@
           <a:lstStyle/>
           <a:p>
             <a:pPr algn="ctr"/>
+            <a:endParaRPr/>
           </a:p>
         </p:txBody>
       </p:sp>
@@ -5703,11 +6355,17 @@
           <p:cNvGraphicFramePr>
             <a:graphicFrameLocks noGrp="1"/>
           </p:cNvGraphicFramePr>
-          <p:nvPr/>
+          <p:nvPr>
+            <p:extLst>
+              <p:ext uri="{D42A27DB-BD31-4B8C-83A1-F6EECF244321}">
+                <p14:modId xmlns:p14="http://schemas.microsoft.com/office/powerpoint/2010/main" val="2693142467"/>
+              </p:ext>
+            </p:extLst>
+          </p:nvPr>
         </p:nvGraphicFramePr>
         <p:xfrm>
-          <a:off x="502920" y="1234440"/>
-          <a:ext cx="7772400" cy="2468880"/>
+          <a:off x="502920" y="1234436"/>
+          <a:ext cx="11185854" cy="3348714"/>
         </p:xfrm>
         <a:graphic>
           <a:graphicData uri="http://schemas.openxmlformats.org/drawingml/2006/table">
@@ -5716,18 +6374,36 @@
                 <a:tableStyleId>{5C22544A-7EE6-4342-B048-85BDC9FD1C3A}</a:tableStyleId>
               </a:tblPr>
               <a:tblGrid>
-                <a:gridCol w="1371600"/>
-                <a:gridCol w="2286000"/>
-                <a:gridCol w="4114800"/>
+                <a:gridCol w="1973974">
+                  <a:extLst>
+                    <a:ext uri="{9D8B030D-6E8A-4147-A177-3AD203B41FA5}">
+                      <a16:colId xmlns:a16="http://schemas.microsoft.com/office/drawing/2014/main" val="20000"/>
+                    </a:ext>
+                  </a:extLst>
+                </a:gridCol>
+                <a:gridCol w="3289957">
+                  <a:extLst>
+                    <a:ext uri="{9D8B030D-6E8A-4147-A177-3AD203B41FA5}">
+                      <a16:colId xmlns:a16="http://schemas.microsoft.com/office/drawing/2014/main" val="20001"/>
+                    </a:ext>
+                  </a:extLst>
+                </a:gridCol>
+                <a:gridCol w="5921923">
+                  <a:extLst>
+                    <a:ext uri="{9D8B030D-6E8A-4147-A177-3AD203B41FA5}">
+                      <a16:colId xmlns:a16="http://schemas.microsoft.com/office/drawing/2014/main" val="20002"/>
+                    </a:ext>
+                  </a:extLst>
+                </a:gridCol>
               </a:tblGrid>
-              <a:tr h="411480">
+              <a:tr h="558119">
                 <a:tc>
                   <a:txBody>
                     <a:bodyPr/>
                     <a:lstStyle/>
                     <a:p>
                       <a:pPr algn="ctr">
-                        <a:defRPr b="1" sz="1100">
+                        <a:defRPr sz="1100" b="1">
                           <a:solidFill>
                             <a:srgbClr val="FFFFFF"/>
                           </a:solidFill>
@@ -5750,7 +6426,7 @@
                     <a:lstStyle/>
                     <a:p>
                       <a:pPr algn="ctr">
-                        <a:defRPr b="1" sz="1100">
+                        <a:defRPr sz="1100" b="1">
                           <a:solidFill>
                             <a:srgbClr val="FFFFFF"/>
                           </a:solidFill>
@@ -5773,13 +6449,14 @@
                     <a:lstStyle/>
                     <a:p>
                       <a:pPr algn="ctr">
-                        <a:defRPr b="1" sz="1100">
+                        <a:defRPr sz="1100" b="1">
                           <a:solidFill>
                             <a:srgbClr val="FFFFFF"/>
                           </a:solidFill>
                         </a:defRPr>
                       </a:pPr>
                       <a:r>
+                        <a:rPr dirty="0"/>
                         <a:t>Role</a:t>
                       </a:r>
                     </a:p>
@@ -5790,8 +6467,13 @@
                     </a:solidFill>
                   </a:tcPr>
                 </a:tc>
+                <a:extLst>
+                  <a:ext uri="{0D108BD9-81ED-4DB2-BD59-A6C34878D82A}">
+                    <a16:rowId xmlns:a16="http://schemas.microsoft.com/office/drawing/2014/main" val="10000"/>
+                  </a:ext>
+                </a:extLst>
               </a:tr>
-              <a:tr h="411480">
+              <a:tr h="558119">
                 <a:tc>
                   <a:txBody>
                     <a:bodyPr/>
@@ -5861,8 +6543,13 @@
                     </a:solidFill>
                   </a:tcPr>
                 </a:tc>
+                <a:extLst>
+                  <a:ext uri="{0D108BD9-81ED-4DB2-BD59-A6C34878D82A}">
+                    <a16:rowId xmlns:a16="http://schemas.microsoft.com/office/drawing/2014/main" val="10001"/>
+                  </a:ext>
+                </a:extLst>
               </a:tr>
-              <a:tr h="411480">
+              <a:tr h="558119">
                 <a:tc>
                   <a:txBody>
                     <a:bodyPr/>
@@ -5932,8 +6619,13 @@
                     </a:solidFill>
                   </a:tcPr>
                 </a:tc>
+                <a:extLst>
+                  <a:ext uri="{0D108BD9-81ED-4DB2-BD59-A6C34878D82A}">
+                    <a16:rowId xmlns:a16="http://schemas.microsoft.com/office/drawing/2014/main" val="10002"/>
+                  </a:ext>
+                </a:extLst>
               </a:tr>
-              <a:tr h="411480">
+              <a:tr h="558119">
                 <a:tc>
                   <a:txBody>
                     <a:bodyPr/>
@@ -6003,8 +6695,13 @@
                     </a:solidFill>
                   </a:tcPr>
                 </a:tc>
+                <a:extLst>
+                  <a:ext uri="{0D108BD9-81ED-4DB2-BD59-A6C34878D82A}">
+                    <a16:rowId xmlns:a16="http://schemas.microsoft.com/office/drawing/2014/main" val="10003"/>
+                  </a:ext>
+                </a:extLst>
               </a:tr>
-              <a:tr h="411480">
+              <a:tr h="558119">
                 <a:tc>
                   <a:txBody>
                     <a:bodyPr/>
@@ -6074,8 +6771,13 @@
                     </a:solidFill>
                   </a:tcPr>
                 </a:tc>
+                <a:extLst>
+                  <a:ext uri="{0D108BD9-81ED-4DB2-BD59-A6C34878D82A}">
+                    <a16:rowId xmlns:a16="http://schemas.microsoft.com/office/drawing/2014/main" val="10004"/>
+                  </a:ext>
+                </a:extLst>
               </a:tr>
-              <a:tr h="411480">
+              <a:tr h="558119">
                 <a:tc>
                   <a:txBody>
                     <a:bodyPr/>
@@ -6135,6 +6837,7 @@
                         </a:defRPr>
                       </a:pPr>
                       <a:r>
+                        <a:rPr dirty="0"/>
                         <a:t>Four-service stack</a:t>
                       </a:r>
                     </a:p>
@@ -6145,6 +6848,11 @@
                     </a:solidFill>
                   </a:tcPr>
                 </a:tc>
+                <a:extLst>
+                  <a:ext uri="{0D108BD9-81ED-4DB2-BD59-A6C34878D82A}">
+                    <a16:rowId xmlns:a16="http://schemas.microsoft.com/office/drawing/2014/main" val="10005"/>
+                  </a:ext>
+                </a:extLst>
               </a:tr>
             </a:tbl>
           </a:graphicData>
@@ -6180,7 +6888,7 @@
                 </a:solidFill>
                 <a:latin typeface="Calibri"/>
               </a:rPr>
-              <a:t>Manye Patrice  |  IT Innovation in Business — Master's Degree  |  Slide 14 of 28</a:t>
+              <a:t>Manye Patrice  |  IT Innovation in Business — Master's Degree  |  Slide 17 of 31</a:t>
             </a:r>
           </a:p>
         </p:txBody>
@@ -6193,8 +6901,8 @@
 </p:sld>
 </file>
 
-<file path=ppt/slides/slide15.xml><?xml version="1.0" encoding="utf-8"?>
-<p:sld xmlns:a="http://schemas.openxmlformats.org/drawingml/2006/main" xmlns:p="http://schemas.openxmlformats.org/presentationml/2006/main" xmlns:r="http://schemas.openxmlformats.org/officeDocument/2006/relationships">
+<file path=ppt/slides/slide18.xml><?xml version="1.0" encoding="utf-8"?>
+<p:sld xmlns:a="http://schemas.openxmlformats.org/drawingml/2006/main" xmlns:r="http://schemas.openxmlformats.org/officeDocument/2006/relationships" xmlns:p="http://schemas.openxmlformats.org/presentationml/2006/main">
   <p:cSld>
     <p:spTree>
       <p:nvGrpSpPr>
@@ -6202,7 +6910,14 @@
         <p:cNvGrpSpPr/>
         <p:nvPr/>
       </p:nvGrpSpPr>
-      <p:grpSpPr/>
+      <p:grpSpPr>
+        <a:xfrm>
+          <a:off x="0" y="0"/>
+          <a:ext cx="0" cy="0"/>
+          <a:chOff x="0" y="0"/>
+          <a:chExt cx="0" cy="0"/>
+        </a:xfrm>
+      </p:grpSpPr>
       <p:sp>
         <p:nvSpPr>
           <p:cNvPr id="2" name="Rectangle 1"/>
@@ -6243,6 +6958,7 @@
           <a:lstStyle/>
           <a:p>
             <a:pPr algn="ctr"/>
+            <a:endParaRPr/>
           </a:p>
         </p:txBody>
       </p:sp>
@@ -6448,7 +7164,7 @@
                 </a:solidFill>
                 <a:latin typeface="Calibri"/>
               </a:rPr>
-              <a:t>Manye Patrice  |  IT Innovation in Business — Master's Degree  |  Slide 15 of 28</a:t>
+              <a:t>Manye Patrice  |  IT Innovation in Business — Master's Degree  |  Slide 18 of 31</a:t>
             </a:r>
           </a:p>
         </p:txBody>
@@ -6461,8 +7177,8 @@
 </p:sld>
 </file>
 
-<file path=ppt/slides/slide16.xml><?xml version="1.0" encoding="utf-8"?>
-<p:sld xmlns:a="http://schemas.openxmlformats.org/drawingml/2006/main" xmlns:p="http://schemas.openxmlformats.org/presentationml/2006/main" xmlns:r="http://schemas.openxmlformats.org/officeDocument/2006/relationships">
+<file path=ppt/slides/slide19.xml><?xml version="1.0" encoding="utf-8"?>
+<p:sld xmlns:a="http://schemas.openxmlformats.org/drawingml/2006/main" xmlns:r="http://schemas.openxmlformats.org/officeDocument/2006/relationships" xmlns:p="http://schemas.openxmlformats.org/presentationml/2006/main">
   <p:cSld>
     <p:bg>
       <p:bgPr>
@@ -6478,7 +7194,14 @@
         <p:cNvGrpSpPr/>
         <p:nvPr/>
       </p:nvGrpSpPr>
-      <p:grpSpPr/>
+      <p:grpSpPr>
+        <a:xfrm>
+          <a:off x="0" y="0"/>
+          <a:ext cx="0" cy="0"/>
+          <a:chOff x="0" y="0"/>
+          <a:chExt cx="0" cy="0"/>
+        </a:xfrm>
+      </p:grpSpPr>
       <p:sp>
         <p:nvSpPr>
           <p:cNvPr id="2" name="TextBox 1"/>
@@ -6579,7 +7302,7 @@
                 </a:solidFill>
                 <a:latin typeface="Calibri"/>
               </a:rPr>
-              <a:t>Manye Patrice  |  IT Innovation in Business — Master's Degree  |  Slide 16 of 28</a:t>
+              <a:t>Manye Patrice  |  IT Innovation in Business — Master's Degree  |  Slide 19 of 31</a:t>
             </a:r>
           </a:p>
         </p:txBody>
@@ -6592,8 +7315,8 @@
 </p:sld>
 </file>
 
-<file path=ppt/slides/slide17.xml><?xml version="1.0" encoding="utf-8"?>
-<p:sld xmlns:a="http://schemas.openxmlformats.org/drawingml/2006/main" xmlns:p="http://schemas.openxmlformats.org/presentationml/2006/main" xmlns:r="http://schemas.openxmlformats.org/officeDocument/2006/relationships">
+<file path=ppt/slides/slide2.xml><?xml version="1.0" encoding="utf-8"?>
+<p:sld xmlns:a="http://schemas.openxmlformats.org/drawingml/2006/main" xmlns:r="http://schemas.openxmlformats.org/officeDocument/2006/relationships" xmlns:p="http://schemas.openxmlformats.org/presentationml/2006/main">
   <p:cSld>
     <p:spTree>
       <p:nvGrpSpPr>
@@ -6601,7 +7324,14 @@
         <p:cNvGrpSpPr/>
         <p:nvPr/>
       </p:nvGrpSpPr>
-      <p:grpSpPr/>
+      <p:grpSpPr>
+        <a:xfrm>
+          <a:off x="0" y="0"/>
+          <a:ext cx="0" cy="0"/>
+          <a:chOff x="0" y="0"/>
+          <a:chExt cx="0" cy="0"/>
+        </a:xfrm>
+      </p:grpSpPr>
       <p:sp>
         <p:nvSpPr>
           <p:cNvPr id="2" name="Rectangle 1"/>
@@ -6642,6 +7372,302 @@
           <a:lstStyle/>
           <a:p>
             <a:pPr algn="ctr"/>
+            <a:endParaRPr/>
+          </a:p>
+        </p:txBody>
+      </p:sp>
+      <p:sp>
+        <p:nvSpPr>
+          <p:cNvPr id="3" name="TextBox 2"/>
+          <p:cNvSpPr txBox="1"/>
+          <p:nvPr/>
+        </p:nvSpPr>
+        <p:spPr>
+          <a:xfrm>
+            <a:off x="502920" y="201168"/>
+            <a:ext cx="11185855" cy="502920"/>
+          </a:xfrm>
+          <a:prstGeom prst="rect">
+            <a:avLst/>
+          </a:prstGeom>
+          <a:noFill/>
+        </p:spPr>
+        <p:txBody>
+          <a:bodyPr wrap="square" anchor="t">
+            <a:spAutoFit/>
+          </a:bodyPr>
+          <a:lstStyle/>
+          <a:p>
+            <a:pPr algn="l"/>
+            <a:r>
+              <a:rPr sz="2800" b="1">
+                <a:solidFill>
+                  <a:srgbClr val="FFFFFF"/>
+                </a:solidFill>
+                <a:latin typeface="Calibri"/>
+              </a:rPr>
+              <a:t>Presentation Outline</a:t>
+            </a:r>
+          </a:p>
+        </p:txBody>
+      </p:sp>
+      <p:sp>
+        <p:nvSpPr>
+          <p:cNvPr id="4" name="TextBox 3"/>
+          <p:cNvSpPr txBox="1"/>
+          <p:nvPr/>
+        </p:nvSpPr>
+        <p:spPr>
+          <a:xfrm>
+            <a:off x="502920" y="1234440"/>
+            <a:ext cx="11185855" cy="5029200"/>
+          </a:xfrm>
+          <a:prstGeom prst="rect">
+            <a:avLst/>
+          </a:prstGeom>
+          <a:noFill/>
+        </p:spPr>
+        <p:txBody>
+          <a:bodyPr wrap="square">
+            <a:spAutoFit/>
+          </a:bodyPr>
+          <a:lstStyle/>
+          <a:p>
+            <a:pPr>
+              <a:lnSpc>
+                <a:spcPct val="115000"/>
+              </a:lnSpc>
+              <a:spcAft>
+                <a:spcPts val="600"/>
+              </a:spcAft>
+              <a:defRPr sz="1600">
+                <a:solidFill>
+                  <a:srgbClr val="1E293B"/>
+                </a:solidFill>
+                <a:latin typeface="Calibri"/>
+              </a:defRPr>
+            </a:pPr>
+            <a:r>
+              <a:t>1.  Introduction, problem &amp; goals</a:t>
+            </a:r>
+          </a:p>
+          <a:p>
+            <a:pPr>
+              <a:lnSpc>
+                <a:spcPct val="115000"/>
+              </a:lnSpc>
+              <a:spcAft>
+                <a:spcPts val="600"/>
+              </a:spcAft>
+              <a:defRPr sz="1600">
+                <a:solidFill>
+                  <a:srgbClr val="1E293B"/>
+                </a:solidFill>
+                <a:latin typeface="Calibri"/>
+              </a:defRPr>
+            </a:pPr>
+            <a:r>
+              <a:t>2.  Business model &amp; growth projections</a:t>
+            </a:r>
+          </a:p>
+          <a:p>
+            <a:pPr>
+              <a:lnSpc>
+                <a:spcPct val="115000"/>
+              </a:lnSpc>
+              <a:spcAft>
+                <a:spcPts val="600"/>
+              </a:spcAft>
+              <a:defRPr sz="1600">
+                <a:solidFill>
+                  <a:srgbClr val="1E293B"/>
+                </a:solidFill>
+                <a:latin typeface="Calibri"/>
+              </a:defRPr>
+            </a:pPr>
+            <a:r>
+              <a:t>3.  System design &amp; architecture</a:t>
+            </a:r>
+          </a:p>
+          <a:p>
+            <a:pPr>
+              <a:lnSpc>
+                <a:spcPct val="115000"/>
+              </a:lnSpc>
+              <a:spcAft>
+                <a:spcPts val="600"/>
+              </a:spcAft>
+              <a:defRPr sz="1600">
+                <a:solidFill>
+                  <a:srgbClr val="1E293B"/>
+                </a:solidFill>
+                <a:latin typeface="Calibri"/>
+              </a:defRPr>
+            </a:pPr>
+            <a:r>
+              <a:t>4.  Implementation &amp; security</a:t>
+            </a:r>
+          </a:p>
+          <a:p>
+            <a:pPr>
+              <a:lnSpc>
+                <a:spcPct val="115000"/>
+              </a:lnSpc>
+              <a:spcAft>
+                <a:spcPts val="600"/>
+              </a:spcAft>
+              <a:defRPr sz="1600">
+                <a:solidFill>
+                  <a:srgbClr val="1E293B"/>
+                </a:solidFill>
+                <a:latin typeface="Calibri"/>
+              </a:defRPr>
+            </a:pPr>
+            <a:r>
+              <a:t>5.  Live demo (screenshots)</a:t>
+            </a:r>
+          </a:p>
+          <a:p>
+            <a:pPr>
+              <a:lnSpc>
+                <a:spcPct val="115000"/>
+              </a:lnSpc>
+              <a:spcAft>
+                <a:spcPts val="600"/>
+              </a:spcAft>
+              <a:defRPr sz="1600">
+                <a:solidFill>
+                  <a:srgbClr val="1E293B"/>
+                </a:solidFill>
+                <a:latin typeface="Calibri"/>
+              </a:defRPr>
+            </a:pPr>
+            <a:r>
+              <a:t>6.  Testing, deployment &amp; rubric alignment</a:t>
+            </a:r>
+          </a:p>
+          <a:p>
+            <a:pPr>
+              <a:lnSpc>
+                <a:spcPct val="115000"/>
+              </a:lnSpc>
+              <a:spcAft>
+                <a:spcPts val="600"/>
+              </a:spcAft>
+              <a:defRPr sz="1600">
+                <a:solidFill>
+                  <a:srgbClr val="1E293B"/>
+                </a:solidFill>
+                <a:latin typeface="Calibri"/>
+              </a:defRPr>
+            </a:pPr>
+            <a:r>
+              <a:t>7.  Conclusion &amp; Q&amp;A</a:t>
+            </a:r>
+          </a:p>
+        </p:txBody>
+      </p:sp>
+      <p:sp>
+        <p:nvSpPr>
+          <p:cNvPr id="5" name="TextBox 4"/>
+          <p:cNvSpPr txBox="1"/>
+          <p:nvPr/>
+        </p:nvSpPr>
+        <p:spPr>
+          <a:xfrm>
+            <a:off x="502920" y="6446520"/>
+            <a:ext cx="11185855" cy="320040"/>
+          </a:xfrm>
+          <a:prstGeom prst="rect">
+            <a:avLst/>
+          </a:prstGeom>
+          <a:noFill/>
+        </p:spPr>
+        <p:txBody>
+          <a:bodyPr wrap="square" anchor="t">
+            <a:spAutoFit/>
+          </a:bodyPr>
+          <a:lstStyle/>
+          <a:p>
+            <a:pPr algn="ctr"/>
+            <a:r>
+              <a:rPr sz="900" b="0">
+                <a:solidFill>
+                  <a:srgbClr val="64748B"/>
+                </a:solidFill>
+                <a:latin typeface="Calibri"/>
+              </a:rPr>
+              <a:t>Manye Patrice  |  IT Innovation in Business — Master's Degree  |  Slide 2 of 31</a:t>
+            </a:r>
+          </a:p>
+        </p:txBody>
+      </p:sp>
+    </p:spTree>
+  </p:cSld>
+  <p:clrMapOvr>
+    <a:masterClrMapping/>
+  </p:clrMapOvr>
+</p:sld>
+</file>
+
+<file path=ppt/slides/slide20.xml><?xml version="1.0" encoding="utf-8"?>
+<p:sld xmlns:a="http://schemas.openxmlformats.org/drawingml/2006/main" xmlns:r="http://schemas.openxmlformats.org/officeDocument/2006/relationships" xmlns:p="http://schemas.openxmlformats.org/presentationml/2006/main">
+  <p:cSld>
+    <p:spTree>
+      <p:nvGrpSpPr>
+        <p:cNvPr id="1" name=""/>
+        <p:cNvGrpSpPr/>
+        <p:nvPr/>
+      </p:nvGrpSpPr>
+      <p:grpSpPr>
+        <a:xfrm>
+          <a:off x="0" y="0"/>
+          <a:ext cx="0" cy="0"/>
+          <a:chOff x="0" y="0"/>
+          <a:chExt cx="0" cy="0"/>
+        </a:xfrm>
+      </p:grpSpPr>
+      <p:sp>
+        <p:nvSpPr>
+          <p:cNvPr id="2" name="Rectangle 1"/>
+          <p:cNvSpPr/>
+          <p:nvPr/>
+        </p:nvSpPr>
+        <p:spPr>
+          <a:xfrm>
+            <a:off x="0" y="0"/>
+            <a:ext cx="12191695" cy="1051560"/>
+          </a:xfrm>
+          <a:prstGeom prst="rect">
+            <a:avLst/>
+          </a:prstGeom>
+          <a:solidFill>
+            <a:srgbClr val="1E3A8A"/>
+          </a:solidFill>
+          <a:ln>
+            <a:noFill/>
+          </a:ln>
+        </p:spPr>
+        <p:style>
+          <a:lnRef idx="1">
+            <a:schemeClr val="accent1"/>
+          </a:lnRef>
+          <a:fillRef idx="3">
+            <a:schemeClr val="accent1"/>
+          </a:fillRef>
+          <a:effectRef idx="2">
+            <a:schemeClr val="accent1"/>
+          </a:effectRef>
+          <a:fontRef idx="minor">
+            <a:schemeClr val="lt1"/>
+          </a:fontRef>
+        </p:style>
+        <p:txBody>
+          <a:bodyPr rtlCol="0" anchor="ctr"/>
+          <a:lstStyle/>
+          <a:p>
+            <a:pPr algn="ctr"/>
+            <a:endParaRPr/>
           </a:p>
         </p:txBody>
       </p:sp>
@@ -7016,7 +8042,7 @@
                 </a:solidFill>
                 <a:latin typeface="Calibri"/>
               </a:rPr>
-              <a:t>Manye Patrice  |  IT Innovation in Business — Master's Degree  |  Slide 17 of 28</a:t>
+              <a:t>Manye Patrice  |  IT Innovation in Business — Master's Degree  |  Slide 20 of 31</a:t>
             </a:r>
           </a:p>
         </p:txBody>
@@ -7029,8 +8055,8 @@
 </p:sld>
 </file>
 
-<file path=ppt/slides/slide18.xml><?xml version="1.0" encoding="utf-8"?>
-<p:sld xmlns:a="http://schemas.openxmlformats.org/drawingml/2006/main" xmlns:p="http://schemas.openxmlformats.org/presentationml/2006/main" xmlns:r="http://schemas.openxmlformats.org/officeDocument/2006/relationships">
+<file path=ppt/slides/slide21.xml><?xml version="1.0" encoding="utf-8"?>
+<p:sld xmlns:a="http://schemas.openxmlformats.org/drawingml/2006/main" xmlns:r="http://schemas.openxmlformats.org/officeDocument/2006/relationships" xmlns:p="http://schemas.openxmlformats.org/presentationml/2006/main">
   <p:cSld>
     <p:bg>
       <p:bgPr>
@@ -7046,7 +8072,14 @@
         <p:cNvGrpSpPr/>
         <p:nvPr/>
       </p:nvGrpSpPr>
-      <p:grpSpPr/>
+      <p:grpSpPr>
+        <a:xfrm>
+          <a:off x="0" y="0"/>
+          <a:ext cx="0" cy="0"/>
+          <a:chOff x="0" y="0"/>
+          <a:chExt cx="0" cy="0"/>
+        </a:xfrm>
+      </p:grpSpPr>
       <p:sp>
         <p:nvSpPr>
           <p:cNvPr id="2" name="TextBox 1"/>
@@ -7147,7 +8180,7 @@
                 </a:solidFill>
                 <a:latin typeface="Calibri"/>
               </a:rPr>
-              <a:t>Manye Patrice  |  IT Innovation in Business — Master's Degree  |  Slide 18 of 28</a:t>
+              <a:t>Manye Patrice  |  IT Innovation in Business — Master's Degree  |  Slide 21 of 31</a:t>
             </a:r>
           </a:p>
         </p:txBody>
@@ -7160,8 +8193,8 @@
 </p:sld>
 </file>
 
-<file path=ppt/slides/slide19.xml><?xml version="1.0" encoding="utf-8"?>
-<p:sld xmlns:a="http://schemas.openxmlformats.org/drawingml/2006/main" xmlns:p="http://schemas.openxmlformats.org/presentationml/2006/main" xmlns:r="http://schemas.openxmlformats.org/officeDocument/2006/relationships">
+<file path=ppt/slides/slide22.xml><?xml version="1.0" encoding="utf-8"?>
+<p:sld xmlns:a="http://schemas.openxmlformats.org/drawingml/2006/main" xmlns:r="http://schemas.openxmlformats.org/officeDocument/2006/relationships" xmlns:p="http://schemas.openxmlformats.org/presentationml/2006/main">
   <p:cSld>
     <p:spTree>
       <p:nvGrpSpPr>
@@ -7169,7 +8202,14 @@
         <p:cNvGrpSpPr/>
         <p:nvPr/>
       </p:nvGrpSpPr>
-      <p:grpSpPr/>
+      <p:grpSpPr>
+        <a:xfrm>
+          <a:off x="0" y="0"/>
+          <a:ext cx="0" cy="0"/>
+          <a:chOff x="0" y="0"/>
+          <a:chExt cx="0" cy="0"/>
+        </a:xfrm>
+      </p:grpSpPr>
       <p:sp>
         <p:nvSpPr>
           <p:cNvPr id="2" name="Rectangle 1"/>
@@ -7210,6 +8250,7 @@
           <a:lstStyle/>
           <a:p>
             <a:pPr algn="ctr"/>
+            <a:endParaRPr/>
           </a:p>
         </p:txBody>
       </p:sp>
@@ -7291,6 +8332,7 @@
           <a:lstStyle/>
           <a:p>
             <a:pPr algn="ctr"/>
+            <a:endParaRPr/>
           </a:p>
         </p:txBody>
       </p:sp>
@@ -7429,11 +8471,41 @@
                 </a:solidFill>
                 <a:latin typeface="Calibri"/>
               </a:rPr>
-              <a:t>Manye Patrice  |  IT Innovation in Business — Master's Degree  |  Slide 19 of 28</a:t>
-            </a:r>
-          </a:p>
-        </p:txBody>
-      </p:sp>
+              <a:t>Manye Patrice  |  IT Innovation in Business — Master's Degree  |  Slide 22 of 31</a:t>
+            </a:r>
+          </a:p>
+        </p:txBody>
+      </p:sp>
+      <p:pic>
+        <p:nvPicPr>
+          <p:cNvPr id="9" name="Image 8"/>
+          <p:cNvPicPr>
+            <a:picLocks noChangeAspect="1"/>
+          </p:cNvPicPr>
+          <p:nvPr/>
+        </p:nvPicPr>
+        <p:blipFill>
+          <a:blip r:embed="rId2">
+            <a:extLst>
+              <a:ext uri="{28A0092B-C50C-407E-A947-70E740481C1C}">
+                <a14:useLocalDpi xmlns:a14="http://schemas.microsoft.com/office/drawing/2010/main" val="0"/>
+              </a:ext>
+            </a:extLst>
+          </a:blip>
+          <a:stretch>
+            <a:fillRect/>
+          </a:stretch>
+        </p:blipFill>
+        <p:spPr>
+          <a:xfrm>
+            <a:off x="502921" y="1252728"/>
+            <a:ext cx="11185854" cy="4142231"/>
+          </a:xfrm>
+          <a:prstGeom prst="rect">
+            <a:avLst/>
+          </a:prstGeom>
+        </p:spPr>
+      </p:pic>
     </p:spTree>
   </p:cSld>
   <p:clrMapOvr>
@@ -7442,8 +8514,8 @@
 </p:sld>
 </file>
 
-<file path=ppt/slides/slide2.xml><?xml version="1.0" encoding="utf-8"?>
-<p:sld xmlns:a="http://schemas.openxmlformats.org/drawingml/2006/main" xmlns:p="http://schemas.openxmlformats.org/presentationml/2006/main" xmlns:r="http://schemas.openxmlformats.org/officeDocument/2006/relationships">
+<file path=ppt/slides/slide23.xml><?xml version="1.0" encoding="utf-8"?>
+<p:sld xmlns:a="http://schemas.openxmlformats.org/drawingml/2006/main" xmlns:r="http://schemas.openxmlformats.org/officeDocument/2006/relationships" xmlns:p="http://schemas.openxmlformats.org/presentationml/2006/main">
   <p:cSld>
     <p:spTree>
       <p:nvGrpSpPr>
@@ -7451,7 +8523,14 @@
         <p:cNvGrpSpPr/>
         <p:nvPr/>
       </p:nvGrpSpPr>
-      <p:grpSpPr/>
+      <p:grpSpPr>
+        <a:xfrm>
+          <a:off x="0" y="0"/>
+          <a:ext cx="0" cy="0"/>
+          <a:chOff x="0" y="0"/>
+          <a:chExt cx="0" cy="0"/>
+        </a:xfrm>
+      </p:grpSpPr>
       <p:sp>
         <p:nvSpPr>
           <p:cNvPr id="2" name="Rectangle 1"/>
@@ -7492,6 +8571,7 @@
           <a:lstStyle/>
           <a:p>
             <a:pPr algn="ctr"/>
+            <a:endParaRPr/>
           </a:p>
         </p:txBody>
       </p:sp>
@@ -7525,239 +8605,33 @@
                 </a:solidFill>
                 <a:latin typeface="Calibri"/>
               </a:rPr>
-              <a:t>Presentation Outline</a:t>
-            </a:r>
-          </a:p>
-        </p:txBody>
-      </p:sp>
-      <p:sp>
-        <p:nvSpPr>
-          <p:cNvPr id="4" name="TextBox 3"/>
-          <p:cNvSpPr txBox="1"/>
+              <a:t>Figure 2 — Client Dashboard</a:t>
+            </a:r>
+          </a:p>
+        </p:txBody>
+      </p:sp>
+      <p:sp>
+        <p:nvSpPr>
+          <p:cNvPr id="4" name="Rectangle 3"/>
+          <p:cNvSpPr/>
           <p:nvPr/>
         </p:nvSpPr>
         <p:spPr>
           <a:xfrm>
             <a:off x="502920" y="1234440"/>
-            <a:ext cx="11185855" cy="5029200"/>
-          </a:xfrm>
-          <a:prstGeom prst="rect">
-            <a:avLst/>
-          </a:prstGeom>
-          <a:noFill/>
-        </p:spPr>
-        <p:txBody>
-          <a:bodyPr wrap="square">
-            <a:spAutoFit/>
-          </a:bodyPr>
-          <a:lstStyle/>
-          <a:p>
-            <a:pPr>
-              <a:lnSpc>
-                <a:spcPct val="115000"/>
-              </a:lnSpc>
-              <a:spcAft>
-                <a:spcPts val="600"/>
-              </a:spcAft>
-              <a:defRPr sz="1600">
-                <a:solidFill>
-                  <a:srgbClr val="1E293B"/>
-                </a:solidFill>
-                <a:latin typeface="Calibri"/>
-              </a:defRPr>
-            </a:pPr>
-            <a:r>
-              <a:t>1.  Introduction, problem &amp; goals</a:t>
-            </a:r>
-          </a:p>
-          <a:p>
-            <a:pPr>
-              <a:lnSpc>
-                <a:spcPct val="115000"/>
-              </a:lnSpc>
-              <a:spcAft>
-                <a:spcPts val="600"/>
-              </a:spcAft>
-              <a:defRPr sz="1600">
-                <a:solidFill>
-                  <a:srgbClr val="1E293B"/>
-                </a:solidFill>
-                <a:latin typeface="Calibri"/>
-              </a:defRPr>
-            </a:pPr>
-            <a:r>
-              <a:t>2.  Business model &amp; growth projections</a:t>
-            </a:r>
-          </a:p>
-          <a:p>
-            <a:pPr>
-              <a:lnSpc>
-                <a:spcPct val="115000"/>
-              </a:lnSpc>
-              <a:spcAft>
-                <a:spcPts val="600"/>
-              </a:spcAft>
-              <a:defRPr sz="1600">
-                <a:solidFill>
-                  <a:srgbClr val="1E293B"/>
-                </a:solidFill>
-                <a:latin typeface="Calibri"/>
-              </a:defRPr>
-            </a:pPr>
-            <a:r>
-              <a:t>3.  System design &amp; architecture</a:t>
-            </a:r>
-          </a:p>
-          <a:p>
-            <a:pPr>
-              <a:lnSpc>
-                <a:spcPct val="115000"/>
-              </a:lnSpc>
-              <a:spcAft>
-                <a:spcPts val="600"/>
-              </a:spcAft>
-              <a:defRPr sz="1600">
-                <a:solidFill>
-                  <a:srgbClr val="1E293B"/>
-                </a:solidFill>
-                <a:latin typeface="Calibri"/>
-              </a:defRPr>
-            </a:pPr>
-            <a:r>
-              <a:t>4.  Implementation &amp; security</a:t>
-            </a:r>
-          </a:p>
-          <a:p>
-            <a:pPr>
-              <a:lnSpc>
-                <a:spcPct val="115000"/>
-              </a:lnSpc>
-              <a:spcAft>
-                <a:spcPts val="600"/>
-              </a:spcAft>
-              <a:defRPr sz="1600">
-                <a:solidFill>
-                  <a:srgbClr val="1E293B"/>
-                </a:solidFill>
-                <a:latin typeface="Calibri"/>
-              </a:defRPr>
-            </a:pPr>
-            <a:r>
-              <a:t>5.  Live demo (screenshots)</a:t>
-            </a:r>
-          </a:p>
-          <a:p>
-            <a:pPr>
-              <a:lnSpc>
-                <a:spcPct val="115000"/>
-              </a:lnSpc>
-              <a:spcAft>
-                <a:spcPts val="600"/>
-              </a:spcAft>
-              <a:defRPr sz="1600">
-                <a:solidFill>
-                  <a:srgbClr val="1E293B"/>
-                </a:solidFill>
-                <a:latin typeface="Calibri"/>
-              </a:defRPr>
-            </a:pPr>
-            <a:r>
-              <a:t>6.  Testing, deployment &amp; rubric alignment</a:t>
-            </a:r>
-          </a:p>
-          <a:p>
-            <a:pPr>
-              <a:lnSpc>
-                <a:spcPct val="115000"/>
-              </a:lnSpc>
-              <a:spcAft>
-                <a:spcPts val="600"/>
-              </a:spcAft>
-              <a:defRPr sz="1600">
-                <a:solidFill>
-                  <a:srgbClr val="1E293B"/>
-                </a:solidFill>
-                <a:latin typeface="Calibri"/>
-              </a:defRPr>
-            </a:pPr>
-            <a:r>
-              <a:t>7.  Conclusion &amp; Q&amp;A</a:t>
-            </a:r>
-          </a:p>
-        </p:txBody>
-      </p:sp>
-      <p:sp>
-        <p:nvSpPr>
-          <p:cNvPr id="5" name="TextBox 4"/>
-          <p:cNvSpPr txBox="1"/>
-          <p:nvPr/>
-        </p:nvSpPr>
-        <p:spPr>
-          <a:xfrm>
-            <a:off x="502920" y="6446520"/>
-            <a:ext cx="11185855" cy="320040"/>
-          </a:xfrm>
-          <a:prstGeom prst="rect">
-            <a:avLst/>
-          </a:prstGeom>
-          <a:noFill/>
-        </p:spPr>
-        <p:txBody>
-          <a:bodyPr wrap="square" anchor="t">
-            <a:spAutoFit/>
-          </a:bodyPr>
-          <a:lstStyle/>
-          <a:p>
-            <a:pPr algn="ctr"/>
-            <a:r>
-              <a:rPr sz="900" b="0">
-                <a:solidFill>
-                  <a:srgbClr val="64748B"/>
-                </a:solidFill>
-                <a:latin typeface="Calibri"/>
-              </a:rPr>
-              <a:t>Manye Patrice  |  IT Innovation in Business — Master's Degree  |  Slide 2 of 28</a:t>
-            </a:r>
-          </a:p>
-        </p:txBody>
-      </p:sp>
-    </p:spTree>
-  </p:cSld>
-  <p:clrMapOvr>
-    <a:masterClrMapping/>
-  </p:clrMapOvr>
-</p:sld>
-</file>
-
-<file path=ppt/slides/slide20.xml><?xml version="1.0" encoding="utf-8"?>
-<p:sld xmlns:a="http://schemas.openxmlformats.org/drawingml/2006/main" xmlns:p="http://schemas.openxmlformats.org/presentationml/2006/main" xmlns:r="http://schemas.openxmlformats.org/officeDocument/2006/relationships">
-  <p:cSld>
-    <p:spTree>
-      <p:nvGrpSpPr>
-        <p:cNvPr id="1" name=""/>
-        <p:cNvGrpSpPr/>
-        <p:nvPr/>
-      </p:nvGrpSpPr>
-      <p:grpSpPr/>
-      <p:sp>
-        <p:nvSpPr>
-          <p:cNvPr id="2" name="Rectangle 1"/>
-          <p:cNvSpPr/>
-          <p:nvPr/>
-        </p:nvSpPr>
-        <p:spPr>
-          <a:xfrm>
-            <a:off x="0" y="0"/>
-            <a:ext cx="12191695" cy="1051560"/>
+            <a:ext cx="11185855" cy="4160520"/>
           </a:xfrm>
           <a:prstGeom prst="rect">
             <a:avLst/>
           </a:prstGeom>
           <a:solidFill>
-            <a:srgbClr val="1E3A8A"/>
+            <a:srgbClr val="F8FAFC"/>
           </a:solidFill>
-          <a:ln>
-            <a:noFill/>
+          <a:ln w="19050">
+            <a:solidFill>
+              <a:srgbClr val="2563EB"/>
+            </a:solidFill>
+            <a:prstDash val="dash"/>
           </a:ln>
         </p:spPr>
         <p:style>
@@ -7779,19 +8653,55 @@
           <a:lstStyle/>
           <a:p>
             <a:pPr algn="ctr"/>
-          </a:p>
-        </p:txBody>
-      </p:sp>
-      <p:sp>
-        <p:nvSpPr>
-          <p:cNvPr id="3" name="TextBox 2"/>
+            <a:endParaRPr/>
+          </a:p>
+        </p:txBody>
+      </p:sp>
+      <p:sp>
+        <p:nvSpPr>
+          <p:cNvPr id="5" name="TextBox 4"/>
           <p:cNvSpPr txBox="1"/>
           <p:nvPr/>
         </p:nvSpPr>
         <p:spPr>
           <a:xfrm>
-            <a:off x="502920" y="201168"/>
-            <a:ext cx="11185855" cy="502920"/>
+            <a:off x="502920" y="2606040"/>
+            <a:ext cx="11185855" cy="411480"/>
+          </a:xfrm>
+          <a:prstGeom prst="rect">
+            <a:avLst/>
+          </a:prstGeom>
+          <a:noFill/>
+        </p:spPr>
+        <p:txBody>
+          <a:bodyPr wrap="square" anchor="ctr">
+            <a:spAutoFit/>
+          </a:bodyPr>
+          <a:lstStyle/>
+          <a:p>
+            <a:pPr algn="ctr"/>
+            <a:r>
+              <a:rPr sz="1800" b="1">
+                <a:solidFill>
+                  <a:srgbClr val="2563EB"/>
+                </a:solidFill>
+                <a:latin typeface="Calibri"/>
+              </a:rPr>
+              <a:t>[ INSERT SCREENSHOT HERE ]</a:t>
+            </a:r>
+          </a:p>
+        </p:txBody>
+      </p:sp>
+      <p:sp>
+        <p:nvSpPr>
+          <p:cNvPr id="6" name="TextBox 5"/>
+          <p:cNvSpPr txBox="1"/>
+          <p:nvPr/>
+        </p:nvSpPr>
+        <p:spPr>
+          <a:xfrm>
+            <a:off x="502920" y="5440680"/>
+            <a:ext cx="11185855" cy="274320"/>
           </a:xfrm>
           <a:prstGeom prst="rect">
             <a:avLst/>
@@ -7804,41 +8714,163 @@
           </a:bodyPr>
           <a:lstStyle/>
           <a:p>
-            <a:pPr algn="l"/>
-            <a:r>
-              <a:rPr sz="2800" b="1">
-                <a:solidFill>
-                  <a:srgbClr val="FFFFFF"/>
+            <a:pPr algn="ctr"/>
+            <a:r>
+              <a:rPr sz="900" b="0">
+                <a:solidFill>
+                  <a:srgbClr val="1E3A8A"/>
                 </a:solidFill>
                 <a:latin typeface="Calibri"/>
               </a:rPr>
-              <a:t>Figure 2 — Client Dashboard</a:t>
-            </a:r>
-          </a:p>
-        </p:txBody>
-      </p:sp>
-      <p:sp>
-        <p:nvSpPr>
-          <p:cNvPr id="4" name="Rectangle 3"/>
+              <a:t>URL: http://localhost/user/dashboard/   |   Login: john@example.com / password123</a:t>
+            </a:r>
+          </a:p>
+        </p:txBody>
+      </p:sp>
+      <p:sp>
+        <p:nvSpPr>
+          <p:cNvPr id="7" name="TextBox 6"/>
+          <p:cNvSpPr txBox="1"/>
+          <p:nvPr/>
+        </p:nvSpPr>
+        <p:spPr>
+          <a:xfrm>
+            <a:off x="502920" y="5760720"/>
+            <a:ext cx="11185855" cy="274320"/>
+          </a:xfrm>
+          <a:prstGeom prst="rect">
+            <a:avLst/>
+          </a:prstGeom>
+          <a:noFill/>
+        </p:spPr>
+        <p:txBody>
+          <a:bodyPr wrap="square" anchor="t">
+            <a:spAutoFit/>
+          </a:bodyPr>
+          <a:lstStyle/>
+          <a:p>
+            <a:pPr algn="ctr"/>
+            <a:r>
+              <a:rPr sz="900" b="0">
+                <a:solidFill>
+                  <a:srgbClr val="64748B"/>
+                </a:solidFill>
+                <a:latin typeface="Calibri"/>
+              </a:rPr>
+              <a:t>PowerPoint: Insert → Pictures, or drag image into the dashed frame</a:t>
+            </a:r>
+          </a:p>
+        </p:txBody>
+      </p:sp>
+      <p:sp>
+        <p:nvSpPr>
+          <p:cNvPr id="8" name="TextBox 7"/>
+          <p:cNvSpPr txBox="1"/>
+          <p:nvPr/>
+        </p:nvSpPr>
+        <p:spPr>
+          <a:xfrm>
+            <a:off x="502920" y="6446520"/>
+            <a:ext cx="11185855" cy="320040"/>
+          </a:xfrm>
+          <a:prstGeom prst="rect">
+            <a:avLst/>
+          </a:prstGeom>
+          <a:noFill/>
+        </p:spPr>
+        <p:txBody>
+          <a:bodyPr wrap="square" anchor="t">
+            <a:spAutoFit/>
+          </a:bodyPr>
+          <a:lstStyle/>
+          <a:p>
+            <a:pPr algn="ctr"/>
+            <a:r>
+              <a:rPr sz="900" b="0">
+                <a:solidFill>
+                  <a:srgbClr val="64748B"/>
+                </a:solidFill>
+                <a:latin typeface="Calibri"/>
+              </a:rPr>
+              <a:t>Manye Patrice  |  IT Innovation in Business — Master's Degree  |  Slide 23 of 31</a:t>
+            </a:r>
+          </a:p>
+        </p:txBody>
+      </p:sp>
+      <p:pic>
+        <p:nvPicPr>
+          <p:cNvPr id="9" name="Image 8"/>
+          <p:cNvPicPr>
+            <a:picLocks noChangeAspect="1"/>
+          </p:cNvPicPr>
+          <p:nvPr/>
+        </p:nvPicPr>
+        <p:blipFill>
+          <a:blip r:embed="rId2">
+            <a:extLst>
+              <a:ext uri="{28A0092B-C50C-407E-A947-70E740481C1C}">
+                <a14:useLocalDpi xmlns:a14="http://schemas.microsoft.com/office/drawing/2010/main" val="0"/>
+              </a:ext>
+            </a:extLst>
+          </a:blip>
+          <a:stretch>
+            <a:fillRect/>
+          </a:stretch>
+        </p:blipFill>
+        <p:spPr>
+          <a:xfrm>
+            <a:off x="502920" y="1252728"/>
+            <a:ext cx="11185855" cy="4142232"/>
+          </a:xfrm>
+          <a:prstGeom prst="rect">
+            <a:avLst/>
+          </a:prstGeom>
+        </p:spPr>
+      </p:pic>
+    </p:spTree>
+  </p:cSld>
+  <p:clrMapOvr>
+    <a:masterClrMapping/>
+  </p:clrMapOvr>
+</p:sld>
+</file>
+
+<file path=ppt/slides/slide24.xml><?xml version="1.0" encoding="utf-8"?>
+<p:sld xmlns:a="http://schemas.openxmlformats.org/drawingml/2006/main" xmlns:r="http://schemas.openxmlformats.org/officeDocument/2006/relationships" xmlns:p="http://schemas.openxmlformats.org/presentationml/2006/main">
+  <p:cSld>
+    <p:spTree>
+      <p:nvGrpSpPr>
+        <p:cNvPr id="1" name=""/>
+        <p:cNvGrpSpPr/>
+        <p:nvPr/>
+      </p:nvGrpSpPr>
+      <p:grpSpPr>
+        <a:xfrm>
+          <a:off x="0" y="0"/>
+          <a:ext cx="0" cy="0"/>
+          <a:chOff x="0" y="0"/>
+          <a:chExt cx="0" cy="0"/>
+        </a:xfrm>
+      </p:grpSpPr>
+      <p:sp>
+        <p:nvSpPr>
+          <p:cNvPr id="2" name="Rectangle 1"/>
           <p:cNvSpPr/>
           <p:nvPr/>
         </p:nvSpPr>
         <p:spPr>
           <a:xfrm>
-            <a:off x="502920" y="1234440"/>
-            <a:ext cx="11185855" cy="4160520"/>
+            <a:off x="0" y="0"/>
+            <a:ext cx="12191695" cy="1051560"/>
           </a:xfrm>
           <a:prstGeom prst="rect">
             <a:avLst/>
           </a:prstGeom>
           <a:solidFill>
-            <a:srgbClr val="F8FAFC"/>
+            <a:srgbClr val="1E3A8A"/>
           </a:solidFill>
-          <a:ln w="19050">
-            <a:solidFill>
-              <a:srgbClr val="2563EB"/>
-            </a:solidFill>
-            <a:prstDash val="dash"/>
+          <a:ln>
+            <a:noFill/>
           </a:ln>
         </p:spPr>
         <p:style>
@@ -7860,54 +8892,20 @@
           <a:lstStyle/>
           <a:p>
             <a:pPr algn="ctr"/>
-          </a:p>
-        </p:txBody>
-      </p:sp>
-      <p:sp>
-        <p:nvSpPr>
-          <p:cNvPr id="5" name="TextBox 4"/>
+            <a:endParaRPr/>
+          </a:p>
+        </p:txBody>
+      </p:sp>
+      <p:sp>
+        <p:nvSpPr>
+          <p:cNvPr id="3" name="TextBox 2"/>
           <p:cNvSpPr txBox="1"/>
           <p:nvPr/>
         </p:nvSpPr>
         <p:spPr>
           <a:xfrm>
-            <a:off x="502920" y="2606040"/>
-            <a:ext cx="11185855" cy="411480"/>
-          </a:xfrm>
-          <a:prstGeom prst="rect">
-            <a:avLst/>
-          </a:prstGeom>
-          <a:noFill/>
-        </p:spPr>
-        <p:txBody>
-          <a:bodyPr wrap="square" anchor="ctr">
-            <a:spAutoFit/>
-          </a:bodyPr>
-          <a:lstStyle/>
-          <a:p>
-            <a:pPr algn="ctr"/>
-            <a:r>
-              <a:rPr sz="1800" b="1">
-                <a:solidFill>
-                  <a:srgbClr val="2563EB"/>
-                </a:solidFill>
-                <a:latin typeface="Calibri"/>
-              </a:rPr>
-              <a:t>[ INSERT SCREENSHOT HERE ]</a:t>
-            </a:r>
-          </a:p>
-        </p:txBody>
-      </p:sp>
-      <p:sp>
-        <p:nvSpPr>
-          <p:cNvPr id="6" name="TextBox 5"/>
-          <p:cNvSpPr txBox="1"/>
-          <p:nvPr/>
-        </p:nvSpPr>
-        <p:spPr>
-          <a:xfrm>
-            <a:off x="502920" y="5440680"/>
-            <a:ext cx="11185855" cy="274320"/>
+            <a:off x="502920" y="201168"/>
+            <a:ext cx="11185855" cy="502920"/>
           </a:xfrm>
           <a:prstGeom prst="rect">
             <a:avLst/>
@@ -7920,126 +8918,41 @@
           </a:bodyPr>
           <a:lstStyle/>
           <a:p>
-            <a:pPr algn="ctr"/>
-            <a:r>
-              <a:rPr sz="900" b="0">
-                <a:solidFill>
-                  <a:srgbClr val="1E3A8A"/>
+            <a:pPr algn="l"/>
+            <a:r>
+              <a:rPr sz="2800" b="1">
+                <a:solidFill>
+                  <a:srgbClr val="FFFFFF"/>
                 </a:solidFill>
                 <a:latin typeface="Calibri"/>
               </a:rPr>
-              <a:t>URL: http://localhost/user/dashboard/   |   Login: john@example.com / password123</a:t>
-            </a:r>
-          </a:p>
-        </p:txBody>
-      </p:sp>
-      <p:sp>
-        <p:nvSpPr>
-          <p:cNvPr id="7" name="TextBox 6"/>
-          <p:cNvSpPr txBox="1"/>
-          <p:nvPr/>
-        </p:nvSpPr>
-        <p:spPr>
-          <a:xfrm>
-            <a:off x="502920" y="5760720"/>
-            <a:ext cx="11185855" cy="274320"/>
-          </a:xfrm>
-          <a:prstGeom prst="rect">
-            <a:avLst/>
-          </a:prstGeom>
-          <a:noFill/>
-        </p:spPr>
-        <p:txBody>
-          <a:bodyPr wrap="square" anchor="t">
-            <a:spAutoFit/>
-          </a:bodyPr>
-          <a:lstStyle/>
-          <a:p>
-            <a:pPr algn="ctr"/>
-            <a:r>
-              <a:rPr sz="900" b="0">
-                <a:solidFill>
-                  <a:srgbClr val="64748B"/>
-                </a:solidFill>
-                <a:latin typeface="Calibri"/>
-              </a:rPr>
-              <a:t>PowerPoint: Insert → Pictures, or drag image into the dashed frame</a:t>
-            </a:r>
-          </a:p>
-        </p:txBody>
-      </p:sp>
-      <p:sp>
-        <p:nvSpPr>
-          <p:cNvPr id="8" name="TextBox 7"/>
-          <p:cNvSpPr txBox="1"/>
-          <p:nvPr/>
-        </p:nvSpPr>
-        <p:spPr>
-          <a:xfrm>
-            <a:off x="502920" y="6446520"/>
-            <a:ext cx="11185855" cy="320040"/>
-          </a:xfrm>
-          <a:prstGeom prst="rect">
-            <a:avLst/>
-          </a:prstGeom>
-          <a:noFill/>
-        </p:spPr>
-        <p:txBody>
-          <a:bodyPr wrap="square" anchor="t">
-            <a:spAutoFit/>
-          </a:bodyPr>
-          <a:lstStyle/>
-          <a:p>
-            <a:pPr algn="ctr"/>
-            <a:r>
-              <a:rPr sz="900" b="0">
-                <a:solidFill>
-                  <a:srgbClr val="64748B"/>
-                </a:solidFill>
-                <a:latin typeface="Calibri"/>
-              </a:rPr>
-              <a:t>Manye Patrice  |  IT Innovation in Business — Master's Degree  |  Slide 20 of 28</a:t>
-            </a:r>
-          </a:p>
-        </p:txBody>
-      </p:sp>
-    </p:spTree>
-  </p:cSld>
-  <p:clrMapOvr>
-    <a:masterClrMapping/>
-  </p:clrMapOvr>
-</p:sld>
-</file>
-
-<file path=ppt/slides/slide21.xml><?xml version="1.0" encoding="utf-8"?>
-<p:sld xmlns:a="http://schemas.openxmlformats.org/drawingml/2006/main" xmlns:p="http://schemas.openxmlformats.org/presentationml/2006/main" xmlns:r="http://schemas.openxmlformats.org/officeDocument/2006/relationships">
-  <p:cSld>
-    <p:spTree>
-      <p:nvGrpSpPr>
-        <p:cNvPr id="1" name=""/>
-        <p:cNvGrpSpPr/>
-        <p:nvPr/>
-      </p:nvGrpSpPr>
-      <p:grpSpPr/>
-      <p:sp>
-        <p:nvSpPr>
-          <p:cNvPr id="2" name="Rectangle 1"/>
+              <a:t>Figure 3 — Worker Dashboard</a:t>
+            </a:r>
+          </a:p>
+        </p:txBody>
+      </p:sp>
+      <p:sp>
+        <p:nvSpPr>
+          <p:cNvPr id="4" name="Rectangle 3"/>
           <p:cNvSpPr/>
           <p:nvPr/>
         </p:nvSpPr>
         <p:spPr>
           <a:xfrm>
-            <a:off x="0" y="0"/>
-            <a:ext cx="12191695" cy="1051560"/>
+            <a:off x="502920" y="1234440"/>
+            <a:ext cx="11185855" cy="4160520"/>
           </a:xfrm>
           <a:prstGeom prst="rect">
             <a:avLst/>
           </a:prstGeom>
           <a:solidFill>
-            <a:srgbClr val="1E3A8A"/>
+            <a:srgbClr val="F8FAFC"/>
           </a:solidFill>
-          <a:ln>
-            <a:noFill/>
+          <a:ln w="19050">
+            <a:solidFill>
+              <a:srgbClr val="2563EB"/>
+            </a:solidFill>
+            <a:prstDash val="dash"/>
           </a:ln>
         </p:spPr>
         <p:style>
@@ -8061,19 +8974,55 @@
           <a:lstStyle/>
           <a:p>
             <a:pPr algn="ctr"/>
-          </a:p>
-        </p:txBody>
-      </p:sp>
-      <p:sp>
-        <p:nvSpPr>
-          <p:cNvPr id="3" name="TextBox 2"/>
+            <a:endParaRPr/>
+          </a:p>
+        </p:txBody>
+      </p:sp>
+      <p:sp>
+        <p:nvSpPr>
+          <p:cNvPr id="5" name="TextBox 4"/>
           <p:cNvSpPr txBox="1"/>
           <p:nvPr/>
         </p:nvSpPr>
         <p:spPr>
           <a:xfrm>
-            <a:off x="502920" y="201168"/>
-            <a:ext cx="11185855" cy="502920"/>
+            <a:off x="502920" y="2606040"/>
+            <a:ext cx="11185855" cy="411480"/>
+          </a:xfrm>
+          <a:prstGeom prst="rect">
+            <a:avLst/>
+          </a:prstGeom>
+          <a:noFill/>
+        </p:spPr>
+        <p:txBody>
+          <a:bodyPr wrap="square" anchor="ctr">
+            <a:spAutoFit/>
+          </a:bodyPr>
+          <a:lstStyle/>
+          <a:p>
+            <a:pPr algn="ctr"/>
+            <a:r>
+              <a:rPr sz="1800" b="1">
+                <a:solidFill>
+                  <a:srgbClr val="2563EB"/>
+                </a:solidFill>
+                <a:latin typeface="Calibri"/>
+              </a:rPr>
+              <a:t>[ INSERT SCREENSHOT HERE ]</a:t>
+            </a:r>
+          </a:p>
+        </p:txBody>
+      </p:sp>
+      <p:sp>
+        <p:nvSpPr>
+          <p:cNvPr id="6" name="TextBox 5"/>
+          <p:cNvSpPr txBox="1"/>
+          <p:nvPr/>
+        </p:nvSpPr>
+        <p:spPr>
+          <a:xfrm>
+            <a:off x="502920" y="5440680"/>
+            <a:ext cx="11185855" cy="274320"/>
           </a:xfrm>
           <a:prstGeom prst="rect">
             <a:avLst/>
@@ -8086,41 +9035,163 @@
           </a:bodyPr>
           <a:lstStyle/>
           <a:p>
-            <a:pPr algn="l"/>
-            <a:r>
-              <a:rPr sz="2800" b="1">
-                <a:solidFill>
-                  <a:srgbClr val="FFFFFF"/>
+            <a:pPr algn="ctr"/>
+            <a:r>
+              <a:rPr sz="900" b="0">
+                <a:solidFill>
+                  <a:srgbClr val="1E3A8A"/>
                 </a:solidFill>
                 <a:latin typeface="Calibri"/>
               </a:rPr>
-              <a:t>Figure 3 — Worker Dashboard</a:t>
-            </a:r>
-          </a:p>
-        </p:txBody>
-      </p:sp>
-      <p:sp>
-        <p:nvSpPr>
-          <p:cNvPr id="4" name="Rectangle 3"/>
+              <a:t>URL: http://localhost/worker/dashboard/   |   Login: mike@example.com / password123</a:t>
+            </a:r>
+          </a:p>
+        </p:txBody>
+      </p:sp>
+      <p:sp>
+        <p:nvSpPr>
+          <p:cNvPr id="7" name="TextBox 6"/>
+          <p:cNvSpPr txBox="1"/>
+          <p:nvPr/>
+        </p:nvSpPr>
+        <p:spPr>
+          <a:xfrm>
+            <a:off x="502920" y="5760720"/>
+            <a:ext cx="11185855" cy="274320"/>
+          </a:xfrm>
+          <a:prstGeom prst="rect">
+            <a:avLst/>
+          </a:prstGeom>
+          <a:noFill/>
+        </p:spPr>
+        <p:txBody>
+          <a:bodyPr wrap="square" anchor="t">
+            <a:spAutoFit/>
+          </a:bodyPr>
+          <a:lstStyle/>
+          <a:p>
+            <a:pPr algn="ctr"/>
+            <a:r>
+              <a:rPr sz="900" b="0">
+                <a:solidFill>
+                  <a:srgbClr val="64748B"/>
+                </a:solidFill>
+                <a:latin typeface="Calibri"/>
+              </a:rPr>
+              <a:t>PowerPoint: Insert → Pictures, or drag image into the dashed frame</a:t>
+            </a:r>
+          </a:p>
+        </p:txBody>
+      </p:sp>
+      <p:sp>
+        <p:nvSpPr>
+          <p:cNvPr id="8" name="TextBox 7"/>
+          <p:cNvSpPr txBox="1"/>
+          <p:nvPr/>
+        </p:nvSpPr>
+        <p:spPr>
+          <a:xfrm>
+            <a:off x="502920" y="6446520"/>
+            <a:ext cx="11185855" cy="320040"/>
+          </a:xfrm>
+          <a:prstGeom prst="rect">
+            <a:avLst/>
+          </a:prstGeom>
+          <a:noFill/>
+        </p:spPr>
+        <p:txBody>
+          <a:bodyPr wrap="square" anchor="t">
+            <a:spAutoFit/>
+          </a:bodyPr>
+          <a:lstStyle/>
+          <a:p>
+            <a:pPr algn="ctr"/>
+            <a:r>
+              <a:rPr sz="900" b="0">
+                <a:solidFill>
+                  <a:srgbClr val="64748B"/>
+                </a:solidFill>
+                <a:latin typeface="Calibri"/>
+              </a:rPr>
+              <a:t>Manye Patrice  |  IT Innovation in Business — Master's Degree  |  Slide 24 of 31</a:t>
+            </a:r>
+          </a:p>
+        </p:txBody>
+      </p:sp>
+      <p:pic>
+        <p:nvPicPr>
+          <p:cNvPr id="9" name="Image 8"/>
+          <p:cNvPicPr>
+            <a:picLocks noChangeAspect="1"/>
+          </p:cNvPicPr>
+          <p:nvPr/>
+        </p:nvPicPr>
+        <p:blipFill>
+          <a:blip r:embed="rId2">
+            <a:extLst>
+              <a:ext uri="{28A0092B-C50C-407E-A947-70E740481C1C}">
+                <a14:useLocalDpi xmlns:a14="http://schemas.microsoft.com/office/drawing/2010/main" val="0"/>
+              </a:ext>
+            </a:extLst>
+          </a:blip>
+          <a:stretch>
+            <a:fillRect/>
+          </a:stretch>
+        </p:blipFill>
+        <p:spPr>
+          <a:xfrm>
+            <a:off x="502920" y="1252728"/>
+            <a:ext cx="11185855" cy="4142232"/>
+          </a:xfrm>
+          <a:prstGeom prst="rect">
+            <a:avLst/>
+          </a:prstGeom>
+        </p:spPr>
+      </p:pic>
+    </p:spTree>
+  </p:cSld>
+  <p:clrMapOvr>
+    <a:masterClrMapping/>
+  </p:clrMapOvr>
+</p:sld>
+</file>
+
+<file path=ppt/slides/slide25.xml><?xml version="1.0" encoding="utf-8"?>
+<p:sld xmlns:a="http://schemas.openxmlformats.org/drawingml/2006/main" xmlns:r="http://schemas.openxmlformats.org/officeDocument/2006/relationships" xmlns:p="http://schemas.openxmlformats.org/presentationml/2006/main">
+  <p:cSld>
+    <p:spTree>
+      <p:nvGrpSpPr>
+        <p:cNvPr id="1" name=""/>
+        <p:cNvGrpSpPr/>
+        <p:nvPr/>
+      </p:nvGrpSpPr>
+      <p:grpSpPr>
+        <a:xfrm>
+          <a:off x="0" y="0"/>
+          <a:ext cx="0" cy="0"/>
+          <a:chOff x="0" y="0"/>
+          <a:chExt cx="0" cy="0"/>
+        </a:xfrm>
+      </p:grpSpPr>
+      <p:sp>
+        <p:nvSpPr>
+          <p:cNvPr id="2" name="Rectangle 1"/>
           <p:cNvSpPr/>
           <p:nvPr/>
         </p:nvSpPr>
         <p:spPr>
           <a:xfrm>
-            <a:off x="502920" y="1234440"/>
-            <a:ext cx="11185855" cy="4160520"/>
+            <a:off x="0" y="0"/>
+            <a:ext cx="12191695" cy="1051560"/>
           </a:xfrm>
           <a:prstGeom prst="rect">
             <a:avLst/>
           </a:prstGeom>
           <a:solidFill>
-            <a:srgbClr val="F8FAFC"/>
+            <a:srgbClr val="1E3A8A"/>
           </a:solidFill>
-          <a:ln w="19050">
-            <a:solidFill>
-              <a:srgbClr val="2563EB"/>
-            </a:solidFill>
-            <a:prstDash val="dash"/>
+          <a:ln>
+            <a:noFill/>
           </a:ln>
         </p:spPr>
         <p:style>
@@ -8142,54 +9213,20 @@
           <a:lstStyle/>
           <a:p>
             <a:pPr algn="ctr"/>
-          </a:p>
-        </p:txBody>
-      </p:sp>
-      <p:sp>
-        <p:nvSpPr>
-          <p:cNvPr id="5" name="TextBox 4"/>
+            <a:endParaRPr/>
+          </a:p>
+        </p:txBody>
+      </p:sp>
+      <p:sp>
+        <p:nvSpPr>
+          <p:cNvPr id="3" name="TextBox 2"/>
           <p:cNvSpPr txBox="1"/>
           <p:nvPr/>
         </p:nvSpPr>
         <p:spPr>
           <a:xfrm>
-            <a:off x="502920" y="2606040"/>
-            <a:ext cx="11185855" cy="411480"/>
-          </a:xfrm>
-          <a:prstGeom prst="rect">
-            <a:avLst/>
-          </a:prstGeom>
-          <a:noFill/>
-        </p:spPr>
-        <p:txBody>
-          <a:bodyPr wrap="square" anchor="ctr">
-            <a:spAutoFit/>
-          </a:bodyPr>
-          <a:lstStyle/>
-          <a:p>
-            <a:pPr algn="ctr"/>
-            <a:r>
-              <a:rPr sz="1800" b="1">
-                <a:solidFill>
-                  <a:srgbClr val="2563EB"/>
-                </a:solidFill>
-                <a:latin typeface="Calibri"/>
-              </a:rPr>
-              <a:t>[ INSERT SCREENSHOT HERE ]</a:t>
-            </a:r>
-          </a:p>
-        </p:txBody>
-      </p:sp>
-      <p:sp>
-        <p:nvSpPr>
-          <p:cNvPr id="6" name="TextBox 5"/>
-          <p:cNvSpPr txBox="1"/>
-          <p:nvPr/>
-        </p:nvSpPr>
-        <p:spPr>
-          <a:xfrm>
-            <a:off x="502920" y="5440680"/>
-            <a:ext cx="11185855" cy="274320"/>
+            <a:off x="502920" y="201168"/>
+            <a:ext cx="11185855" cy="502920"/>
           </a:xfrm>
           <a:prstGeom prst="rect">
             <a:avLst/>
@@ -8202,126 +9239,41 @@
           </a:bodyPr>
           <a:lstStyle/>
           <a:p>
-            <a:pPr algn="ctr"/>
-            <a:r>
-              <a:rPr sz="900" b="0">
-                <a:solidFill>
-                  <a:srgbClr val="1E3A8A"/>
+            <a:pPr algn="l"/>
+            <a:r>
+              <a:rPr sz="2800" b="1">
+                <a:solidFill>
+                  <a:srgbClr val="FFFFFF"/>
                 </a:solidFill>
                 <a:latin typeface="Calibri"/>
               </a:rPr>
-              <a:t>URL: http://localhost/worker/dashboard/   |   Login: mike@example.com / password123</a:t>
-            </a:r>
-          </a:p>
-        </p:txBody>
-      </p:sp>
-      <p:sp>
-        <p:nvSpPr>
-          <p:cNvPr id="7" name="TextBox 6"/>
-          <p:cNvSpPr txBox="1"/>
-          <p:nvPr/>
-        </p:nvSpPr>
-        <p:spPr>
-          <a:xfrm>
-            <a:off x="502920" y="5760720"/>
-            <a:ext cx="11185855" cy="274320"/>
-          </a:xfrm>
-          <a:prstGeom prst="rect">
-            <a:avLst/>
-          </a:prstGeom>
-          <a:noFill/>
-        </p:spPr>
-        <p:txBody>
-          <a:bodyPr wrap="square" anchor="t">
-            <a:spAutoFit/>
-          </a:bodyPr>
-          <a:lstStyle/>
-          <a:p>
-            <a:pPr algn="ctr"/>
-            <a:r>
-              <a:rPr sz="900" b="0">
-                <a:solidFill>
-                  <a:srgbClr val="64748B"/>
-                </a:solidFill>
-                <a:latin typeface="Calibri"/>
-              </a:rPr>
-              <a:t>PowerPoint: Insert → Pictures, or drag image into the dashed frame</a:t>
-            </a:r>
-          </a:p>
-        </p:txBody>
-      </p:sp>
-      <p:sp>
-        <p:nvSpPr>
-          <p:cNvPr id="8" name="TextBox 7"/>
-          <p:cNvSpPr txBox="1"/>
-          <p:nvPr/>
-        </p:nvSpPr>
-        <p:spPr>
-          <a:xfrm>
-            <a:off x="502920" y="6446520"/>
-            <a:ext cx="11185855" cy="320040"/>
-          </a:xfrm>
-          <a:prstGeom prst="rect">
-            <a:avLst/>
-          </a:prstGeom>
-          <a:noFill/>
-        </p:spPr>
-        <p:txBody>
-          <a:bodyPr wrap="square" anchor="t">
-            <a:spAutoFit/>
-          </a:bodyPr>
-          <a:lstStyle/>
-          <a:p>
-            <a:pPr algn="ctr"/>
-            <a:r>
-              <a:rPr sz="900" b="0">
-                <a:solidFill>
-                  <a:srgbClr val="64748B"/>
-                </a:solidFill>
-                <a:latin typeface="Calibri"/>
-              </a:rPr>
-              <a:t>Manye Patrice  |  IT Innovation in Business — Master's Degree  |  Slide 21 of 28</a:t>
-            </a:r>
-          </a:p>
-        </p:txBody>
-      </p:sp>
-    </p:spTree>
-  </p:cSld>
-  <p:clrMapOvr>
-    <a:masterClrMapping/>
-  </p:clrMapOvr>
-</p:sld>
-</file>
-
-<file path=ppt/slides/slide22.xml><?xml version="1.0" encoding="utf-8"?>
-<p:sld xmlns:a="http://schemas.openxmlformats.org/drawingml/2006/main" xmlns:p="http://schemas.openxmlformats.org/presentationml/2006/main" xmlns:r="http://schemas.openxmlformats.org/officeDocument/2006/relationships">
-  <p:cSld>
-    <p:spTree>
-      <p:nvGrpSpPr>
-        <p:cNvPr id="1" name=""/>
-        <p:cNvGrpSpPr/>
-        <p:nvPr/>
-      </p:nvGrpSpPr>
-      <p:grpSpPr/>
-      <p:sp>
-        <p:nvSpPr>
-          <p:cNvPr id="2" name="Rectangle 1"/>
+              <a:t>Figure 4 — Escrow Payment</a:t>
+            </a:r>
+          </a:p>
+        </p:txBody>
+      </p:sp>
+      <p:sp>
+        <p:nvSpPr>
+          <p:cNvPr id="4" name="Rectangle 3"/>
           <p:cNvSpPr/>
           <p:nvPr/>
         </p:nvSpPr>
         <p:spPr>
           <a:xfrm>
-            <a:off x="0" y="0"/>
-            <a:ext cx="12191695" cy="1051560"/>
+            <a:off x="502920" y="1234440"/>
+            <a:ext cx="11185855" cy="4160520"/>
           </a:xfrm>
           <a:prstGeom prst="rect">
             <a:avLst/>
           </a:prstGeom>
           <a:solidFill>
-            <a:srgbClr val="1E3A8A"/>
+            <a:srgbClr val="F8FAFC"/>
           </a:solidFill>
-          <a:ln>
-            <a:noFill/>
+          <a:ln w="19050">
+            <a:solidFill>
+              <a:srgbClr val="2563EB"/>
+            </a:solidFill>
+            <a:prstDash val="dash"/>
           </a:ln>
         </p:spPr>
         <p:style>
@@ -8343,19 +9295,55 @@
           <a:lstStyle/>
           <a:p>
             <a:pPr algn="ctr"/>
-          </a:p>
-        </p:txBody>
-      </p:sp>
-      <p:sp>
-        <p:nvSpPr>
-          <p:cNvPr id="3" name="TextBox 2"/>
+            <a:endParaRPr/>
+          </a:p>
+        </p:txBody>
+      </p:sp>
+      <p:sp>
+        <p:nvSpPr>
+          <p:cNvPr id="5" name="TextBox 4"/>
           <p:cNvSpPr txBox="1"/>
           <p:nvPr/>
         </p:nvSpPr>
         <p:spPr>
           <a:xfrm>
-            <a:off x="502920" y="201168"/>
-            <a:ext cx="11185855" cy="502920"/>
+            <a:off x="502920" y="2606040"/>
+            <a:ext cx="11185855" cy="411480"/>
+          </a:xfrm>
+          <a:prstGeom prst="rect">
+            <a:avLst/>
+          </a:prstGeom>
+          <a:noFill/>
+        </p:spPr>
+        <p:txBody>
+          <a:bodyPr wrap="square" anchor="ctr">
+            <a:spAutoFit/>
+          </a:bodyPr>
+          <a:lstStyle/>
+          <a:p>
+            <a:pPr algn="ctr"/>
+            <a:r>
+              <a:rPr sz="1800" b="1">
+                <a:solidFill>
+                  <a:srgbClr val="2563EB"/>
+                </a:solidFill>
+                <a:latin typeface="Calibri"/>
+              </a:rPr>
+              <a:t>[ INSERT SCREENSHOT HERE ]</a:t>
+            </a:r>
+          </a:p>
+        </p:txBody>
+      </p:sp>
+      <p:sp>
+        <p:nvSpPr>
+          <p:cNvPr id="6" name="TextBox 5"/>
+          <p:cNvSpPr txBox="1"/>
+          <p:nvPr/>
+        </p:nvSpPr>
+        <p:spPr>
+          <a:xfrm>
+            <a:off x="502920" y="5440680"/>
+            <a:ext cx="11185855" cy="274320"/>
           </a:xfrm>
           <a:prstGeom prst="rect">
             <a:avLst/>
@@ -8368,109 +9356,28 @@
           </a:bodyPr>
           <a:lstStyle/>
           <a:p>
-            <a:pPr algn="l"/>
-            <a:r>
-              <a:rPr sz="2800" b="1">
-                <a:solidFill>
-                  <a:srgbClr val="FFFFFF"/>
+            <a:pPr algn="ctr"/>
+            <a:r>
+              <a:rPr sz="900" b="0">
+                <a:solidFill>
+                  <a:srgbClr val="1E3A8A"/>
                 </a:solidFill>
                 <a:latin typeface="Calibri"/>
               </a:rPr>
-              <a:t>Figure 4 — Escrow Payment</a:t>
-            </a:r>
-          </a:p>
-        </p:txBody>
-      </p:sp>
-      <p:sp>
-        <p:nvSpPr>
-          <p:cNvPr id="4" name="Rectangle 3"/>
-          <p:cNvSpPr/>
-          <p:nvPr/>
-        </p:nvSpPr>
-        <p:spPr>
-          <a:xfrm>
-            <a:off x="502920" y="1234440"/>
-            <a:ext cx="11185855" cy="4160520"/>
-          </a:xfrm>
-          <a:prstGeom prst="rect">
-            <a:avLst/>
-          </a:prstGeom>
-          <a:solidFill>
-            <a:srgbClr val="F8FAFC"/>
-          </a:solidFill>
-          <a:ln w="19050">
-            <a:solidFill>
-              <a:srgbClr val="2563EB"/>
-            </a:solidFill>
-            <a:prstDash val="dash"/>
-          </a:ln>
-        </p:spPr>
-        <p:style>
-          <a:lnRef idx="1">
-            <a:schemeClr val="accent1"/>
-          </a:lnRef>
-          <a:fillRef idx="3">
-            <a:schemeClr val="accent1"/>
-          </a:fillRef>
-          <a:effectRef idx="2">
-            <a:schemeClr val="accent1"/>
-          </a:effectRef>
-          <a:fontRef idx="minor">
-            <a:schemeClr val="lt1"/>
-          </a:fontRef>
-        </p:style>
-        <p:txBody>
-          <a:bodyPr rtlCol="0" anchor="ctr"/>
-          <a:lstStyle/>
-          <a:p>
-            <a:pPr algn="ctr"/>
-          </a:p>
-        </p:txBody>
-      </p:sp>
-      <p:sp>
-        <p:nvSpPr>
-          <p:cNvPr id="5" name="TextBox 4"/>
+              <a:t>URL: http://localhost/booking/&lt;id&gt;/escrow/   |   Login: john@example.com / password123</a:t>
+            </a:r>
+          </a:p>
+        </p:txBody>
+      </p:sp>
+      <p:sp>
+        <p:nvSpPr>
+          <p:cNvPr id="7" name="TextBox 6"/>
           <p:cNvSpPr txBox="1"/>
           <p:nvPr/>
         </p:nvSpPr>
         <p:spPr>
           <a:xfrm>
-            <a:off x="502920" y="2606040"/>
-            <a:ext cx="11185855" cy="411480"/>
-          </a:xfrm>
-          <a:prstGeom prst="rect">
-            <a:avLst/>
-          </a:prstGeom>
-          <a:noFill/>
-        </p:spPr>
-        <p:txBody>
-          <a:bodyPr wrap="square" anchor="ctr">
-            <a:spAutoFit/>
-          </a:bodyPr>
-          <a:lstStyle/>
-          <a:p>
-            <a:pPr algn="ctr"/>
-            <a:r>
-              <a:rPr sz="1800" b="1">
-                <a:solidFill>
-                  <a:srgbClr val="2563EB"/>
-                </a:solidFill>
-                <a:latin typeface="Calibri"/>
-              </a:rPr>
-              <a:t>[ INSERT SCREENSHOT HERE ]</a:t>
-            </a:r>
-          </a:p>
-        </p:txBody>
-      </p:sp>
-      <p:sp>
-        <p:nvSpPr>
-          <p:cNvPr id="6" name="TextBox 5"/>
-          <p:cNvSpPr txBox="1"/>
-          <p:nvPr/>
-        </p:nvSpPr>
-        <p:spPr>
-          <a:xfrm>
-            <a:off x="502920" y="5440680"/>
+            <a:off x="502920" y="5760720"/>
             <a:ext cx="11185855" cy="274320"/>
           </a:xfrm>
           <a:prstGeom prst="rect">
@@ -8488,25 +9395,25 @@
             <a:r>
               <a:rPr sz="900" b="0">
                 <a:solidFill>
-                  <a:srgbClr val="1E3A8A"/>
+                  <a:srgbClr val="64748B"/>
                 </a:solidFill>
                 <a:latin typeface="Calibri"/>
               </a:rPr>
-              <a:t>URL: http://localhost/booking/&lt;id&gt;/escrow/   |   Login: john@example.com / password123</a:t>
-            </a:r>
-          </a:p>
-        </p:txBody>
-      </p:sp>
-      <p:sp>
-        <p:nvSpPr>
-          <p:cNvPr id="7" name="TextBox 6"/>
+              <a:t>PowerPoint: Insert → Pictures, or drag image into the dashed frame</a:t>
+            </a:r>
+          </a:p>
+        </p:txBody>
+      </p:sp>
+      <p:sp>
+        <p:nvSpPr>
+          <p:cNvPr id="8" name="TextBox 7"/>
           <p:cNvSpPr txBox="1"/>
           <p:nvPr/>
         </p:nvSpPr>
         <p:spPr>
           <a:xfrm>
-            <a:off x="502920" y="5760720"/>
-            <a:ext cx="11185855" cy="274320"/>
+            <a:off x="502920" y="6446520"/>
+            <a:ext cx="11185855" cy="320040"/>
           </a:xfrm>
           <a:prstGeom prst="rect">
             <a:avLst/>
@@ -8527,46 +9434,41 @@
                 </a:solidFill>
                 <a:latin typeface="Calibri"/>
               </a:rPr>
-              <a:t>PowerPoint: Insert → Pictures, or drag image into the dashed frame</a:t>
-            </a:r>
-          </a:p>
-        </p:txBody>
-      </p:sp>
-      <p:sp>
-        <p:nvSpPr>
-          <p:cNvPr id="8" name="TextBox 7"/>
-          <p:cNvSpPr txBox="1"/>
-          <p:nvPr/>
-        </p:nvSpPr>
-        <p:spPr>
-          <a:xfrm>
-            <a:off x="502920" y="6446520"/>
-            <a:ext cx="11185855" cy="320040"/>
-          </a:xfrm>
-          <a:prstGeom prst="rect">
-            <a:avLst/>
-          </a:prstGeom>
-          <a:noFill/>
-        </p:spPr>
-        <p:txBody>
-          <a:bodyPr wrap="square" anchor="t">
-            <a:spAutoFit/>
-          </a:bodyPr>
-          <a:lstStyle/>
-          <a:p>
-            <a:pPr algn="ctr"/>
-            <a:r>
-              <a:rPr sz="900" b="0">
-                <a:solidFill>
-                  <a:srgbClr val="64748B"/>
-                </a:solidFill>
-                <a:latin typeface="Calibri"/>
-              </a:rPr>
-              <a:t>Manye Patrice  |  IT Innovation in Business — Master's Degree  |  Slide 22 of 28</a:t>
-            </a:r>
-          </a:p>
-        </p:txBody>
-      </p:sp>
+              <a:t>Manye Patrice  |  IT Innovation in Business — Master's Degree  |  Slide 25 of 31</a:t>
+            </a:r>
+          </a:p>
+        </p:txBody>
+      </p:sp>
+      <p:pic>
+        <p:nvPicPr>
+          <p:cNvPr id="9" name="Image 8"/>
+          <p:cNvPicPr>
+            <a:picLocks noChangeAspect="1"/>
+          </p:cNvPicPr>
+          <p:nvPr/>
+        </p:nvPicPr>
+        <p:blipFill>
+          <a:blip r:embed="rId2">
+            <a:extLst>
+              <a:ext uri="{28A0092B-C50C-407E-A947-70E740481C1C}">
+                <a14:useLocalDpi xmlns:a14="http://schemas.microsoft.com/office/drawing/2010/main" val="0"/>
+              </a:ext>
+            </a:extLst>
+          </a:blip>
+          <a:stretch>
+            <a:fillRect/>
+          </a:stretch>
+        </p:blipFill>
+        <p:spPr>
+          <a:xfrm>
+            <a:off x="502920" y="1252728"/>
+            <a:ext cx="11185855" cy="4142232"/>
+          </a:xfrm>
+          <a:prstGeom prst="rect">
+            <a:avLst/>
+          </a:prstGeom>
+        </p:spPr>
+      </p:pic>
     </p:spTree>
   </p:cSld>
   <p:clrMapOvr>
@@ -8575,8 +9477,8 @@
 </p:sld>
 </file>
 
-<file path=ppt/slides/slide23.xml><?xml version="1.0" encoding="utf-8"?>
-<p:sld xmlns:a="http://schemas.openxmlformats.org/drawingml/2006/main" xmlns:p="http://schemas.openxmlformats.org/presentationml/2006/main" xmlns:r="http://schemas.openxmlformats.org/officeDocument/2006/relationships">
+<file path=ppt/slides/slide26.xml><?xml version="1.0" encoding="utf-8"?>
+<p:sld xmlns:a="http://schemas.openxmlformats.org/drawingml/2006/main" xmlns:r="http://schemas.openxmlformats.org/officeDocument/2006/relationships" xmlns:p="http://schemas.openxmlformats.org/presentationml/2006/main">
   <p:cSld>
     <p:bg>
       <p:bgPr>
@@ -8592,7 +9494,14 @@
         <p:cNvGrpSpPr/>
         <p:nvPr/>
       </p:nvGrpSpPr>
-      <p:grpSpPr/>
+      <p:grpSpPr>
+        <a:xfrm>
+          <a:off x="0" y="0"/>
+          <a:ext cx="0" cy="0"/>
+          <a:chOff x="0" y="0"/>
+          <a:chExt cx="0" cy="0"/>
+        </a:xfrm>
+      </p:grpSpPr>
       <p:sp>
         <p:nvSpPr>
           <p:cNvPr id="2" name="TextBox 1"/>
@@ -8693,7 +9602,7 @@
                 </a:solidFill>
                 <a:latin typeface="Calibri"/>
               </a:rPr>
-              <a:t>Manye Patrice  |  IT Innovation in Business — Master's Degree  |  Slide 23 of 28</a:t>
+              <a:t>Manye Patrice  |  IT Innovation in Business — Master's Degree  |  Slide 26 of 31</a:t>
             </a:r>
           </a:p>
         </p:txBody>
@@ -8706,8 +9615,8 @@
 </p:sld>
 </file>
 
-<file path=ppt/slides/slide24.xml><?xml version="1.0" encoding="utf-8"?>
-<p:sld xmlns:a="http://schemas.openxmlformats.org/drawingml/2006/main" xmlns:p="http://schemas.openxmlformats.org/presentationml/2006/main" xmlns:r="http://schemas.openxmlformats.org/officeDocument/2006/relationships">
+<file path=ppt/slides/slide27.xml><?xml version="1.0" encoding="utf-8"?>
+<p:sld xmlns:a="http://schemas.openxmlformats.org/drawingml/2006/main" xmlns:r="http://schemas.openxmlformats.org/officeDocument/2006/relationships" xmlns:p="http://schemas.openxmlformats.org/presentationml/2006/main">
   <p:cSld>
     <p:spTree>
       <p:nvGrpSpPr>
@@ -8715,7 +9624,14 @@
         <p:cNvGrpSpPr/>
         <p:nvPr/>
       </p:nvGrpSpPr>
-      <p:grpSpPr/>
+      <p:grpSpPr>
+        <a:xfrm>
+          <a:off x="0" y="0"/>
+          <a:ext cx="0" cy="0"/>
+          <a:chOff x="0" y="0"/>
+          <a:chExt cx="0" cy="0"/>
+        </a:xfrm>
+      </p:grpSpPr>
       <p:sp>
         <p:nvSpPr>
           <p:cNvPr id="2" name="Rectangle 1"/>
@@ -8756,6 +9672,7 @@
           <a:lstStyle/>
           <a:p>
             <a:pPr algn="ctr"/>
+            <a:endParaRPr/>
           </a:p>
         </p:txBody>
       </p:sp>
@@ -8942,7 +9859,7 @@
                 </a:solidFill>
                 <a:latin typeface="Calibri"/>
               </a:rPr>
-              <a:t>Manye Patrice  |  IT Innovation in Business — Master's Degree  |  Slide 24 of 28</a:t>
+              <a:t>Manye Patrice  |  IT Innovation in Business — Master's Degree  |  Slide 27 of 31</a:t>
             </a:r>
           </a:p>
         </p:txBody>
@@ -8955,8 +9872,8 @@
 </p:sld>
 </file>
 
-<file path=ppt/slides/slide25.xml><?xml version="1.0" encoding="utf-8"?>
-<p:sld xmlns:a="http://schemas.openxmlformats.org/drawingml/2006/main" xmlns:p="http://schemas.openxmlformats.org/presentationml/2006/main" xmlns:r="http://schemas.openxmlformats.org/officeDocument/2006/relationships">
+<file path=ppt/slides/slide28.xml><?xml version="1.0" encoding="utf-8"?>
+<p:sld xmlns:a="http://schemas.openxmlformats.org/drawingml/2006/main" xmlns:r="http://schemas.openxmlformats.org/officeDocument/2006/relationships" xmlns:p="http://schemas.openxmlformats.org/presentationml/2006/main">
   <p:cSld>
     <p:spTree>
       <p:nvGrpSpPr>
@@ -8964,7 +9881,14 @@
         <p:cNvGrpSpPr/>
         <p:nvPr/>
       </p:nvGrpSpPr>
-      <p:grpSpPr/>
+      <p:grpSpPr>
+        <a:xfrm>
+          <a:off x="0" y="0"/>
+          <a:ext cx="0" cy="0"/>
+          <a:chOff x="0" y="0"/>
+          <a:chExt cx="0" cy="0"/>
+        </a:xfrm>
+      </p:grpSpPr>
       <p:sp>
         <p:nvSpPr>
           <p:cNvPr id="2" name="Rectangle 1"/>
@@ -9005,6 +9929,7 @@
           <a:lstStyle/>
           <a:p>
             <a:pPr algn="ctr"/>
+            <a:endParaRPr/>
           </a:p>
         </p:txBody>
       </p:sp>
@@ -9062,9 +9987,27 @@
                 <a:tableStyleId>{5C22544A-7EE6-4342-B048-85BDC9FD1C3A}</a:tableStyleId>
               </a:tblPr>
               <a:tblGrid>
-                <a:gridCol w="1828800"/>
-                <a:gridCol w="731520"/>
-                <a:gridCol w="3383280"/>
+                <a:gridCol w="1828800">
+                  <a:extLst>
+                    <a:ext uri="{9D8B030D-6E8A-4147-A177-3AD203B41FA5}">
+                      <a16:colId xmlns:a16="http://schemas.microsoft.com/office/drawing/2014/main" val="20000"/>
+                    </a:ext>
+                  </a:extLst>
+                </a:gridCol>
+                <a:gridCol w="731520">
+                  <a:extLst>
+                    <a:ext uri="{9D8B030D-6E8A-4147-A177-3AD203B41FA5}">
+                      <a16:colId xmlns:a16="http://schemas.microsoft.com/office/drawing/2014/main" val="20001"/>
+                    </a:ext>
+                  </a:extLst>
+                </a:gridCol>
+                <a:gridCol w="3383280">
+                  <a:extLst>
+                    <a:ext uri="{9D8B030D-6E8A-4147-A177-3AD203B41FA5}">
+                      <a16:colId xmlns:a16="http://schemas.microsoft.com/office/drawing/2014/main" val="20002"/>
+                    </a:ext>
+                  </a:extLst>
+                </a:gridCol>
               </a:tblGrid>
               <a:tr h="411480">
                 <a:tc>
@@ -9073,7 +10016,7 @@
                     <a:lstStyle/>
                     <a:p>
                       <a:pPr algn="ctr">
-                        <a:defRPr b="1" sz="1100">
+                        <a:defRPr sz="1100" b="1">
                           <a:solidFill>
                             <a:srgbClr val="FFFFFF"/>
                           </a:solidFill>
@@ -9096,7 +10039,7 @@
                     <a:lstStyle/>
                     <a:p>
                       <a:pPr algn="ctr">
-                        <a:defRPr b="1" sz="1100">
+                        <a:defRPr sz="1100" b="1">
                           <a:solidFill>
                             <a:srgbClr val="FFFFFF"/>
                           </a:solidFill>
@@ -9119,7 +10062,7 @@
                     <a:lstStyle/>
                     <a:p>
                       <a:pPr algn="ctr">
-                        <a:defRPr b="1" sz="1100">
+                        <a:defRPr sz="1100" b="1">
                           <a:solidFill>
                             <a:srgbClr val="FFFFFF"/>
                           </a:solidFill>
@@ -9136,6 +10079,11 @@
                     </a:solidFill>
                   </a:tcPr>
                 </a:tc>
+                <a:extLst>
+                  <a:ext uri="{0D108BD9-81ED-4DB2-BD59-A6C34878D82A}">
+                    <a16:rowId xmlns:a16="http://schemas.microsoft.com/office/drawing/2014/main" val="10000"/>
+                  </a:ext>
+                </a:extLst>
               </a:tr>
               <a:tr h="411480">
                 <a:tc>
@@ -9207,6 +10155,11 @@
                     </a:solidFill>
                   </a:tcPr>
                 </a:tc>
+                <a:extLst>
+                  <a:ext uri="{0D108BD9-81ED-4DB2-BD59-A6C34878D82A}">
+                    <a16:rowId xmlns:a16="http://schemas.microsoft.com/office/drawing/2014/main" val="10001"/>
+                  </a:ext>
+                </a:extLst>
               </a:tr>
               <a:tr h="411480">
                 <a:tc>
@@ -9278,6 +10231,11 @@
                     </a:solidFill>
                   </a:tcPr>
                 </a:tc>
+                <a:extLst>
+                  <a:ext uri="{0D108BD9-81ED-4DB2-BD59-A6C34878D82A}">
+                    <a16:rowId xmlns:a16="http://schemas.microsoft.com/office/drawing/2014/main" val="10002"/>
+                  </a:ext>
+                </a:extLst>
               </a:tr>
               <a:tr h="411480">
                 <a:tc>
@@ -9349,6 +10307,11 @@
                     </a:solidFill>
                   </a:tcPr>
                 </a:tc>
+                <a:extLst>
+                  <a:ext uri="{0D108BD9-81ED-4DB2-BD59-A6C34878D82A}">
+                    <a16:rowId xmlns:a16="http://schemas.microsoft.com/office/drawing/2014/main" val="10003"/>
+                  </a:ext>
+                </a:extLst>
               </a:tr>
               <a:tr h="411480">
                 <a:tc>
@@ -9420,6 +10383,11 @@
                     </a:solidFill>
                   </a:tcPr>
                 </a:tc>
+                <a:extLst>
+                  <a:ext uri="{0D108BD9-81ED-4DB2-BD59-A6C34878D82A}">
+                    <a16:rowId xmlns:a16="http://schemas.microsoft.com/office/drawing/2014/main" val="10004"/>
+                  </a:ext>
+                </a:extLst>
               </a:tr>
               <a:tr h="411480">
                 <a:tc>
@@ -9491,6 +10459,11 @@
                     </a:solidFill>
                   </a:tcPr>
                 </a:tc>
+                <a:extLst>
+                  <a:ext uri="{0D108BD9-81ED-4DB2-BD59-A6C34878D82A}">
+                    <a16:rowId xmlns:a16="http://schemas.microsoft.com/office/drawing/2014/main" val="10005"/>
+                  </a:ext>
+                </a:extLst>
               </a:tr>
             </a:tbl>
           </a:graphicData>
@@ -9526,7 +10499,7 @@
                 </a:solidFill>
                 <a:latin typeface="Calibri"/>
               </a:rPr>
-              <a:t>Manye Patrice  |  IT Innovation in Business — Master's Degree  |  Slide 25 of 28</a:t>
+              <a:t>Manye Patrice  |  IT Innovation in Business — Master's Degree  |  Slide 28 of 31</a:t>
             </a:r>
           </a:p>
         </p:txBody>
@@ -9539,8 +10512,8 @@
 </p:sld>
 </file>
 
-<file path=ppt/slides/slide26.xml><?xml version="1.0" encoding="utf-8"?>
-<p:sld xmlns:a="http://schemas.openxmlformats.org/drawingml/2006/main" xmlns:p="http://schemas.openxmlformats.org/presentationml/2006/main" xmlns:r="http://schemas.openxmlformats.org/officeDocument/2006/relationships">
+<file path=ppt/slides/slide29.xml><?xml version="1.0" encoding="utf-8"?>
+<p:sld xmlns:a="http://schemas.openxmlformats.org/drawingml/2006/main" xmlns:r="http://schemas.openxmlformats.org/officeDocument/2006/relationships" xmlns:p="http://schemas.openxmlformats.org/presentationml/2006/main">
   <p:cSld>
     <p:bg>
       <p:bgPr>
@@ -9556,7 +10529,14 @@
         <p:cNvGrpSpPr/>
         <p:nvPr/>
       </p:nvGrpSpPr>
-      <p:grpSpPr/>
+      <p:grpSpPr>
+        <a:xfrm>
+          <a:off x="0" y="0"/>
+          <a:ext cx="0" cy="0"/>
+          <a:chOff x="0" y="0"/>
+          <a:chExt cx="0" cy="0"/>
+        </a:xfrm>
+      </p:grpSpPr>
       <p:sp>
         <p:nvSpPr>
           <p:cNvPr id="2" name="TextBox 1"/>
@@ -9657,7 +10637,7 @@
                 </a:solidFill>
                 <a:latin typeface="Calibri"/>
               </a:rPr>
-              <a:t>Manye Patrice  |  IT Innovation in Business — Master's Degree  |  Slide 26 of 28</a:t>
+              <a:t>Manye Patrice  |  IT Innovation in Business — Master's Degree  |  Slide 29 of 31</a:t>
             </a:r>
           </a:p>
         </p:txBody>
@@ -9670,8 +10650,146 @@
 </p:sld>
 </file>
 
-<file path=ppt/slides/slide27.xml><?xml version="1.0" encoding="utf-8"?>
-<p:sld xmlns:a="http://schemas.openxmlformats.org/drawingml/2006/main" xmlns:p="http://schemas.openxmlformats.org/presentationml/2006/main" xmlns:r="http://schemas.openxmlformats.org/officeDocument/2006/relationships">
+<file path=ppt/slides/slide3.xml><?xml version="1.0" encoding="utf-8"?>
+<p:sld xmlns:a="http://schemas.openxmlformats.org/drawingml/2006/main" xmlns:r="http://schemas.openxmlformats.org/officeDocument/2006/relationships" xmlns:p="http://schemas.openxmlformats.org/presentationml/2006/main">
+  <p:cSld>
+    <p:bg>
+      <p:bgPr>
+        <a:solidFill>
+          <a:srgbClr val="4F46E5"/>
+        </a:solidFill>
+        <a:effectLst/>
+      </p:bgPr>
+    </p:bg>
+    <p:spTree>
+      <p:nvGrpSpPr>
+        <p:cNvPr id="1" name=""/>
+        <p:cNvGrpSpPr/>
+        <p:nvPr/>
+      </p:nvGrpSpPr>
+      <p:grpSpPr>
+        <a:xfrm>
+          <a:off x="0" y="0"/>
+          <a:ext cx="0" cy="0"/>
+          <a:chOff x="0" y="0"/>
+          <a:chExt cx="0" cy="0"/>
+        </a:xfrm>
+      </p:grpSpPr>
+      <p:sp>
+        <p:nvSpPr>
+          <p:cNvPr id="2" name="TextBox 1"/>
+          <p:cNvSpPr txBox="1"/>
+          <p:nvPr/>
+        </p:nvSpPr>
+        <p:spPr>
+          <a:xfrm>
+            <a:off x="502920" y="2560320"/>
+            <a:ext cx="11185855" cy="822960"/>
+          </a:xfrm>
+          <a:prstGeom prst="rect">
+            <a:avLst/>
+          </a:prstGeom>
+          <a:noFill/>
+        </p:spPr>
+        <p:txBody>
+          <a:bodyPr wrap="square" anchor="t">
+            <a:spAutoFit/>
+          </a:bodyPr>
+          <a:lstStyle/>
+          <a:p>
+            <a:pPr algn="ctr"/>
+            <a:r>
+              <a:rPr sz="3600" b="1">
+                <a:solidFill>
+                  <a:srgbClr val="FFFFFF"/>
+                </a:solidFill>
+                <a:latin typeface="Calibri"/>
+              </a:rPr>
+              <a:t>1</a:t>
+            </a:r>
+          </a:p>
+        </p:txBody>
+      </p:sp>
+      <p:sp>
+        <p:nvSpPr>
+          <p:cNvPr id="3" name="TextBox 2"/>
+          <p:cNvSpPr txBox="1"/>
+          <p:nvPr/>
+        </p:nvSpPr>
+        <p:spPr>
+          <a:xfrm>
+            <a:off x="502920" y="3429000"/>
+            <a:ext cx="11185855" cy="457200"/>
+          </a:xfrm>
+          <a:prstGeom prst="rect">
+            <a:avLst/>
+          </a:prstGeom>
+          <a:noFill/>
+        </p:spPr>
+        <p:txBody>
+          <a:bodyPr wrap="square" anchor="t">
+            <a:spAutoFit/>
+          </a:bodyPr>
+          <a:lstStyle/>
+          <a:p>
+            <a:pPr algn="ctr"/>
+            <a:r>
+              <a:rPr sz="1600" b="0">
+                <a:solidFill>
+                  <a:srgbClr val="DBEAFE"/>
+                </a:solidFill>
+                <a:latin typeface="Calibri"/>
+              </a:rPr>
+              <a:t>Introduction &amp; Business Case</a:t>
+            </a:r>
+          </a:p>
+        </p:txBody>
+      </p:sp>
+      <p:sp>
+        <p:nvSpPr>
+          <p:cNvPr id="4" name="TextBox 3"/>
+          <p:cNvSpPr txBox="1"/>
+          <p:nvPr/>
+        </p:nvSpPr>
+        <p:spPr>
+          <a:xfrm>
+            <a:off x="502920" y="6446520"/>
+            <a:ext cx="11185855" cy="320040"/>
+          </a:xfrm>
+          <a:prstGeom prst="rect">
+            <a:avLst/>
+          </a:prstGeom>
+          <a:noFill/>
+        </p:spPr>
+        <p:txBody>
+          <a:bodyPr wrap="square" anchor="t">
+            <a:spAutoFit/>
+          </a:bodyPr>
+          <a:lstStyle/>
+          <a:p>
+            <a:pPr algn="ctr"/>
+            <a:r>
+              <a:rPr sz="900" b="0">
+                <a:solidFill>
+                  <a:srgbClr val="64748B"/>
+                </a:solidFill>
+                <a:latin typeface="Calibri"/>
+              </a:rPr>
+              <a:t>Manye Patrice  |  IT Innovation in Business — Master's Degree  |  Slide 3 of 31</a:t>
+            </a:r>
+          </a:p>
+        </p:txBody>
+      </p:sp>
+    </p:spTree>
+  </p:cSld>
+  <p:clrMapOvr>
+    <a:masterClrMapping/>
+  </p:clrMapOvr>
+</p:sld>
+</file>
+
+<file path=ppt/slides/slide30.xml><?xml version="1.0" encoding="utf-8"?>
+<p:sld xmlns:a="http://schemas.openxmlformats.org/drawingml/2006/main" xmlns:r="http://schemas.openxmlformats.org/officeDocument/2006/relationships" xmlns:p="http://schemas.openxmlformats.org/presentationml/2006/main">
   <p:cSld>
     <p:spTree>
       <p:nvGrpSpPr>
@@ -9679,7 +10797,14 @@
         <p:cNvGrpSpPr/>
         <p:nvPr/>
       </p:nvGrpSpPr>
-      <p:grpSpPr/>
+      <p:grpSpPr>
+        <a:xfrm>
+          <a:off x="0" y="0"/>
+          <a:ext cx="0" cy="0"/>
+          <a:chOff x="0" y="0"/>
+          <a:chExt cx="0" cy="0"/>
+        </a:xfrm>
+      </p:grpSpPr>
       <p:sp>
         <p:nvSpPr>
           <p:cNvPr id="2" name="Rectangle 1"/>
@@ -9720,6 +10845,7 @@
           <a:lstStyle/>
           <a:p>
             <a:pPr algn="ctr"/>
+            <a:endParaRPr/>
           </a:p>
         </p:txBody>
       </p:sp>
@@ -10094,7 +11220,7 @@
                 </a:solidFill>
                 <a:latin typeface="Calibri"/>
               </a:rPr>
-              <a:t>Manye Patrice  |  IT Innovation in Business — Master's Degree  |  Slide 27 of 28</a:t>
+              <a:t>Manye Patrice  |  IT Innovation in Business — Master's Degree  |  Slide 30 of 31</a:t>
             </a:r>
           </a:p>
         </p:txBody>
@@ -10107,8 +11233,8 @@
 </p:sld>
 </file>
 
-<file path=ppt/slides/slide28.xml><?xml version="1.0" encoding="utf-8"?>
-<p:sld xmlns:a="http://schemas.openxmlformats.org/drawingml/2006/main" xmlns:p="http://schemas.openxmlformats.org/presentationml/2006/main" xmlns:r="http://schemas.openxmlformats.org/officeDocument/2006/relationships">
+<file path=ppt/slides/slide31.xml><?xml version="1.0" encoding="utf-8"?>
+<p:sld xmlns:a="http://schemas.openxmlformats.org/drawingml/2006/main" xmlns:r="http://schemas.openxmlformats.org/officeDocument/2006/relationships" xmlns:p="http://schemas.openxmlformats.org/presentationml/2006/main">
   <p:cSld>
     <p:bg>
       <p:bgPr>
@@ -10124,7 +11250,14 @@
         <p:cNvGrpSpPr/>
         <p:nvPr/>
       </p:nvGrpSpPr>
-      <p:grpSpPr/>
+      <p:grpSpPr>
+        <a:xfrm>
+          <a:off x="0" y="0"/>
+          <a:ext cx="0" cy="0"/>
+          <a:chOff x="0" y="0"/>
+          <a:chExt cx="0" cy="0"/>
+        </a:xfrm>
+      </p:grpSpPr>
       <p:sp>
         <p:nvSpPr>
           <p:cNvPr id="2" name="TextBox 1"/>
@@ -10273,8 +11406,8 @@
 </p:sld>
 </file>
 
-<file path=ppt/slides/slide29.xml><?xml version="1.0" encoding="utf-8"?>
-<p:sld xmlns:a="http://schemas.openxmlformats.org/drawingml/2006/main" xmlns:p="http://schemas.openxmlformats.org/presentationml/2006/main" xmlns:r="http://schemas.openxmlformats.org/officeDocument/2006/relationships">
+<file path=ppt/slides/slide32.xml><?xml version="1.0" encoding="utf-8"?>
+<p:sld xmlns:a="http://schemas.openxmlformats.org/drawingml/2006/main" xmlns:r="http://schemas.openxmlformats.org/officeDocument/2006/relationships" xmlns:p="http://schemas.openxmlformats.org/presentationml/2006/main">
   <p:cSld>
     <p:bg>
       <p:bgPr>
@@ -10290,7 +11423,14 @@
         <p:cNvGrpSpPr/>
         <p:nvPr/>
       </p:nvGrpSpPr>
-      <p:grpSpPr/>
+      <p:grpSpPr>
+        <a:xfrm>
+          <a:off x="0" y="0"/>
+          <a:ext cx="0" cy="0"/>
+          <a:chOff x="0" y="0"/>
+          <a:chExt cx="0" cy="0"/>
+        </a:xfrm>
+      </p:grpSpPr>
       <p:sp>
         <p:nvSpPr>
           <p:cNvPr id="2" name="TextBox 1"/>
@@ -10426,7 +11566,7 @@
                 </a:solidFill>
                 <a:latin typeface="Calibri"/>
               </a:rPr>
-              <a:t>Manye Patrice  |  BACKUP SLIDE  |  Slide 29</a:t>
+              <a:t>Manye Patrice  |  BACKUP SLIDE  |  Slide 32</a:t>
             </a:r>
           </a:p>
         </p:txBody>
@@ -10439,139 +11579,8 @@
 </p:sld>
 </file>
 
-<file path=ppt/slides/slide3.xml><?xml version="1.0" encoding="utf-8"?>
-<p:sld xmlns:a="http://schemas.openxmlformats.org/drawingml/2006/main" xmlns:p="http://schemas.openxmlformats.org/presentationml/2006/main" xmlns:r="http://schemas.openxmlformats.org/officeDocument/2006/relationships">
-  <p:cSld>
-    <p:bg>
-      <p:bgPr>
-        <a:solidFill>
-          <a:srgbClr val="4F46E5"/>
-        </a:solidFill>
-        <a:effectLst/>
-      </p:bgPr>
-    </p:bg>
-    <p:spTree>
-      <p:nvGrpSpPr>
-        <p:cNvPr id="1" name=""/>
-        <p:cNvGrpSpPr/>
-        <p:nvPr/>
-      </p:nvGrpSpPr>
-      <p:grpSpPr/>
-      <p:sp>
-        <p:nvSpPr>
-          <p:cNvPr id="2" name="TextBox 1"/>
-          <p:cNvSpPr txBox="1"/>
-          <p:nvPr/>
-        </p:nvSpPr>
-        <p:spPr>
-          <a:xfrm>
-            <a:off x="502920" y="2560320"/>
-            <a:ext cx="11185855" cy="822960"/>
-          </a:xfrm>
-          <a:prstGeom prst="rect">
-            <a:avLst/>
-          </a:prstGeom>
-          <a:noFill/>
-        </p:spPr>
-        <p:txBody>
-          <a:bodyPr wrap="square" anchor="t">
-            <a:spAutoFit/>
-          </a:bodyPr>
-          <a:lstStyle/>
-          <a:p>
-            <a:pPr algn="ctr"/>
-            <a:r>
-              <a:rPr sz="3600" b="1">
-                <a:solidFill>
-                  <a:srgbClr val="FFFFFF"/>
-                </a:solidFill>
-                <a:latin typeface="Calibri"/>
-              </a:rPr>
-              <a:t>1</a:t>
-            </a:r>
-          </a:p>
-        </p:txBody>
-      </p:sp>
-      <p:sp>
-        <p:nvSpPr>
-          <p:cNvPr id="3" name="TextBox 2"/>
-          <p:cNvSpPr txBox="1"/>
-          <p:nvPr/>
-        </p:nvSpPr>
-        <p:spPr>
-          <a:xfrm>
-            <a:off x="502920" y="3429000"/>
-            <a:ext cx="11185855" cy="457200"/>
-          </a:xfrm>
-          <a:prstGeom prst="rect">
-            <a:avLst/>
-          </a:prstGeom>
-          <a:noFill/>
-        </p:spPr>
-        <p:txBody>
-          <a:bodyPr wrap="square" anchor="t">
-            <a:spAutoFit/>
-          </a:bodyPr>
-          <a:lstStyle/>
-          <a:p>
-            <a:pPr algn="ctr"/>
-            <a:r>
-              <a:rPr sz="1600" b="0">
-                <a:solidFill>
-                  <a:srgbClr val="DBEAFE"/>
-                </a:solidFill>
-                <a:latin typeface="Calibri"/>
-              </a:rPr>
-              <a:t>Introduction &amp; Business Case</a:t>
-            </a:r>
-          </a:p>
-        </p:txBody>
-      </p:sp>
-      <p:sp>
-        <p:nvSpPr>
-          <p:cNvPr id="4" name="TextBox 3"/>
-          <p:cNvSpPr txBox="1"/>
-          <p:nvPr/>
-        </p:nvSpPr>
-        <p:spPr>
-          <a:xfrm>
-            <a:off x="502920" y="6446520"/>
-            <a:ext cx="11185855" cy="320040"/>
-          </a:xfrm>
-          <a:prstGeom prst="rect">
-            <a:avLst/>
-          </a:prstGeom>
-          <a:noFill/>
-        </p:spPr>
-        <p:txBody>
-          <a:bodyPr wrap="square" anchor="t">
-            <a:spAutoFit/>
-          </a:bodyPr>
-          <a:lstStyle/>
-          <a:p>
-            <a:pPr algn="ctr"/>
-            <a:r>
-              <a:rPr sz="900" b="0">
-                <a:solidFill>
-                  <a:srgbClr val="64748B"/>
-                </a:solidFill>
-                <a:latin typeface="Calibri"/>
-              </a:rPr>
-              <a:t>Manye Patrice  |  IT Innovation in Business — Master's Degree  |  Slide 3 of 28</a:t>
-            </a:r>
-          </a:p>
-        </p:txBody>
-      </p:sp>
-    </p:spTree>
-  </p:cSld>
-  <p:clrMapOvr>
-    <a:masterClrMapping/>
-  </p:clrMapOvr>
-</p:sld>
-</file>
-
-<file path=ppt/slides/slide30.xml><?xml version="1.0" encoding="utf-8"?>
-<p:sld xmlns:a="http://schemas.openxmlformats.org/drawingml/2006/main" xmlns:p="http://schemas.openxmlformats.org/presentationml/2006/main" xmlns:r="http://schemas.openxmlformats.org/officeDocument/2006/relationships">
+<file path=ppt/slides/slide33.xml><?xml version="1.0" encoding="utf-8"?>
+<p:sld xmlns:a="http://schemas.openxmlformats.org/drawingml/2006/main" xmlns:r="http://schemas.openxmlformats.org/officeDocument/2006/relationships" xmlns:p="http://schemas.openxmlformats.org/presentationml/2006/main">
   <p:cSld>
     <p:spTree>
       <p:nvGrpSpPr>
@@ -10579,7 +11588,14 @@
         <p:cNvGrpSpPr/>
         <p:nvPr/>
       </p:nvGrpSpPr>
-      <p:grpSpPr/>
+      <p:grpSpPr>
+        <a:xfrm>
+          <a:off x="0" y="0"/>
+          <a:ext cx="0" cy="0"/>
+          <a:chOff x="0" y="0"/>
+          <a:chExt cx="0" cy="0"/>
+        </a:xfrm>
+      </p:grpSpPr>
       <p:sp>
         <p:nvSpPr>
           <p:cNvPr id="2" name="Rectangle 1"/>
@@ -10620,6 +11636,7 @@
           <a:lstStyle/>
           <a:p>
             <a:pPr algn="ctr"/>
+            <a:endParaRPr/>
           </a:p>
         </p:txBody>
       </p:sp>
@@ -10674,8 +11691,8 @@
         </p:blipFill>
         <p:spPr>
           <a:xfrm>
-            <a:off x="502920" y="1234440"/>
-            <a:ext cx="11185855" cy="6254839"/>
+            <a:off x="1948151" y="1234440"/>
+            <a:ext cx="8295392" cy="4638567"/>
           </a:xfrm>
           <a:prstGeom prst="rect">
             <a:avLst/>
@@ -10747,7 +11764,7 @@
                 </a:solidFill>
                 <a:latin typeface="Calibri"/>
               </a:rPr>
-              <a:t>Manye Patrice  |  BACKUP SLIDE  |  Slide 30</a:t>
+              <a:t>Manye Patrice  |  BACKUP SLIDE  |  Slide 33</a:t>
             </a:r>
           </a:p>
         </p:txBody>
@@ -10760,8 +11777,8 @@
 </p:sld>
 </file>
 
-<file path=ppt/slides/slide31.xml><?xml version="1.0" encoding="utf-8"?>
-<p:sld xmlns:a="http://schemas.openxmlformats.org/drawingml/2006/main" xmlns:p="http://schemas.openxmlformats.org/presentationml/2006/main" xmlns:r="http://schemas.openxmlformats.org/officeDocument/2006/relationships">
+<file path=ppt/slides/slide34.xml><?xml version="1.0" encoding="utf-8"?>
+<p:sld xmlns:a="http://schemas.openxmlformats.org/drawingml/2006/main" xmlns:r="http://schemas.openxmlformats.org/officeDocument/2006/relationships" xmlns:p="http://schemas.openxmlformats.org/presentationml/2006/main">
   <p:cSld>
     <p:spTree>
       <p:nvGrpSpPr>
@@ -10769,7 +11786,14 @@
         <p:cNvGrpSpPr/>
         <p:nvPr/>
       </p:nvGrpSpPr>
-      <p:grpSpPr/>
+      <p:grpSpPr>
+        <a:xfrm>
+          <a:off x="0" y="0"/>
+          <a:ext cx="0" cy="0"/>
+          <a:chOff x="0" y="0"/>
+          <a:chExt cx="0" cy="0"/>
+        </a:xfrm>
+      </p:grpSpPr>
       <p:sp>
         <p:nvSpPr>
           <p:cNvPr id="2" name="Rectangle 1"/>
@@ -10810,6 +11834,7 @@
           <a:lstStyle/>
           <a:p>
             <a:pPr algn="ctr"/>
+            <a:endParaRPr/>
           </a:p>
         </p:txBody>
       </p:sp>
@@ -10864,8 +11889,8 @@
         </p:blipFill>
         <p:spPr>
           <a:xfrm>
-            <a:off x="502920" y="1234440"/>
-            <a:ext cx="11185855" cy="5459763"/>
+            <a:off x="1407317" y="1140550"/>
+            <a:ext cx="9377060" cy="4576899"/>
           </a:xfrm>
           <a:prstGeom prst="rect">
             <a:avLst/>
@@ -10937,7 +11962,7 @@
                 </a:solidFill>
                 <a:latin typeface="Calibri"/>
               </a:rPr>
-              <a:t>Manye Patrice  |  BACKUP SLIDE  |  Slide 31</a:t>
+              <a:t>Manye Patrice  |  BACKUP SLIDE  |  Slide 34</a:t>
             </a:r>
           </a:p>
         </p:txBody>
@@ -10950,8 +11975,8 @@
 </p:sld>
 </file>
 
-<file path=ppt/slides/slide32.xml><?xml version="1.0" encoding="utf-8"?>
-<p:sld xmlns:a="http://schemas.openxmlformats.org/drawingml/2006/main" xmlns:p="http://schemas.openxmlformats.org/presentationml/2006/main" xmlns:r="http://schemas.openxmlformats.org/officeDocument/2006/relationships">
+<file path=ppt/slides/slide35.xml><?xml version="1.0" encoding="utf-8"?>
+<p:sld xmlns:a="http://schemas.openxmlformats.org/drawingml/2006/main" xmlns:r="http://schemas.openxmlformats.org/officeDocument/2006/relationships" xmlns:p="http://schemas.openxmlformats.org/presentationml/2006/main">
   <p:cSld>
     <p:spTree>
       <p:nvGrpSpPr>
@@ -10959,7 +11984,14 @@
         <p:cNvGrpSpPr/>
         <p:nvPr/>
       </p:nvGrpSpPr>
-      <p:grpSpPr/>
+      <p:grpSpPr>
+        <a:xfrm>
+          <a:off x="0" y="0"/>
+          <a:ext cx="0" cy="0"/>
+          <a:chOff x="0" y="0"/>
+          <a:chExt cx="0" cy="0"/>
+        </a:xfrm>
+      </p:grpSpPr>
       <p:sp>
         <p:nvSpPr>
           <p:cNvPr id="2" name="Rectangle 1"/>
@@ -11000,6 +12032,7 @@
           <a:lstStyle/>
           <a:p>
             <a:pPr algn="ctr"/>
+            <a:endParaRPr/>
           </a:p>
         </p:txBody>
       </p:sp>
@@ -11057,9 +12090,27 @@
                 <a:tableStyleId>{5C22544A-7EE6-4342-B048-85BDC9FD1C3A}</a:tableStyleId>
               </a:tblPr>
               <a:tblGrid>
-                <a:gridCol w="640080"/>
-                <a:gridCol w="3200400"/>
-                <a:gridCol w="1188720"/>
+                <a:gridCol w="640080">
+                  <a:extLst>
+                    <a:ext uri="{9D8B030D-6E8A-4147-A177-3AD203B41FA5}">
+                      <a16:colId xmlns:a16="http://schemas.microsoft.com/office/drawing/2014/main" val="20000"/>
+                    </a:ext>
+                  </a:extLst>
+                </a:gridCol>
+                <a:gridCol w="3200400">
+                  <a:extLst>
+                    <a:ext uri="{9D8B030D-6E8A-4147-A177-3AD203B41FA5}">
+                      <a16:colId xmlns:a16="http://schemas.microsoft.com/office/drawing/2014/main" val="20001"/>
+                    </a:ext>
+                  </a:extLst>
+                </a:gridCol>
+                <a:gridCol w="1188720">
+                  <a:extLst>
+                    <a:ext uri="{9D8B030D-6E8A-4147-A177-3AD203B41FA5}">
+                      <a16:colId xmlns:a16="http://schemas.microsoft.com/office/drawing/2014/main" val="20002"/>
+                    </a:ext>
+                  </a:extLst>
+                </a:gridCol>
               </a:tblGrid>
               <a:tr h="411480">
                 <a:tc>
@@ -11068,7 +12119,7 @@
                     <a:lstStyle/>
                     <a:p>
                       <a:pPr algn="ctr">
-                        <a:defRPr b="1" sz="1100">
+                        <a:defRPr sz="1100" b="1">
                           <a:solidFill>
                             <a:srgbClr val="FFFFFF"/>
                           </a:solidFill>
@@ -11091,7 +12142,7 @@
                     <a:lstStyle/>
                     <a:p>
                       <a:pPr algn="ctr">
-                        <a:defRPr b="1" sz="1100">
+                        <a:defRPr sz="1100" b="1">
                           <a:solidFill>
                             <a:srgbClr val="FFFFFF"/>
                           </a:solidFill>
@@ -11114,7 +12165,7 @@
                     <a:lstStyle/>
                     <a:p>
                       <a:pPr algn="ctr">
-                        <a:defRPr b="1" sz="1100">
+                        <a:defRPr sz="1100" b="1">
                           <a:solidFill>
                             <a:srgbClr val="FFFFFF"/>
                           </a:solidFill>
@@ -11131,6 +12182,11 @@
                     </a:solidFill>
                   </a:tcPr>
                 </a:tc>
+                <a:extLst>
+                  <a:ext uri="{0D108BD9-81ED-4DB2-BD59-A6C34878D82A}">
+                    <a16:rowId xmlns:a16="http://schemas.microsoft.com/office/drawing/2014/main" val="10000"/>
+                  </a:ext>
+                </a:extLst>
               </a:tr>
               <a:tr h="411480">
                 <a:tc>
@@ -11202,6 +12258,11 @@
                     </a:solidFill>
                   </a:tcPr>
                 </a:tc>
+                <a:extLst>
+                  <a:ext uri="{0D108BD9-81ED-4DB2-BD59-A6C34878D82A}">
+                    <a16:rowId xmlns:a16="http://schemas.microsoft.com/office/drawing/2014/main" val="10001"/>
+                  </a:ext>
+                </a:extLst>
               </a:tr>
               <a:tr h="411480">
                 <a:tc>
@@ -11273,6 +12334,11 @@
                     </a:solidFill>
                   </a:tcPr>
                 </a:tc>
+                <a:extLst>
+                  <a:ext uri="{0D108BD9-81ED-4DB2-BD59-A6C34878D82A}">
+                    <a16:rowId xmlns:a16="http://schemas.microsoft.com/office/drawing/2014/main" val="10002"/>
+                  </a:ext>
+                </a:extLst>
               </a:tr>
               <a:tr h="411480">
                 <a:tc>
@@ -11344,6 +12410,11 @@
                     </a:solidFill>
                   </a:tcPr>
                 </a:tc>
+                <a:extLst>
+                  <a:ext uri="{0D108BD9-81ED-4DB2-BD59-A6C34878D82A}">
+                    <a16:rowId xmlns:a16="http://schemas.microsoft.com/office/drawing/2014/main" val="10003"/>
+                  </a:ext>
+                </a:extLst>
               </a:tr>
               <a:tr h="411480">
                 <a:tc>
@@ -11415,6 +12486,11 @@
                     </a:solidFill>
                   </a:tcPr>
                 </a:tc>
+                <a:extLst>
+                  <a:ext uri="{0D108BD9-81ED-4DB2-BD59-A6C34878D82A}">
+                    <a16:rowId xmlns:a16="http://schemas.microsoft.com/office/drawing/2014/main" val="10004"/>
+                  </a:ext>
+                </a:extLst>
               </a:tr>
               <a:tr h="411480">
                 <a:tc>
@@ -11486,6 +12562,11 @@
                     </a:solidFill>
                   </a:tcPr>
                 </a:tc>
+                <a:extLst>
+                  <a:ext uri="{0D108BD9-81ED-4DB2-BD59-A6C34878D82A}">
+                    <a16:rowId xmlns:a16="http://schemas.microsoft.com/office/drawing/2014/main" val="10005"/>
+                  </a:ext>
+                </a:extLst>
               </a:tr>
               <a:tr h="411480">
                 <a:tc>
@@ -11557,6 +12638,11 @@
                     </a:solidFill>
                   </a:tcPr>
                 </a:tc>
+                <a:extLst>
+                  <a:ext uri="{0D108BD9-81ED-4DB2-BD59-A6C34878D82A}">
+                    <a16:rowId xmlns:a16="http://schemas.microsoft.com/office/drawing/2014/main" val="10006"/>
+                  </a:ext>
+                </a:extLst>
               </a:tr>
               <a:tr h="411480">
                 <a:tc>
@@ -11628,6 +12714,11 @@
                     </a:solidFill>
                   </a:tcPr>
                 </a:tc>
+                <a:extLst>
+                  <a:ext uri="{0D108BD9-81ED-4DB2-BD59-A6C34878D82A}">
+                    <a16:rowId xmlns:a16="http://schemas.microsoft.com/office/drawing/2014/main" val="10007"/>
+                  </a:ext>
+                </a:extLst>
               </a:tr>
               <a:tr h="411480">
                 <a:tc>
@@ -11699,6 +12790,11 @@
                     </a:solidFill>
                   </a:tcPr>
                 </a:tc>
+                <a:extLst>
+                  <a:ext uri="{0D108BD9-81ED-4DB2-BD59-A6C34878D82A}">
+                    <a16:rowId xmlns:a16="http://schemas.microsoft.com/office/drawing/2014/main" val="10008"/>
+                  </a:ext>
+                </a:extLst>
               </a:tr>
               <a:tr h="411480">
                 <a:tc>
@@ -11770,6 +12866,11 @@
                     </a:solidFill>
                   </a:tcPr>
                 </a:tc>
+                <a:extLst>
+                  <a:ext uri="{0D108BD9-81ED-4DB2-BD59-A6C34878D82A}">
+                    <a16:rowId xmlns:a16="http://schemas.microsoft.com/office/drawing/2014/main" val="10009"/>
+                  </a:ext>
+                </a:extLst>
               </a:tr>
             </a:tbl>
           </a:graphicData>
@@ -11805,7 +12906,7 @@
                 </a:solidFill>
                 <a:latin typeface="Calibri"/>
               </a:rPr>
-              <a:t>Manye Patrice  |  BACKUP SLIDE  |  Slide 32</a:t>
+              <a:t>Manye Patrice  |  BACKUP SLIDE  |  Slide 35</a:t>
             </a:r>
           </a:p>
         </p:txBody>
@@ -11818,8 +12919,8 @@
 </p:sld>
 </file>
 
-<file path=ppt/slides/slide33.xml><?xml version="1.0" encoding="utf-8"?>
-<p:sld xmlns:a="http://schemas.openxmlformats.org/drawingml/2006/main" xmlns:p="http://schemas.openxmlformats.org/presentationml/2006/main" xmlns:r="http://schemas.openxmlformats.org/officeDocument/2006/relationships">
+<file path=ppt/slides/slide36.xml><?xml version="1.0" encoding="utf-8"?>
+<p:sld xmlns:a="http://schemas.openxmlformats.org/drawingml/2006/main" xmlns:r="http://schemas.openxmlformats.org/officeDocument/2006/relationships" xmlns:p="http://schemas.openxmlformats.org/presentationml/2006/main">
   <p:cSld>
     <p:spTree>
       <p:nvGrpSpPr>
@@ -11827,7 +12928,14 @@
         <p:cNvGrpSpPr/>
         <p:nvPr/>
       </p:nvGrpSpPr>
-      <p:grpSpPr/>
+      <p:grpSpPr>
+        <a:xfrm>
+          <a:off x="0" y="0"/>
+          <a:ext cx="0" cy="0"/>
+          <a:chOff x="0" y="0"/>
+          <a:chExt cx="0" cy="0"/>
+        </a:xfrm>
+      </p:grpSpPr>
       <p:sp>
         <p:nvSpPr>
           <p:cNvPr id="2" name="Rectangle 1"/>
@@ -11868,6 +12976,7 @@
           <a:lstStyle/>
           <a:p>
             <a:pPr algn="ctr"/>
+            <a:endParaRPr/>
           </a:p>
         </p:txBody>
       </p:sp>
@@ -11922,8 +13031,8 @@
         </p:blipFill>
         <p:spPr>
           <a:xfrm>
-            <a:off x="502920" y="1234440"/>
-            <a:ext cx="11185855" cy="7594067"/>
+            <a:off x="2622799" y="1090742"/>
+            <a:ext cx="6946095" cy="4715698"/>
           </a:xfrm>
           <a:prstGeom prst="rect">
             <a:avLst/>
@@ -11995,7 +13104,7 @@
                 </a:solidFill>
                 <a:latin typeface="Calibri"/>
               </a:rPr>
-              <a:t>Manye Patrice  |  BACKUP SLIDE  |  Slide 33</a:t>
+              <a:t>Manye Patrice  |  BACKUP SLIDE  |  Slide 36</a:t>
             </a:r>
           </a:p>
         </p:txBody>
@@ -12008,8 +13117,8 @@
 </p:sld>
 </file>
 
-<file path=ppt/slides/slide34.xml><?xml version="1.0" encoding="utf-8"?>
-<p:sld xmlns:a="http://schemas.openxmlformats.org/drawingml/2006/main" xmlns:p="http://schemas.openxmlformats.org/presentationml/2006/main" xmlns:r="http://schemas.openxmlformats.org/officeDocument/2006/relationships">
+<file path=ppt/slides/slide37.xml><?xml version="1.0" encoding="utf-8"?>
+<p:sld xmlns:a="http://schemas.openxmlformats.org/drawingml/2006/main" xmlns:r="http://schemas.openxmlformats.org/officeDocument/2006/relationships" xmlns:p="http://schemas.openxmlformats.org/presentationml/2006/main">
   <p:cSld>
     <p:spTree>
       <p:nvGrpSpPr>
@@ -12017,7 +13126,14 @@
         <p:cNvGrpSpPr/>
         <p:nvPr/>
       </p:nvGrpSpPr>
-      <p:grpSpPr/>
+      <p:grpSpPr>
+        <a:xfrm>
+          <a:off x="0" y="0"/>
+          <a:ext cx="0" cy="0"/>
+          <a:chOff x="0" y="0"/>
+          <a:chExt cx="0" cy="0"/>
+        </a:xfrm>
+      </p:grpSpPr>
       <p:sp>
         <p:nvSpPr>
           <p:cNvPr id="2" name="Rectangle 1"/>
@@ -12058,6 +13174,7 @@
           <a:lstStyle/>
           <a:p>
             <a:pPr algn="ctr"/>
+            <a:endParaRPr/>
           </a:p>
         </p:txBody>
       </p:sp>
@@ -12112,8 +13229,8 @@
         </p:blipFill>
         <p:spPr>
           <a:xfrm>
-            <a:off x="502920" y="1234440"/>
-            <a:ext cx="11185855" cy="7231260"/>
+            <a:off x="2410926" y="1234440"/>
+            <a:ext cx="7369841" cy="4764342"/>
           </a:xfrm>
           <a:prstGeom prst="rect">
             <a:avLst/>
@@ -12185,7 +13302,7 @@
                 </a:solidFill>
                 <a:latin typeface="Calibri"/>
               </a:rPr>
-              <a:t>Manye Patrice  |  BACKUP SLIDE  |  Slide 34</a:t>
+              <a:t>Manye Patrice  |  BACKUP SLIDE  |  Slide 37</a:t>
             </a:r>
           </a:p>
         </p:txBody>
@@ -12198,8 +13315,8 @@
 </p:sld>
 </file>
 
-<file path=ppt/slides/slide35.xml><?xml version="1.0" encoding="utf-8"?>
-<p:sld xmlns:a="http://schemas.openxmlformats.org/drawingml/2006/main" xmlns:p="http://schemas.openxmlformats.org/presentationml/2006/main" xmlns:r="http://schemas.openxmlformats.org/officeDocument/2006/relationships">
+<file path=ppt/slides/slide38.xml><?xml version="1.0" encoding="utf-8"?>
+<p:sld xmlns:a="http://schemas.openxmlformats.org/drawingml/2006/main" xmlns:r="http://schemas.openxmlformats.org/officeDocument/2006/relationships" xmlns:p="http://schemas.openxmlformats.org/presentationml/2006/main">
   <p:cSld>
     <p:spTree>
       <p:nvGrpSpPr>
@@ -12207,7 +13324,14 @@
         <p:cNvGrpSpPr/>
         <p:nvPr/>
       </p:nvGrpSpPr>
-      <p:grpSpPr/>
+      <p:grpSpPr>
+        <a:xfrm>
+          <a:off x="0" y="0"/>
+          <a:ext cx="0" cy="0"/>
+          <a:chOff x="0" y="0"/>
+          <a:chExt cx="0" cy="0"/>
+        </a:xfrm>
+      </p:grpSpPr>
       <p:sp>
         <p:nvSpPr>
           <p:cNvPr id="2" name="Rectangle 1"/>
@@ -12248,6 +13372,7 @@
           <a:lstStyle/>
           <a:p>
             <a:pPr algn="ctr"/>
+            <a:endParaRPr/>
           </a:p>
         </p:txBody>
       </p:sp>
@@ -12329,6 +13454,7 @@
           <a:lstStyle/>
           <a:p>
             <a:pPr algn="ctr"/>
+            <a:endParaRPr/>
           </a:p>
         </p:txBody>
       </p:sp>
@@ -12376,7 +13502,7 @@
         <p:spPr>
           <a:xfrm>
             <a:off x="502920" y="5440680"/>
-            <a:ext cx="11185855" cy="274320"/>
+            <a:ext cx="11185855" cy="230832"/>
           </a:xfrm>
           <a:prstGeom prst="rect">
             <a:avLst/>
@@ -12391,13 +13517,40 @@
           <a:p>
             <a:pPr algn="ctr"/>
             <a:r>
-              <a:rPr sz="900" b="0">
+              <a:rPr sz="900" b="0" dirty="0">
                 <a:solidFill>
                   <a:srgbClr val="1E3A8A"/>
                 </a:solidFill>
                 <a:latin typeface="Calibri"/>
               </a:rPr>
-              <a:t>URL: http://localhost/workers/   |   Login: john@example.com / password123</a:t>
+              <a:t>URL: http://localhost/workers/   |   Login: </a:t>
+            </a:r>
+            <a:r>
+              <a:rPr lang="en-US" sz="900" dirty="0" smtClean="0">
+                <a:solidFill>
+                  <a:srgbClr val="1E3A8A"/>
+                </a:solidFill>
+                <a:latin typeface="Calibri"/>
+              </a:rPr>
+              <a:t>patricksmithson881</a:t>
+            </a:r>
+            <a:r>
+              <a:rPr sz="900" b="0" dirty="0" smtClean="0">
+                <a:solidFill>
+                  <a:srgbClr val="1E3A8A"/>
+                </a:solidFill>
+                <a:latin typeface="Calibri"/>
+              </a:rPr>
+              <a:t>.com </a:t>
+            </a:r>
+            <a:r>
+              <a:rPr sz="900" b="0" dirty="0">
+                <a:solidFill>
+                  <a:srgbClr val="1E3A8A"/>
+                </a:solidFill>
+                <a:latin typeface="Calibri"/>
+              </a:rPr>
+              <a:t>/ password123</a:t>
             </a:r>
           </a:p>
         </p:txBody>
@@ -12467,11 +13620,41 @@
                 </a:solidFill>
                 <a:latin typeface="Calibri"/>
               </a:rPr>
-              <a:t>Manye Patrice  |  BACKUP SLIDE  |  Slide 35</a:t>
-            </a:r>
-          </a:p>
-        </p:txBody>
-      </p:sp>
+              <a:t>Manye Patrice  |  BACKUP SLIDE  |  Slide 38</a:t>
+            </a:r>
+          </a:p>
+        </p:txBody>
+      </p:sp>
+      <p:pic>
+        <p:nvPicPr>
+          <p:cNvPr id="9" name="Image 8"/>
+          <p:cNvPicPr>
+            <a:picLocks noChangeAspect="1"/>
+          </p:cNvPicPr>
+          <p:nvPr/>
+        </p:nvPicPr>
+        <p:blipFill>
+          <a:blip r:embed="rId2">
+            <a:extLst>
+              <a:ext uri="{28A0092B-C50C-407E-A947-70E740481C1C}">
+                <a14:useLocalDpi xmlns:a14="http://schemas.microsoft.com/office/drawing/2010/main" val="0"/>
+              </a:ext>
+            </a:extLst>
+          </a:blip>
+          <a:stretch>
+            <a:fillRect/>
+          </a:stretch>
+        </p:blipFill>
+        <p:spPr>
+          <a:xfrm>
+            <a:off x="502920" y="1252728"/>
+            <a:ext cx="11185854" cy="4142232"/>
+          </a:xfrm>
+          <a:prstGeom prst="rect">
+            <a:avLst/>
+          </a:prstGeom>
+        </p:spPr>
+      </p:pic>
     </p:spTree>
   </p:cSld>
   <p:clrMapOvr>
@@ -12480,8 +13663,8 @@
 </p:sld>
 </file>
 
-<file path=ppt/slides/slide36.xml><?xml version="1.0" encoding="utf-8"?>
-<p:sld xmlns:a="http://schemas.openxmlformats.org/drawingml/2006/main" xmlns:p="http://schemas.openxmlformats.org/presentationml/2006/main" xmlns:r="http://schemas.openxmlformats.org/officeDocument/2006/relationships">
+<file path=ppt/slides/slide39.xml><?xml version="1.0" encoding="utf-8"?>
+<p:sld xmlns:a="http://schemas.openxmlformats.org/drawingml/2006/main" xmlns:r="http://schemas.openxmlformats.org/officeDocument/2006/relationships" xmlns:p="http://schemas.openxmlformats.org/presentationml/2006/main">
   <p:cSld>
     <p:spTree>
       <p:nvGrpSpPr>
@@ -12489,7 +13672,14 @@
         <p:cNvGrpSpPr/>
         <p:nvPr/>
       </p:nvGrpSpPr>
-      <p:grpSpPr/>
+      <p:grpSpPr>
+        <a:xfrm>
+          <a:off x="0" y="0"/>
+          <a:ext cx="0" cy="0"/>
+          <a:chOff x="0" y="0"/>
+          <a:chExt cx="0" cy="0"/>
+        </a:xfrm>
+      </p:grpSpPr>
       <p:sp>
         <p:nvSpPr>
           <p:cNvPr id="2" name="Rectangle 1"/>
@@ -12530,6 +13720,7 @@
           <a:lstStyle/>
           <a:p>
             <a:pPr algn="ctr"/>
+            <a:endParaRPr/>
           </a:p>
         </p:txBody>
       </p:sp>
@@ -12611,6 +13802,7 @@
           <a:lstStyle/>
           <a:p>
             <a:pPr algn="ctr"/>
+            <a:endParaRPr/>
           </a:p>
         </p:txBody>
       </p:sp>
@@ -12749,11 +13941,35 @@
                 </a:solidFill>
                 <a:latin typeface="Calibri"/>
               </a:rPr>
-              <a:t>Manye Patrice  |  BACKUP SLIDE  |  Slide 36</a:t>
-            </a:r>
-          </a:p>
-        </p:txBody>
-      </p:sp>
+              <a:t>Manye Patrice  |  BACKUP SLIDE  |  Slide 39</a:t>
+            </a:r>
+          </a:p>
+        </p:txBody>
+      </p:sp>
+      <p:pic>
+        <p:nvPicPr>
+          <p:cNvPr id="9" name="Image 8"/>
+          <p:cNvPicPr>
+            <a:picLocks noChangeAspect="1"/>
+          </p:cNvPicPr>
+          <p:nvPr/>
+        </p:nvPicPr>
+        <p:blipFill>
+          <a:blip r:embed="rId2"/>
+          <a:stretch>
+            <a:fillRect/>
+          </a:stretch>
+        </p:blipFill>
+        <p:spPr>
+          <a:xfrm>
+            <a:off x="502920" y="1252727"/>
+            <a:ext cx="11185855" cy="4142233"/>
+          </a:xfrm>
+          <a:prstGeom prst="rect">
+            <a:avLst/>
+          </a:prstGeom>
+        </p:spPr>
+      </p:pic>
     </p:spTree>
   </p:cSld>
   <p:clrMapOvr>
@@ -12762,8 +13978,8 @@
 </p:sld>
 </file>
 
-<file path=ppt/slides/slide37.xml><?xml version="1.0" encoding="utf-8"?>
-<p:sld xmlns:a="http://schemas.openxmlformats.org/drawingml/2006/main" xmlns:p="http://schemas.openxmlformats.org/presentationml/2006/main" xmlns:r="http://schemas.openxmlformats.org/officeDocument/2006/relationships">
+<file path=ppt/slides/slide4.xml><?xml version="1.0" encoding="utf-8"?>
+<p:sld xmlns:a="http://schemas.openxmlformats.org/drawingml/2006/main" xmlns:r="http://schemas.openxmlformats.org/officeDocument/2006/relationships" xmlns:p="http://schemas.openxmlformats.org/presentationml/2006/main">
   <p:cSld>
     <p:spTree>
       <p:nvGrpSpPr>
@@ -12771,7 +13987,14 @@
         <p:cNvGrpSpPr/>
         <p:nvPr/>
       </p:nvGrpSpPr>
-      <p:grpSpPr/>
+      <p:grpSpPr>
+        <a:xfrm>
+          <a:off x="0" y="0"/>
+          <a:ext cx="0" cy="0"/>
+          <a:chOff x="0" y="0"/>
+          <a:chExt cx="0" cy="0"/>
+        </a:xfrm>
+      </p:grpSpPr>
       <p:sp>
         <p:nvSpPr>
           <p:cNvPr id="2" name="Rectangle 1"/>
@@ -12812,6 +14035,264 @@
           <a:lstStyle/>
           <a:p>
             <a:pPr algn="ctr"/>
+            <a:endParaRPr/>
+          </a:p>
+        </p:txBody>
+      </p:sp>
+      <p:sp>
+        <p:nvSpPr>
+          <p:cNvPr id="3" name="TextBox 2"/>
+          <p:cNvSpPr txBox="1"/>
+          <p:nvPr/>
+        </p:nvSpPr>
+        <p:spPr>
+          <a:xfrm>
+            <a:off x="502920" y="201168"/>
+            <a:ext cx="11185855" cy="502920"/>
+          </a:xfrm>
+          <a:prstGeom prst="rect">
+            <a:avLst/>
+          </a:prstGeom>
+          <a:noFill/>
+        </p:spPr>
+        <p:txBody>
+          <a:bodyPr wrap="square" anchor="t">
+            <a:spAutoFit/>
+          </a:bodyPr>
+          <a:lstStyle/>
+          <a:p>
+            <a:pPr algn="l"/>
+            <a:r>
+              <a:rPr sz="2800" b="1">
+                <a:solidFill>
+                  <a:srgbClr val="FFFFFF"/>
+                </a:solidFill>
+                <a:latin typeface="Calibri"/>
+              </a:rPr>
+              <a:t>Introduction &amp; Problem Statement</a:t>
+            </a:r>
+          </a:p>
+        </p:txBody>
+      </p:sp>
+      <p:sp>
+        <p:nvSpPr>
+          <p:cNvPr id="4" name="TextBox 3"/>
+          <p:cNvSpPr txBox="1"/>
+          <p:nvPr/>
+        </p:nvSpPr>
+        <p:spPr>
+          <a:xfrm>
+            <a:off x="502920" y="1234440"/>
+            <a:ext cx="11185855" cy="5029200"/>
+          </a:xfrm>
+          <a:prstGeom prst="rect">
+            <a:avLst/>
+          </a:prstGeom>
+          <a:noFill/>
+        </p:spPr>
+        <p:txBody>
+          <a:bodyPr wrap="square">
+            <a:spAutoFit/>
+          </a:bodyPr>
+          <a:lstStyle/>
+          <a:p>
+            <a:pPr>
+              <a:lnSpc>
+                <a:spcPct val="115000"/>
+              </a:lnSpc>
+              <a:spcAft>
+                <a:spcPts val="600"/>
+              </a:spcAft>
+              <a:defRPr sz="1600">
+                <a:solidFill>
+                  <a:srgbClr val="1E293B"/>
+                </a:solidFill>
+                <a:latin typeface="Calibri"/>
+              </a:defRPr>
+            </a:pPr>
+            <a:r>
+              <a:t>ProTech — a marketplace connecting clients with skilled service workers.</a:t>
+            </a:r>
+          </a:p>
+          <a:p>
+            <a:pPr>
+              <a:lnSpc>
+                <a:spcPct val="115000"/>
+              </a:lnSpc>
+              <a:spcAft>
+                <a:spcPts val="600"/>
+              </a:spcAft>
+              <a:defRPr sz="1600">
+                <a:solidFill>
+                  <a:srgbClr val="1E293B"/>
+                </a:solidFill>
+                <a:latin typeface="Calibri"/>
+              </a:defRPr>
+            </a:pPr>
+            <a:r>
+              <a:t>End-of-year master's project: IT Innovation in Business.</a:t>
+            </a:r>
+          </a:p>
+          <a:p>
+            <a:pPr>
+              <a:lnSpc>
+                <a:spcPct val="115000"/>
+              </a:lnSpc>
+              <a:spcAft>
+                <a:spcPts val="600"/>
+              </a:spcAft>
+              <a:defRPr sz="1600">
+                <a:solidFill>
+                  <a:srgbClr val="1E293B"/>
+                </a:solidFill>
+                <a:latin typeface="Calibri"/>
+              </a:defRPr>
+            </a:pPr>
+            <a:r>
+              <a:t>Problems: poor discovery, payment risk, fragmented coordination, no admin oversight.</a:t>
+            </a:r>
+          </a:p>
+          <a:p>
+            <a:pPr>
+              <a:lnSpc>
+                <a:spcPct val="115000"/>
+              </a:lnSpc>
+              <a:spcAft>
+                <a:spcPts val="600"/>
+              </a:spcAft>
+              <a:defRPr sz="1600">
+                <a:solidFill>
+                  <a:srgbClr val="1E293B"/>
+                </a:solidFill>
+                <a:latin typeface="Calibri"/>
+              </a:defRPr>
+            </a:pPr>
+            <a:r>
+              <a:t>Solution: one Django platform with booking, escrow, reviews, and RBAC.</a:t>
+            </a:r>
+          </a:p>
+          <a:p>
+            <a:pPr>
+              <a:lnSpc>
+                <a:spcPct val="115000"/>
+              </a:lnSpc>
+              <a:spcAft>
+                <a:spcPts val="600"/>
+              </a:spcAft>
+              <a:defRPr sz="1600">
+                <a:solidFill>
+                  <a:srgbClr val="1E293B"/>
+                </a:solidFill>
+                <a:latin typeface="Calibri"/>
+              </a:defRPr>
+            </a:pPr>
+            <a:r>
+              <a:t>Clone-and-run via Docker for academic evaluation.</a:t>
+            </a:r>
+          </a:p>
+        </p:txBody>
+      </p:sp>
+      <p:sp>
+        <p:nvSpPr>
+          <p:cNvPr id="5" name="TextBox 4"/>
+          <p:cNvSpPr txBox="1"/>
+          <p:nvPr/>
+        </p:nvSpPr>
+        <p:spPr>
+          <a:xfrm>
+            <a:off x="502920" y="6446520"/>
+            <a:ext cx="11185855" cy="320040"/>
+          </a:xfrm>
+          <a:prstGeom prst="rect">
+            <a:avLst/>
+          </a:prstGeom>
+          <a:noFill/>
+        </p:spPr>
+        <p:txBody>
+          <a:bodyPr wrap="square" anchor="t">
+            <a:spAutoFit/>
+          </a:bodyPr>
+          <a:lstStyle/>
+          <a:p>
+            <a:pPr algn="ctr"/>
+            <a:r>
+              <a:rPr sz="900" b="0">
+                <a:solidFill>
+                  <a:srgbClr val="64748B"/>
+                </a:solidFill>
+                <a:latin typeface="Calibri"/>
+              </a:rPr>
+              <a:t>Manye Patrice  |  IT Innovation in Business — Master's Degree  |  Slide 4 of 31</a:t>
+            </a:r>
+          </a:p>
+        </p:txBody>
+      </p:sp>
+    </p:spTree>
+  </p:cSld>
+  <p:clrMapOvr>
+    <a:masterClrMapping/>
+  </p:clrMapOvr>
+</p:sld>
+</file>
+
+<file path=ppt/slides/slide40.xml><?xml version="1.0" encoding="utf-8"?>
+<p:sld xmlns:a="http://schemas.openxmlformats.org/drawingml/2006/main" xmlns:r="http://schemas.openxmlformats.org/officeDocument/2006/relationships" xmlns:p="http://schemas.openxmlformats.org/presentationml/2006/main">
+  <p:cSld>
+    <p:spTree>
+      <p:nvGrpSpPr>
+        <p:cNvPr id="1" name=""/>
+        <p:cNvGrpSpPr/>
+        <p:nvPr/>
+      </p:nvGrpSpPr>
+      <p:grpSpPr>
+        <a:xfrm>
+          <a:off x="0" y="0"/>
+          <a:ext cx="0" cy="0"/>
+          <a:chOff x="0" y="0"/>
+          <a:chExt cx="0" cy="0"/>
+        </a:xfrm>
+      </p:grpSpPr>
+      <p:sp>
+        <p:nvSpPr>
+          <p:cNvPr id="2" name="Rectangle 1"/>
+          <p:cNvSpPr/>
+          <p:nvPr/>
+        </p:nvSpPr>
+        <p:spPr>
+          <a:xfrm>
+            <a:off x="0" y="0"/>
+            <a:ext cx="12191695" cy="1051560"/>
+          </a:xfrm>
+          <a:prstGeom prst="rect">
+            <a:avLst/>
+          </a:prstGeom>
+          <a:solidFill>
+            <a:srgbClr val="1E3A8A"/>
+          </a:solidFill>
+          <a:ln>
+            <a:noFill/>
+          </a:ln>
+        </p:spPr>
+        <p:style>
+          <a:lnRef idx="1">
+            <a:schemeClr val="accent1"/>
+          </a:lnRef>
+          <a:fillRef idx="3">
+            <a:schemeClr val="accent1"/>
+          </a:fillRef>
+          <a:effectRef idx="2">
+            <a:schemeClr val="accent1"/>
+          </a:effectRef>
+          <a:fontRef idx="minor">
+            <a:schemeClr val="lt1"/>
+          </a:fontRef>
+        </p:style>
+        <p:txBody>
+          <a:bodyPr rtlCol="0" anchor="ctr"/>
+          <a:lstStyle/>
+          <a:p>
+            <a:pPr algn="ctr"/>
+            <a:endParaRPr/>
           </a:p>
         </p:txBody>
       </p:sp>
@@ -12869,9 +14350,27 @@
                 <a:tableStyleId>{5C22544A-7EE6-4342-B048-85BDC9FD1C3A}</a:tableStyleId>
               </a:tblPr>
               <a:tblGrid>
-                <a:gridCol w="1371600"/>
-                <a:gridCol w="1828800"/>
-                <a:gridCol w="2560320"/>
+                <a:gridCol w="1371600">
+                  <a:extLst>
+                    <a:ext uri="{9D8B030D-6E8A-4147-A177-3AD203B41FA5}">
+                      <a16:colId xmlns:a16="http://schemas.microsoft.com/office/drawing/2014/main" val="20000"/>
+                    </a:ext>
+                  </a:extLst>
+                </a:gridCol>
+                <a:gridCol w="1828800">
+                  <a:extLst>
+                    <a:ext uri="{9D8B030D-6E8A-4147-A177-3AD203B41FA5}">
+                      <a16:colId xmlns:a16="http://schemas.microsoft.com/office/drawing/2014/main" val="20001"/>
+                    </a:ext>
+                  </a:extLst>
+                </a:gridCol>
+                <a:gridCol w="2560320">
+                  <a:extLst>
+                    <a:ext uri="{9D8B030D-6E8A-4147-A177-3AD203B41FA5}">
+                      <a16:colId xmlns:a16="http://schemas.microsoft.com/office/drawing/2014/main" val="20002"/>
+                    </a:ext>
+                  </a:extLst>
+                </a:gridCol>
               </a:tblGrid>
               <a:tr h="411480">
                 <a:tc>
@@ -12880,7 +14379,7 @@
                     <a:lstStyle/>
                     <a:p>
                       <a:pPr algn="ctr">
-                        <a:defRPr b="1" sz="1100">
+                        <a:defRPr sz="1100" b="1">
                           <a:solidFill>
                             <a:srgbClr val="FFFFFF"/>
                           </a:solidFill>
@@ -12903,7 +14402,7 @@
                     <a:lstStyle/>
                     <a:p>
                       <a:pPr algn="ctr">
-                        <a:defRPr b="1" sz="1100">
+                        <a:defRPr sz="1100" b="1">
                           <a:solidFill>
                             <a:srgbClr val="FFFFFF"/>
                           </a:solidFill>
@@ -12926,7 +14425,7 @@
                     <a:lstStyle/>
                     <a:p>
                       <a:pPr algn="ctr">
-                        <a:defRPr b="1" sz="1100">
+                        <a:defRPr sz="1100" b="1">
                           <a:solidFill>
                             <a:srgbClr val="FFFFFF"/>
                           </a:solidFill>
@@ -12943,6 +14442,11 @@
                     </a:solidFill>
                   </a:tcPr>
                 </a:tc>
+                <a:extLst>
+                  <a:ext uri="{0D108BD9-81ED-4DB2-BD59-A6C34878D82A}">
+                    <a16:rowId xmlns:a16="http://schemas.microsoft.com/office/drawing/2014/main" val="10000"/>
+                  </a:ext>
+                </a:extLst>
               </a:tr>
               <a:tr h="411480">
                 <a:tc>
@@ -13014,6 +14518,11 @@
                     </a:solidFill>
                   </a:tcPr>
                 </a:tc>
+                <a:extLst>
+                  <a:ext uri="{0D108BD9-81ED-4DB2-BD59-A6C34878D82A}">
+                    <a16:rowId xmlns:a16="http://schemas.microsoft.com/office/drawing/2014/main" val="10001"/>
+                  </a:ext>
+                </a:extLst>
               </a:tr>
               <a:tr h="411480">
                 <a:tc>
@@ -13085,6 +14594,11 @@
                     </a:solidFill>
                   </a:tcPr>
                 </a:tc>
+                <a:extLst>
+                  <a:ext uri="{0D108BD9-81ED-4DB2-BD59-A6C34878D82A}">
+                    <a16:rowId xmlns:a16="http://schemas.microsoft.com/office/drawing/2014/main" val="10002"/>
+                  </a:ext>
+                </a:extLst>
               </a:tr>
               <a:tr h="411480">
                 <a:tc>
@@ -13156,6 +14670,11 @@
                     </a:solidFill>
                   </a:tcPr>
                 </a:tc>
+                <a:extLst>
+                  <a:ext uri="{0D108BD9-81ED-4DB2-BD59-A6C34878D82A}">
+                    <a16:rowId xmlns:a16="http://schemas.microsoft.com/office/drawing/2014/main" val="10003"/>
+                  </a:ext>
+                </a:extLst>
               </a:tr>
               <a:tr h="411480">
                 <a:tc>
@@ -13227,6 +14746,11 @@
                     </a:solidFill>
                   </a:tcPr>
                 </a:tc>
+                <a:extLst>
+                  <a:ext uri="{0D108BD9-81ED-4DB2-BD59-A6C34878D82A}">
+                    <a16:rowId xmlns:a16="http://schemas.microsoft.com/office/drawing/2014/main" val="10004"/>
+                  </a:ext>
+                </a:extLst>
               </a:tr>
               <a:tr h="411480">
                 <a:tc>
@@ -13298,6 +14822,11 @@
                     </a:solidFill>
                   </a:tcPr>
                 </a:tc>
+                <a:extLst>
+                  <a:ext uri="{0D108BD9-81ED-4DB2-BD59-A6C34878D82A}">
+                    <a16:rowId xmlns:a16="http://schemas.microsoft.com/office/drawing/2014/main" val="10005"/>
+                  </a:ext>
+                </a:extLst>
               </a:tr>
               <a:tr h="411480">
                 <a:tc>
@@ -13369,6 +14898,11 @@
                     </a:solidFill>
                   </a:tcPr>
                 </a:tc>
+                <a:extLst>
+                  <a:ext uri="{0D108BD9-81ED-4DB2-BD59-A6C34878D82A}">
+                    <a16:rowId xmlns:a16="http://schemas.microsoft.com/office/drawing/2014/main" val="10006"/>
+                  </a:ext>
+                </a:extLst>
               </a:tr>
               <a:tr h="411480">
                 <a:tc>
@@ -13440,6 +14974,11 @@
                     </a:solidFill>
                   </a:tcPr>
                 </a:tc>
+                <a:extLst>
+                  <a:ext uri="{0D108BD9-81ED-4DB2-BD59-A6C34878D82A}">
+                    <a16:rowId xmlns:a16="http://schemas.microsoft.com/office/drawing/2014/main" val="10007"/>
+                  </a:ext>
+                </a:extLst>
               </a:tr>
               <a:tr h="411480">
                 <a:tc>
@@ -13511,6 +15050,11 @@
                     </a:solidFill>
                   </a:tcPr>
                 </a:tc>
+                <a:extLst>
+                  <a:ext uri="{0D108BD9-81ED-4DB2-BD59-A6C34878D82A}">
+                    <a16:rowId xmlns:a16="http://schemas.microsoft.com/office/drawing/2014/main" val="10008"/>
+                  </a:ext>
+                </a:extLst>
               </a:tr>
               <a:tr h="411480">
                 <a:tc>
@@ -13582,6 +15126,11 @@
                     </a:solidFill>
                   </a:tcPr>
                 </a:tc>
+                <a:extLst>
+                  <a:ext uri="{0D108BD9-81ED-4DB2-BD59-A6C34878D82A}">
+                    <a16:rowId xmlns:a16="http://schemas.microsoft.com/office/drawing/2014/main" val="10009"/>
+                  </a:ext>
+                </a:extLst>
               </a:tr>
               <a:tr h="411480">
                 <a:tc>
@@ -13653,6 +15202,11 @@
                     </a:solidFill>
                   </a:tcPr>
                 </a:tc>
+                <a:extLst>
+                  <a:ext uri="{0D108BD9-81ED-4DB2-BD59-A6C34878D82A}">
+                    <a16:rowId xmlns:a16="http://schemas.microsoft.com/office/drawing/2014/main" val="10010"/>
+                  </a:ext>
+                </a:extLst>
               </a:tr>
             </a:tbl>
           </a:graphicData>
@@ -13688,7 +15242,7 @@
                 </a:solidFill>
                 <a:latin typeface="Calibri"/>
               </a:rPr>
-              <a:t>Manye Patrice  |  BACKUP SLIDE  |  Slide 37</a:t>
+              <a:t>Manye Patrice  |  BACKUP SLIDE  |  Slide 40</a:t>
             </a:r>
           </a:p>
         </p:txBody>
@@ -13701,8 +15255,8 @@
 </p:sld>
 </file>
 
-<file path=ppt/slides/slide38.xml><?xml version="1.0" encoding="utf-8"?>
-<p:sld xmlns:a="http://schemas.openxmlformats.org/drawingml/2006/main" xmlns:p="http://schemas.openxmlformats.org/presentationml/2006/main" xmlns:r="http://schemas.openxmlformats.org/officeDocument/2006/relationships">
+<file path=ppt/slides/slide41.xml><?xml version="1.0" encoding="utf-8"?>
+<p:sld xmlns:a="http://schemas.openxmlformats.org/drawingml/2006/main" xmlns:r="http://schemas.openxmlformats.org/officeDocument/2006/relationships" xmlns:p="http://schemas.openxmlformats.org/presentationml/2006/main">
   <p:cSld>
     <p:spTree>
       <p:nvGrpSpPr>
@@ -13710,7 +15264,14 @@
         <p:cNvGrpSpPr/>
         <p:nvPr/>
       </p:nvGrpSpPr>
-      <p:grpSpPr/>
+      <p:grpSpPr>
+        <a:xfrm>
+          <a:off x="0" y="0"/>
+          <a:ext cx="0" cy="0"/>
+          <a:chOff x="0" y="0"/>
+          <a:chExt cx="0" cy="0"/>
+        </a:xfrm>
+      </p:grpSpPr>
       <p:sp>
         <p:nvSpPr>
           <p:cNvPr id="2" name="Rectangle 1"/>
@@ -13751,6 +15312,7 @@
           <a:lstStyle/>
           <a:p>
             <a:pPr algn="ctr"/>
+            <a:endParaRPr/>
           </a:p>
         </p:txBody>
       </p:sp>
@@ -13937,7 +15499,7 @@
                 </a:solidFill>
                 <a:latin typeface="Calibri"/>
               </a:rPr>
-              <a:t>Manye Patrice  |  BACKUP SLIDE  |  Slide 38</a:t>
+              <a:t>Manye Patrice  |  BACKUP SLIDE  |  Slide 41</a:t>
             </a:r>
           </a:p>
         </p:txBody>
@@ -13950,8 +15512,8 @@
 </p:sld>
 </file>
 
-<file path=ppt/slides/slide39.xml><?xml version="1.0" encoding="utf-8"?>
-<p:sld xmlns:a="http://schemas.openxmlformats.org/drawingml/2006/main" xmlns:p="http://schemas.openxmlformats.org/presentationml/2006/main" xmlns:r="http://schemas.openxmlformats.org/officeDocument/2006/relationships">
+<file path=ppt/slides/slide42.xml><?xml version="1.0" encoding="utf-8"?>
+<p:sld xmlns:a="http://schemas.openxmlformats.org/drawingml/2006/main" xmlns:r="http://schemas.openxmlformats.org/officeDocument/2006/relationships" xmlns:p="http://schemas.openxmlformats.org/presentationml/2006/main">
   <p:cSld>
     <p:spTree>
       <p:nvGrpSpPr>
@@ -13959,7 +15521,14 @@
         <p:cNvGrpSpPr/>
         <p:nvPr/>
       </p:nvGrpSpPr>
-      <p:grpSpPr/>
+      <p:grpSpPr>
+        <a:xfrm>
+          <a:off x="0" y="0"/>
+          <a:ext cx="0" cy="0"/>
+          <a:chOff x="0" y="0"/>
+          <a:chExt cx="0" cy="0"/>
+        </a:xfrm>
+      </p:grpSpPr>
       <p:sp>
         <p:nvSpPr>
           <p:cNvPr id="2" name="Rectangle 1"/>
@@ -14000,6 +15569,7 @@
           <a:lstStyle/>
           <a:p>
             <a:pPr algn="ctr"/>
+            <a:endParaRPr/>
           </a:p>
         </p:txBody>
       </p:sp>
@@ -14186,7 +15756,7 @@
                 </a:solidFill>
                 <a:latin typeface="Calibri"/>
               </a:rPr>
-              <a:t>Manye Patrice  |  BACKUP SLIDE  |  Slide 39</a:t>
+              <a:t>Manye Patrice  |  BACKUP SLIDE  |  Slide 42</a:t>
             </a:r>
           </a:p>
         </p:txBody>
@@ -14199,8 +15769,8 @@
 </p:sld>
 </file>
 
-<file path=ppt/slides/slide4.xml><?xml version="1.0" encoding="utf-8"?>
-<p:sld xmlns:a="http://schemas.openxmlformats.org/drawingml/2006/main" xmlns:p="http://schemas.openxmlformats.org/presentationml/2006/main" xmlns:r="http://schemas.openxmlformats.org/officeDocument/2006/relationships">
+<file path=ppt/slides/slide5.xml><?xml version="1.0" encoding="utf-8"?>
+<p:sld xmlns:a="http://schemas.openxmlformats.org/drawingml/2006/main" xmlns:r="http://schemas.openxmlformats.org/officeDocument/2006/relationships" xmlns:p="http://schemas.openxmlformats.org/presentationml/2006/main">
   <p:cSld>
     <p:spTree>
       <p:nvGrpSpPr>
@@ -14208,7 +15778,14 @@
         <p:cNvGrpSpPr/>
         <p:nvPr/>
       </p:nvGrpSpPr>
-      <p:grpSpPr/>
+      <p:grpSpPr>
+        <a:xfrm>
+          <a:off x="0" y="0"/>
+          <a:ext cx="0" cy="0"/>
+          <a:chOff x="0" y="0"/>
+          <a:chExt cx="0" cy="0"/>
+        </a:xfrm>
+      </p:grpSpPr>
       <p:sp>
         <p:nvSpPr>
           <p:cNvPr id="2" name="Rectangle 1"/>
@@ -14249,255 +15826,7 @@
           <a:lstStyle/>
           <a:p>
             <a:pPr algn="ctr"/>
-          </a:p>
-        </p:txBody>
-      </p:sp>
-      <p:sp>
-        <p:nvSpPr>
-          <p:cNvPr id="3" name="TextBox 2"/>
-          <p:cNvSpPr txBox="1"/>
-          <p:nvPr/>
-        </p:nvSpPr>
-        <p:spPr>
-          <a:xfrm>
-            <a:off x="502920" y="201168"/>
-            <a:ext cx="11185855" cy="502920"/>
-          </a:xfrm>
-          <a:prstGeom prst="rect">
-            <a:avLst/>
-          </a:prstGeom>
-          <a:noFill/>
-        </p:spPr>
-        <p:txBody>
-          <a:bodyPr wrap="square" anchor="t">
-            <a:spAutoFit/>
-          </a:bodyPr>
-          <a:lstStyle/>
-          <a:p>
-            <a:pPr algn="l"/>
-            <a:r>
-              <a:rPr sz="2800" b="1">
-                <a:solidFill>
-                  <a:srgbClr val="FFFFFF"/>
-                </a:solidFill>
-                <a:latin typeface="Calibri"/>
-              </a:rPr>
-              <a:t>Introduction &amp; Problem Statement</a:t>
-            </a:r>
-          </a:p>
-        </p:txBody>
-      </p:sp>
-      <p:sp>
-        <p:nvSpPr>
-          <p:cNvPr id="4" name="TextBox 3"/>
-          <p:cNvSpPr txBox="1"/>
-          <p:nvPr/>
-        </p:nvSpPr>
-        <p:spPr>
-          <a:xfrm>
-            <a:off x="502920" y="1234440"/>
-            <a:ext cx="11185855" cy="5029200"/>
-          </a:xfrm>
-          <a:prstGeom prst="rect">
-            <a:avLst/>
-          </a:prstGeom>
-          <a:noFill/>
-        </p:spPr>
-        <p:txBody>
-          <a:bodyPr wrap="square">
-            <a:spAutoFit/>
-          </a:bodyPr>
-          <a:lstStyle/>
-          <a:p>
-            <a:pPr>
-              <a:lnSpc>
-                <a:spcPct val="115000"/>
-              </a:lnSpc>
-              <a:spcAft>
-                <a:spcPts val="600"/>
-              </a:spcAft>
-              <a:defRPr sz="1600">
-                <a:solidFill>
-                  <a:srgbClr val="1E293B"/>
-                </a:solidFill>
-                <a:latin typeface="Calibri"/>
-              </a:defRPr>
-            </a:pPr>
-            <a:r>
-              <a:t>ProTech — a marketplace connecting clients with skilled service workers.</a:t>
-            </a:r>
-          </a:p>
-          <a:p>
-            <a:pPr>
-              <a:lnSpc>
-                <a:spcPct val="115000"/>
-              </a:lnSpc>
-              <a:spcAft>
-                <a:spcPts val="600"/>
-              </a:spcAft>
-              <a:defRPr sz="1600">
-                <a:solidFill>
-                  <a:srgbClr val="1E293B"/>
-                </a:solidFill>
-                <a:latin typeface="Calibri"/>
-              </a:defRPr>
-            </a:pPr>
-            <a:r>
-              <a:t>End-of-year master's project: IT Innovation in Business.</a:t>
-            </a:r>
-          </a:p>
-          <a:p>
-            <a:pPr>
-              <a:lnSpc>
-                <a:spcPct val="115000"/>
-              </a:lnSpc>
-              <a:spcAft>
-                <a:spcPts val="600"/>
-              </a:spcAft>
-              <a:defRPr sz="1600">
-                <a:solidFill>
-                  <a:srgbClr val="1E293B"/>
-                </a:solidFill>
-                <a:latin typeface="Calibri"/>
-              </a:defRPr>
-            </a:pPr>
-            <a:r>
-              <a:t>Problems: poor discovery, payment risk, fragmented coordination, no admin oversight.</a:t>
-            </a:r>
-          </a:p>
-          <a:p>
-            <a:pPr>
-              <a:lnSpc>
-                <a:spcPct val="115000"/>
-              </a:lnSpc>
-              <a:spcAft>
-                <a:spcPts val="600"/>
-              </a:spcAft>
-              <a:defRPr sz="1600">
-                <a:solidFill>
-                  <a:srgbClr val="1E293B"/>
-                </a:solidFill>
-                <a:latin typeface="Calibri"/>
-              </a:defRPr>
-            </a:pPr>
-            <a:r>
-              <a:t>Solution: one Django platform with booking, escrow, reviews, and RBAC.</a:t>
-            </a:r>
-          </a:p>
-          <a:p>
-            <a:pPr>
-              <a:lnSpc>
-                <a:spcPct val="115000"/>
-              </a:lnSpc>
-              <a:spcAft>
-                <a:spcPts val="600"/>
-              </a:spcAft>
-              <a:defRPr sz="1600">
-                <a:solidFill>
-                  <a:srgbClr val="1E293B"/>
-                </a:solidFill>
-                <a:latin typeface="Calibri"/>
-              </a:defRPr>
-            </a:pPr>
-            <a:r>
-              <a:t>Clone-and-run via Docker for academic evaluation.</a:t>
-            </a:r>
-          </a:p>
-        </p:txBody>
-      </p:sp>
-      <p:sp>
-        <p:nvSpPr>
-          <p:cNvPr id="5" name="TextBox 4"/>
-          <p:cNvSpPr txBox="1"/>
-          <p:nvPr/>
-        </p:nvSpPr>
-        <p:spPr>
-          <a:xfrm>
-            <a:off x="502920" y="6446520"/>
-            <a:ext cx="11185855" cy="320040"/>
-          </a:xfrm>
-          <a:prstGeom prst="rect">
-            <a:avLst/>
-          </a:prstGeom>
-          <a:noFill/>
-        </p:spPr>
-        <p:txBody>
-          <a:bodyPr wrap="square" anchor="t">
-            <a:spAutoFit/>
-          </a:bodyPr>
-          <a:lstStyle/>
-          <a:p>
-            <a:pPr algn="ctr"/>
-            <a:r>
-              <a:rPr sz="900" b="0">
-                <a:solidFill>
-                  <a:srgbClr val="64748B"/>
-                </a:solidFill>
-                <a:latin typeface="Calibri"/>
-              </a:rPr>
-              <a:t>Manye Patrice  |  IT Innovation in Business — Master's Degree  |  Slide 4 of 28</a:t>
-            </a:r>
-          </a:p>
-        </p:txBody>
-      </p:sp>
-    </p:spTree>
-  </p:cSld>
-  <p:clrMapOvr>
-    <a:masterClrMapping/>
-  </p:clrMapOvr>
-</p:sld>
-</file>
-
-<file path=ppt/slides/slide5.xml><?xml version="1.0" encoding="utf-8"?>
-<p:sld xmlns:a="http://schemas.openxmlformats.org/drawingml/2006/main" xmlns:p="http://schemas.openxmlformats.org/presentationml/2006/main" xmlns:r="http://schemas.openxmlformats.org/officeDocument/2006/relationships">
-  <p:cSld>
-    <p:spTree>
-      <p:nvGrpSpPr>
-        <p:cNvPr id="1" name=""/>
-        <p:cNvGrpSpPr/>
-        <p:nvPr/>
-      </p:nvGrpSpPr>
-      <p:grpSpPr/>
-      <p:sp>
-        <p:nvSpPr>
-          <p:cNvPr id="2" name="Rectangle 1"/>
-          <p:cNvSpPr/>
-          <p:nvPr/>
-        </p:nvSpPr>
-        <p:spPr>
-          <a:xfrm>
-            <a:off x="0" y="0"/>
-            <a:ext cx="12191695" cy="1051560"/>
-          </a:xfrm>
-          <a:prstGeom prst="rect">
-            <a:avLst/>
-          </a:prstGeom>
-          <a:solidFill>
-            <a:srgbClr val="1E3A8A"/>
-          </a:solidFill>
-          <a:ln>
-            <a:noFill/>
-          </a:ln>
-        </p:spPr>
-        <p:style>
-          <a:lnRef idx="1">
-            <a:schemeClr val="accent1"/>
-          </a:lnRef>
-          <a:fillRef idx="3">
-            <a:schemeClr val="accent1"/>
-          </a:fillRef>
-          <a:effectRef idx="2">
-            <a:schemeClr val="accent1"/>
-          </a:effectRef>
-          <a:fontRef idx="minor">
-            <a:schemeClr val="lt1"/>
-          </a:fontRef>
-        </p:style>
-        <p:txBody>
-          <a:bodyPr rtlCol="0" anchor="ctr"/>
-          <a:lstStyle/>
-          <a:p>
-            <a:pPr algn="ctr"/>
+            <a:endParaRPr/>
           </a:p>
         </p:txBody>
       </p:sp>
@@ -14853,7 +16182,7 @@
                 </a:solidFill>
                 <a:latin typeface="Calibri"/>
               </a:rPr>
-              <a:t>Manye Patrice  |  IT Innovation in Business — Master's Degree  |  Slide 5 of 28</a:t>
+              <a:t>Manye Patrice  |  IT Innovation in Business — Master's Degree  |  Slide 5 of 31</a:t>
             </a:r>
           </a:p>
         </p:txBody>
@@ -14867,7 +16196,7 @@
 </file>
 
 <file path=ppt/slides/slide6.xml><?xml version="1.0" encoding="utf-8"?>
-<p:sld xmlns:a="http://schemas.openxmlformats.org/drawingml/2006/main" xmlns:p="http://schemas.openxmlformats.org/presentationml/2006/main" xmlns:r="http://schemas.openxmlformats.org/officeDocument/2006/relationships">
+<p:sld xmlns:a="http://schemas.openxmlformats.org/drawingml/2006/main" xmlns:r="http://schemas.openxmlformats.org/officeDocument/2006/relationships" xmlns:p="http://schemas.openxmlformats.org/presentationml/2006/main">
   <p:cSld>
     <p:bg>
       <p:bgPr>
@@ -14883,7 +16212,14 @@
         <p:cNvGrpSpPr/>
         <p:nvPr/>
       </p:nvGrpSpPr>
-      <p:grpSpPr/>
+      <p:grpSpPr>
+        <a:xfrm>
+          <a:off x="0" y="0"/>
+          <a:ext cx="0" cy="0"/>
+          <a:chOff x="0" y="0"/>
+          <a:chExt cx="0" cy="0"/>
+        </a:xfrm>
+      </p:grpSpPr>
       <p:sp>
         <p:nvSpPr>
           <p:cNvPr id="2" name="TextBox 1"/>
@@ -14984,7 +16320,7 @@
                 </a:solidFill>
                 <a:latin typeface="Calibri"/>
               </a:rPr>
-              <a:t>Manye Patrice  |  IT Innovation in Business — Master's Degree  |  Slide 6 of 28</a:t>
+              <a:t>Manye Patrice  |  IT Innovation in Business — Master's Degree  |  Slide 6 of 31</a:t>
             </a:r>
           </a:p>
         </p:txBody>
@@ -14998,7 +16334,7 @@
 </file>
 
 <file path=ppt/slides/slide7.xml><?xml version="1.0" encoding="utf-8"?>
-<p:sld xmlns:a="http://schemas.openxmlformats.org/drawingml/2006/main" xmlns:p="http://schemas.openxmlformats.org/presentationml/2006/main" xmlns:r="http://schemas.openxmlformats.org/officeDocument/2006/relationships">
+<p:sld xmlns:a="http://schemas.openxmlformats.org/drawingml/2006/main" xmlns:r="http://schemas.openxmlformats.org/officeDocument/2006/relationships" xmlns:p="http://schemas.openxmlformats.org/presentationml/2006/main">
   <p:cSld>
     <p:spTree>
       <p:nvGrpSpPr>
@@ -15006,7 +16342,14 @@
         <p:cNvGrpSpPr/>
         <p:nvPr/>
       </p:nvGrpSpPr>
-      <p:grpSpPr/>
+      <p:grpSpPr>
+        <a:xfrm>
+          <a:off x="0" y="0"/>
+          <a:ext cx="0" cy="0"/>
+          <a:chOff x="0" y="0"/>
+          <a:chExt cx="0" cy="0"/>
+        </a:xfrm>
+      </p:grpSpPr>
       <p:sp>
         <p:nvSpPr>
           <p:cNvPr id="2" name="Rectangle 1"/>
@@ -15047,6 +16390,7 @@
           <a:lstStyle/>
           <a:p>
             <a:pPr algn="ctr"/>
+            <a:endParaRPr/>
           </a:p>
         </p:txBody>
       </p:sp>
@@ -15233,7 +16577,7 @@
                 </a:solidFill>
                 <a:latin typeface="Calibri"/>
               </a:rPr>
-              <a:t>Manye Patrice  |  IT Innovation in Business — Master's Degree  |  Slide 7 of 28</a:t>
+              <a:t>Manye Patrice  |  IT Innovation in Business — Master's Degree  |  Slide 7 of 31</a:t>
             </a:r>
           </a:p>
         </p:txBody>
@@ -15247,7 +16591,7 @@
 </file>
 
 <file path=ppt/slides/slide8.xml><?xml version="1.0" encoding="utf-8"?>
-<p:sld xmlns:a="http://schemas.openxmlformats.org/drawingml/2006/main" xmlns:p="http://schemas.openxmlformats.org/presentationml/2006/main" xmlns:r="http://schemas.openxmlformats.org/officeDocument/2006/relationships">
+<p:sld xmlns:a="http://schemas.openxmlformats.org/drawingml/2006/main" xmlns:r="http://schemas.openxmlformats.org/officeDocument/2006/relationships" xmlns:p="http://schemas.openxmlformats.org/presentationml/2006/main">
   <p:cSld>
     <p:spTree>
       <p:nvGrpSpPr>
@@ -15255,7 +16599,14 @@
         <p:cNvGrpSpPr/>
         <p:nvPr/>
       </p:nvGrpSpPr>
-      <p:grpSpPr/>
+      <p:grpSpPr>
+        <a:xfrm>
+          <a:off x="0" y="0"/>
+          <a:ext cx="0" cy="0"/>
+          <a:chOff x="0" y="0"/>
+          <a:chExt cx="0" cy="0"/>
+        </a:xfrm>
+      </p:grpSpPr>
       <p:sp>
         <p:nvSpPr>
           <p:cNvPr id="2" name="Rectangle 1"/>
@@ -15296,6 +16647,7 @@
           <a:lstStyle/>
           <a:p>
             <a:pPr algn="ctr"/>
+            <a:endParaRPr/>
           </a:p>
         </p:txBody>
       </p:sp>
@@ -15632,7 +16984,7 @@
                 </a:solidFill>
                 <a:latin typeface="Calibri"/>
               </a:rPr>
-              <a:t>Manye Patrice  |  IT Innovation in Business — Master's Degree  |  Slide 8 of 28</a:t>
+              <a:t>Manye Patrice  |  IT Innovation in Business — Master's Degree  |  Slide 8 of 31</a:t>
             </a:r>
           </a:p>
         </p:txBody>
@@ -15646,7 +16998,7 @@
 </file>
 
 <file path=ppt/slides/slide9.xml><?xml version="1.0" encoding="utf-8"?>
-<p:sld xmlns:a="http://schemas.openxmlformats.org/drawingml/2006/main" xmlns:p="http://schemas.openxmlformats.org/presentationml/2006/main" xmlns:r="http://schemas.openxmlformats.org/officeDocument/2006/relationships">
+<p:sld xmlns:a="http://schemas.openxmlformats.org/drawingml/2006/main" xmlns:r="http://schemas.openxmlformats.org/officeDocument/2006/relationships" xmlns:p="http://schemas.openxmlformats.org/presentationml/2006/main">
   <p:cSld>
     <p:spTree>
       <p:nvGrpSpPr>
@@ -15654,7 +17006,14 @@
         <p:cNvGrpSpPr/>
         <p:nvPr/>
       </p:nvGrpSpPr>
-      <p:grpSpPr/>
+      <p:grpSpPr>
+        <a:xfrm>
+          <a:off x="0" y="0"/>
+          <a:ext cx="0" cy="0"/>
+          <a:chOff x="0" y="0"/>
+          <a:chExt cx="0" cy="0"/>
+        </a:xfrm>
+      </p:grpSpPr>
       <p:sp>
         <p:nvSpPr>
           <p:cNvPr id="2" name="Rectangle 1"/>
@@ -15695,6 +17054,7 @@
           <a:lstStyle/>
           <a:p>
             <a:pPr algn="ctr"/>
+            <a:endParaRPr/>
           </a:p>
         </p:txBody>
       </p:sp>
@@ -15728,45 +17088,21 @@
                 </a:solidFill>
                 <a:latin typeface="Calibri"/>
               </a:rPr>
-              <a:t>Traffic Growth Projection</a:t>
-            </a:r>
-          </a:p>
-        </p:txBody>
-      </p:sp>
-      <p:pic>
-        <p:nvPicPr>
-          <p:cNvPr id="4" name="Picture 3" descr="traffic_growth.png"/>
-          <p:cNvPicPr>
-            <a:picLocks noChangeAspect="1"/>
-          </p:cNvPicPr>
-          <p:nvPr/>
-        </p:nvPicPr>
-        <p:blipFill>
-          <a:blip r:embed="rId2"/>
-          <a:stretch>
-            <a:fillRect/>
-          </a:stretch>
-        </p:blipFill>
+              <a:t>Break-Even Analysis</a:t>
+            </a:r>
+          </a:p>
+        </p:txBody>
+      </p:sp>
+      <p:sp>
+        <p:nvSpPr>
+          <p:cNvPr id="4" name="TextBox 3"/>
+          <p:cNvSpPr txBox="1"/>
+          <p:nvPr/>
+        </p:nvSpPr>
         <p:spPr>
           <a:xfrm>
             <a:off x="502920" y="1234440"/>
-            <a:ext cx="11185855" cy="6249875"/>
-          </a:xfrm>
-          <a:prstGeom prst="rect">
-            <a:avLst/>
-          </a:prstGeom>
-        </p:spPr>
-      </p:pic>
-      <p:sp>
-        <p:nvSpPr>
-          <p:cNvPr id="5" name="TextBox 4"/>
-          <p:cNvSpPr txBox="1"/>
-          <p:nvPr/>
-        </p:nvSpPr>
-        <p:spPr>
-          <a:xfrm>
-            <a:off x="502920" y="5806440"/>
-            <a:ext cx="11185855" cy="320040"/>
+            <a:ext cx="5349240" cy="320040"/>
           </a:xfrm>
           <a:prstGeom prst="rect">
             <a:avLst/>
@@ -15779,29 +17115,29 @@
           </a:bodyPr>
           <a:lstStyle/>
           <a:p>
-            <a:pPr algn="ctr"/>
-            <a:r>
-              <a:rPr sz="1000" b="0">
-                <a:solidFill>
-                  <a:srgbClr val="64748B"/>
+            <a:pPr algn="l"/>
+            <a:r>
+              <a:rPr sz="1400" b="1">
+                <a:solidFill>
+                  <a:srgbClr val="1E3A8A"/>
                 </a:solidFill>
                 <a:latin typeface="Calibri"/>
               </a:rPr>
-              <a:t>Month 24: ~9,500 visitors/mo (illustrative)</a:t>
-            </a:r>
-          </a:p>
-        </p:txBody>
-      </p:sp>
-      <p:sp>
-        <p:nvSpPr>
-          <p:cNvPr id="6" name="TextBox 5"/>
+              <a:t>Per worker</a:t>
+            </a:r>
+          </a:p>
+        </p:txBody>
+      </p:sp>
+      <p:sp>
+        <p:nvSpPr>
+          <p:cNvPr id="5" name="TextBox 4"/>
           <p:cNvSpPr txBox="1"/>
           <p:nvPr/>
         </p:nvSpPr>
         <p:spPr>
           <a:xfrm>
-            <a:off x="502920" y="6446520"/>
-            <a:ext cx="11185855" cy="320040"/>
+            <a:off x="6172200" y="1234440"/>
+            <a:ext cx="5349240" cy="320040"/>
           </a:xfrm>
           <a:prstGeom prst="rect">
             <a:avLst/>
@@ -15814,6 +17150,277 @@
           </a:bodyPr>
           <a:lstStyle/>
           <a:p>
+            <a:pPr algn="l"/>
+            <a:r>
+              <a:rPr sz="1400" b="1">
+                <a:solidFill>
+                  <a:srgbClr val="1E3A8A"/>
+                </a:solidFill>
+                <a:latin typeface="Calibri"/>
+              </a:rPr>
+              <a:t>Platform operator</a:t>
+            </a:r>
+          </a:p>
+        </p:txBody>
+      </p:sp>
+      <p:sp>
+        <p:nvSpPr>
+          <p:cNvPr id="6" name="TextBox 5"/>
+          <p:cNvSpPr txBox="1"/>
+          <p:nvPr/>
+        </p:nvSpPr>
+        <p:spPr>
+          <a:xfrm>
+            <a:off x="502920" y="1600200"/>
+            <a:ext cx="5349240" cy="4572000"/>
+          </a:xfrm>
+          <a:prstGeom prst="rect">
+            <a:avLst/>
+          </a:prstGeom>
+          <a:noFill/>
+        </p:spPr>
+        <p:txBody>
+          <a:bodyPr wrap="square">
+            <a:spAutoFit/>
+          </a:bodyPr>
+          <a:lstStyle/>
+          <a:p>
+            <a:pPr>
+              <a:lnSpc>
+                <a:spcPct val="115000"/>
+              </a:lnSpc>
+              <a:spcAft>
+                <a:spcPts val="600"/>
+              </a:spcAft>
+              <a:defRPr sz="1500">
+                <a:solidFill>
+                  <a:srgbClr val="1E293B"/>
+                </a:solidFill>
+                <a:latin typeface="Calibri"/>
+              </a:defRPr>
+            </a:pPr>
+            <a:r>
+              <a:t>Worker plans (commission savings):</a:t>
+            </a:r>
+          </a:p>
+          <a:p>
+            <a:pPr>
+              <a:lnSpc>
+                <a:spcPct val="115000"/>
+              </a:lnSpc>
+              <a:spcAft>
+                <a:spcPts val="600"/>
+              </a:spcAft>
+              <a:defRPr sz="1500">
+                <a:solidFill>
+                  <a:srgbClr val="1E293B"/>
+                </a:solidFill>
+                <a:latin typeface="Calibri"/>
+              </a:defRPr>
+            </a:pPr>
+            <a:r>
+              <a:t>Jobs = Subscription ÷ (Avg job × Discount %)</a:t>
+            </a:r>
+          </a:p>
+          <a:p>
+            <a:pPr>
+              <a:lnSpc>
+                <a:spcPct val="115000"/>
+              </a:lnSpc>
+              <a:spcAft>
+                <a:spcPts val="600"/>
+              </a:spcAft>
+              <a:defRPr sz="1500">
+                <a:solidFill>
+                  <a:srgbClr val="1E293B"/>
+                </a:solidFill>
+                <a:latin typeface="Calibri"/>
+              </a:defRPr>
+            </a:pPr>
+            <a:r>
+              <a:t>• Professional ($29): 14 jobs/mo @ $200</a:t>
+            </a:r>
+          </a:p>
+          <a:p>
+            <a:pPr>
+              <a:lnSpc>
+                <a:spcPct val="115000"/>
+              </a:lnSpc>
+              <a:spcAft>
+                <a:spcPts val="600"/>
+              </a:spcAft>
+              <a:defRPr sz="1500">
+                <a:solidFill>
+                  <a:srgbClr val="1E293B"/>
+                </a:solidFill>
+                <a:latin typeface="Calibri"/>
+              </a:defRPr>
+            </a:pPr>
+            <a:r>
+              <a:t>• Premium ($59): 15 jobs/mo @ $200</a:t>
+            </a:r>
+          </a:p>
+          <a:p>
+            <a:pPr>
+              <a:lnSpc>
+                <a:spcPct val="115000"/>
+              </a:lnSpc>
+              <a:spcAft>
+                <a:spcPts val="600"/>
+              </a:spcAft>
+              <a:defRPr sz="1500">
+                <a:solidFill>
+                  <a:srgbClr val="1E293B"/>
+                </a:solidFill>
+                <a:latin typeface="Calibri"/>
+              </a:defRPr>
+            </a:pPr>
+            <a:r>
+              <a:t>Before ranking / featured-placement uplift.</a:t>
+            </a:r>
+          </a:p>
+        </p:txBody>
+      </p:sp>
+      <p:sp>
+        <p:nvSpPr>
+          <p:cNvPr id="7" name="TextBox 6"/>
+          <p:cNvSpPr txBox="1"/>
+          <p:nvPr/>
+        </p:nvSpPr>
+        <p:spPr>
+          <a:xfrm>
+            <a:off x="6172200" y="1600200"/>
+            <a:ext cx="5349240" cy="4572000"/>
+          </a:xfrm>
+          <a:prstGeom prst="rect">
+            <a:avLst/>
+          </a:prstGeom>
+          <a:noFill/>
+        </p:spPr>
+        <p:txBody>
+          <a:bodyPr wrap="square">
+            <a:spAutoFit/>
+          </a:bodyPr>
+          <a:lstStyle/>
+          <a:p>
+            <a:pPr>
+              <a:lnSpc>
+                <a:spcPct val="115000"/>
+              </a:lnSpc>
+              <a:spcAft>
+                <a:spcPts val="600"/>
+              </a:spcAft>
+              <a:defRPr sz="1500">
+                <a:solidFill>
+                  <a:srgbClr val="1E293B"/>
+                </a:solidFill>
+                <a:latin typeface="Calibri"/>
+              </a:defRPr>
+            </a:pPr>
+            <a:r>
+              <a:t>Platform operating break-even:</a:t>
+            </a:r>
+          </a:p>
+          <a:p>
+            <a:pPr>
+              <a:lnSpc>
+                <a:spcPct val="115000"/>
+              </a:lnSpc>
+              <a:spcAft>
+                <a:spcPts val="600"/>
+              </a:spcAft>
+              <a:defRPr sz="1500">
+                <a:solidFill>
+                  <a:srgbClr val="1E293B"/>
+                </a:solidFill>
+                <a:latin typeface="Calibri"/>
+              </a:defRPr>
+            </a:pPr>
+            <a:r>
+              <a:t>• Fixed costs: Bootstrap scenario — Months 1–6: $3,200 · 7–12: $3,800 · 13–24: $4,500</a:t>
+            </a:r>
+          </a:p>
+          <a:p>
+            <a:pPr>
+              <a:lnSpc>
+                <a:spcPct val="115000"/>
+              </a:lnSpc>
+              <a:spcAft>
+                <a:spcPts val="600"/>
+              </a:spcAft>
+              <a:defRPr sz="1500">
+                <a:solidFill>
+                  <a:srgbClr val="1E293B"/>
+                </a:solidFill>
+                <a:latin typeface="Calibri"/>
+              </a:defRPr>
+            </a:pPr>
+            <a:r>
+              <a:t>• Variable: 2% of GMV</a:t>
+            </a:r>
+          </a:p>
+          <a:p>
+            <a:pPr>
+              <a:lnSpc>
+                <a:spcPct val="115000"/>
+              </a:lnSpc>
+              <a:spcAft>
+                <a:spcPts val="600"/>
+              </a:spcAft>
+              <a:defRPr sz="1500">
+                <a:solidFill>
+                  <a:srgbClr val="1E293B"/>
+                </a:solidFill>
+                <a:latin typeface="Calibri"/>
+              </a:defRPr>
+            </a:pPr>
+            <a:r>
+              <a:t>• Break-even: Month 25 (illustrative)</a:t>
+            </a:r>
+          </a:p>
+          <a:p>
+            <a:pPr>
+              <a:lnSpc>
+                <a:spcPct val="115000"/>
+              </a:lnSpc>
+              <a:spcAft>
+                <a:spcPts val="600"/>
+              </a:spcAft>
+              <a:defRPr sz="1500">
+                <a:solidFill>
+                  <a:srgbClr val="1E293B"/>
+                </a:solidFill>
+                <a:latin typeface="Calibri"/>
+              </a:defRPr>
+            </a:pPr>
+            <a:r>
+              <a:t>• Month 24 margin: $-27</a:t>
+            </a:r>
+          </a:p>
+        </p:txBody>
+      </p:sp>
+      <p:sp>
+        <p:nvSpPr>
+          <p:cNvPr id="8" name="TextBox 7"/>
+          <p:cNvSpPr txBox="1"/>
+          <p:nvPr/>
+        </p:nvSpPr>
+        <p:spPr>
+          <a:xfrm>
+            <a:off x="502920" y="6446520"/>
+            <a:ext cx="11185855" cy="320040"/>
+          </a:xfrm>
+          <a:prstGeom prst="rect">
+            <a:avLst/>
+          </a:prstGeom>
+          <a:noFill/>
+        </p:spPr>
+        <p:txBody>
+          <a:bodyPr wrap="square" anchor="t">
+            <a:spAutoFit/>
+          </a:bodyPr>
+          <a:lstStyle/>
+          <a:p>
             <a:pPr algn="ctr"/>
             <a:r>
               <a:rPr sz="900" b="0">
@@ -15822,7 +17429,7 @@
                 </a:solidFill>
                 <a:latin typeface="Calibri"/>
               </a:rPr>
-              <a:t>Manye Patrice  |  IT Innovation in Business — Master's Degree  |  Slide 9 of 28</a:t>
+              <a:t>Manye Patrice  |  IT Innovation in Business — Master's Degree  |  Slide 9 of 31</a:t>
             </a:r>
           </a:p>
         </p:txBody>
@@ -16156,7 +17763,7 @@
 </file>
 
 <file path=ppt/theme/theme2.xml><?xml version="1.0" encoding="utf-8"?>
-<a:theme xmlns:a="http://schemas.openxmlformats.org/drawingml/2006/main" name="Office Theme">
+<a:theme xmlns:a="http://schemas.openxmlformats.org/drawingml/2006/main" name="Thème Office">
   <a:themeElements>
     <a:clrScheme name="Office">
       <a:dk1>
@@ -16166,44 +17773,44 @@
         <a:sysClr val="window" lastClr="FFFFFF"/>
       </a:lt1>
       <a:dk2>
-        <a:srgbClr val="1F497D"/>
+        <a:srgbClr val="44546A"/>
       </a:dk2>
       <a:lt2>
-        <a:srgbClr val="EEECE1"/>
+        <a:srgbClr val="E7E6E6"/>
       </a:lt2>
       <a:accent1>
-        <a:srgbClr val="4F81BD"/>
+        <a:srgbClr val="5B9BD5"/>
       </a:accent1>
       <a:accent2>
-        <a:srgbClr val="C0504D"/>
+        <a:srgbClr val="ED7D31"/>
       </a:accent2>
       <a:accent3>
-        <a:srgbClr val="9BBB59"/>
+        <a:srgbClr val="A5A5A5"/>
       </a:accent3>
       <a:accent4>
-        <a:srgbClr val="8064A2"/>
+        <a:srgbClr val="FFC000"/>
       </a:accent4>
       <a:accent5>
-        <a:srgbClr val="4BACC6"/>
+        <a:srgbClr val="4472C4"/>
       </a:accent5>
       <a:accent6>
-        <a:srgbClr val="F79646"/>
+        <a:srgbClr val="70AD47"/>
       </a:accent6>
       <a:hlink>
-        <a:srgbClr val="0000FF"/>
+        <a:srgbClr val="0563C1"/>
       </a:hlink>
       <a:folHlink>
-        <a:srgbClr val="800080"/>
+        <a:srgbClr val="954F72"/>
       </a:folHlink>
     </a:clrScheme>
     <a:fontScheme name="Office">
       <a:majorFont>
-        <a:latin typeface="Calibri"/>
+        <a:latin typeface="Calibri Light" panose="020F0302020204030204"/>
         <a:ea typeface=""/>
         <a:cs typeface=""/>
-        <a:font script="Jpan" typeface="ＭＳ Ｐゴシック"/>
+        <a:font script="Jpan" typeface="游ゴシック Light"/>
         <a:font script="Hang" typeface="맑은 고딕"/>
-        <a:font script="Hans" typeface="宋体"/>
+        <a:font script="Hans" typeface="等线 Light"/>
         <a:font script="Hant" typeface="新細明體"/>
         <a:font script="Arab" typeface="Times New Roman"/>
         <a:font script="Hebr" typeface="Times New Roman"/>
@@ -16233,12 +17840,12 @@
         <a:font script="Geor" typeface="Sylfaen"/>
       </a:majorFont>
       <a:minorFont>
-        <a:latin typeface="Calibri"/>
+        <a:latin typeface="Calibri" panose="020F0502020204030204"/>
         <a:ea typeface=""/>
         <a:cs typeface=""/>
-        <a:font script="Jpan" typeface="ＭＳ Ｐゴシック"/>
+        <a:font script="Jpan" typeface="游ゴシック"/>
         <a:font script="Hang" typeface="맑은 고딕"/>
-        <a:font script="Hans" typeface="宋体"/>
+        <a:font script="Hans" typeface="等线"/>
         <a:font script="Hant" typeface="新細明體"/>
         <a:font script="Arab" typeface="Arial"/>
         <a:font script="Hebr" typeface="Arial"/>
@@ -16277,200 +17884,141 @@
           <a:gsLst>
             <a:gs pos="0">
               <a:schemeClr val="phClr">
-                <a:tint val="50000"/>
-                <a:satMod val="300000"/>
+                <a:lumMod val="110000"/>
+                <a:satMod val="105000"/>
+                <a:tint val="67000"/>
               </a:schemeClr>
             </a:gs>
-            <a:gs pos="35000">
+            <a:gs pos="50000">
               <a:schemeClr val="phClr">
-                <a:tint val="37000"/>
-                <a:satMod val="300000"/>
+                <a:lumMod val="105000"/>
+                <a:satMod val="103000"/>
+                <a:tint val="73000"/>
               </a:schemeClr>
             </a:gs>
             <a:gs pos="100000">
               <a:schemeClr val="phClr">
-                <a:tint val="15000"/>
-                <a:satMod val="350000"/>
+                <a:lumMod val="105000"/>
+                <a:satMod val="109000"/>
+                <a:tint val="81000"/>
               </a:schemeClr>
             </a:gs>
           </a:gsLst>
-          <a:lin ang="16200000" scaled="1"/>
+          <a:lin ang="5400000" scaled="0"/>
         </a:gradFill>
         <a:gradFill rotWithShape="1">
           <a:gsLst>
             <a:gs pos="0">
               <a:schemeClr val="phClr">
-                <a:tint val="100000"/>
+                <a:satMod val="103000"/>
+                <a:lumMod val="102000"/>
+                <a:tint val="94000"/>
+              </a:schemeClr>
+            </a:gs>
+            <a:gs pos="50000">
+              <a:schemeClr val="phClr">
+                <a:satMod val="110000"/>
+                <a:lumMod val="100000"/>
                 <a:shade val="100000"/>
-                <a:satMod val="130000"/>
               </a:schemeClr>
             </a:gs>
             <a:gs pos="100000">
               <a:schemeClr val="phClr">
-                <a:tint val="50000"/>
-                <a:shade val="100000"/>
-                <a:satMod val="350000"/>
+                <a:lumMod val="99000"/>
+                <a:satMod val="120000"/>
+                <a:shade val="78000"/>
               </a:schemeClr>
             </a:gs>
           </a:gsLst>
-          <a:lin ang="16200000" scaled="0"/>
+          <a:lin ang="5400000" scaled="0"/>
         </a:gradFill>
       </a:fillStyleLst>
       <a:lnStyleLst>
-        <a:ln w="9525" cap="flat" cmpd="sng" algn="ctr">
-          <a:solidFill>
-            <a:schemeClr val="phClr">
-              <a:shade val="95000"/>
-              <a:satMod val="105000"/>
-            </a:schemeClr>
-          </a:solidFill>
-          <a:prstDash val="solid"/>
-        </a:ln>
-        <a:ln w="25400" cap="flat" cmpd="sng" algn="ctr">
+        <a:ln w="6350" cap="flat" cmpd="sng" algn="ctr">
           <a:solidFill>
             <a:schemeClr val="phClr"/>
           </a:solidFill>
           <a:prstDash val="solid"/>
+          <a:miter lim="800000"/>
         </a:ln>
-        <a:ln w="38100" cap="flat" cmpd="sng" algn="ctr">
+        <a:ln w="12700" cap="flat" cmpd="sng" algn="ctr">
           <a:solidFill>
             <a:schemeClr val="phClr"/>
           </a:solidFill>
           <a:prstDash val="solid"/>
+          <a:miter lim="800000"/>
+        </a:ln>
+        <a:ln w="19050" cap="flat" cmpd="sng" algn="ctr">
+          <a:solidFill>
+            <a:schemeClr val="phClr"/>
+          </a:solidFill>
+          <a:prstDash val="solid"/>
+          <a:miter lim="800000"/>
         </a:ln>
       </a:lnStyleLst>
       <a:effectStyleLst>
         <a:effectStyle>
+          <a:effectLst/>
+        </a:effectStyle>
+        <a:effectStyle>
+          <a:effectLst/>
+        </a:effectStyle>
+        <a:effectStyle>
           <a:effectLst>
-            <a:outerShdw blurRad="40000" dist="20000" dir="5400000" rotWithShape="0">
+            <a:outerShdw blurRad="57150" dist="19050" dir="5400000" algn="ctr" rotWithShape="0">
               <a:srgbClr val="000000">
-                <a:alpha val="38000"/>
+                <a:alpha val="63000"/>
               </a:srgbClr>
             </a:outerShdw>
           </a:effectLst>
-        </a:effectStyle>
-        <a:effectStyle>
-          <a:effectLst>
-            <a:outerShdw blurRad="40000" dist="23000" dir="5400000" rotWithShape="0">
-              <a:srgbClr val="000000">
-                <a:alpha val="35000"/>
-              </a:srgbClr>
-            </a:outerShdw>
-          </a:effectLst>
-        </a:effectStyle>
-        <a:effectStyle>
-          <a:effectLst>
-            <a:outerShdw blurRad="40000" dist="23000" dir="5400000" rotWithShape="0">
-              <a:srgbClr val="000000">
-                <a:alpha val="35000"/>
-              </a:srgbClr>
-            </a:outerShdw>
-          </a:effectLst>
-          <a:scene3d>
-            <a:camera prst="orthographicFront">
-              <a:rot lat="0" lon="0" rev="0"/>
-            </a:camera>
-            <a:lightRig rig="threePt" dir="t">
-              <a:rot lat="0" lon="0" rev="1200000"/>
-            </a:lightRig>
-          </a:scene3d>
-          <a:sp3d>
-            <a:bevelT w="63500" h="25400"/>
-          </a:sp3d>
         </a:effectStyle>
       </a:effectStyleLst>
       <a:bgFillStyleLst>
         <a:solidFill>
           <a:schemeClr val="phClr"/>
         </a:solidFill>
+        <a:solidFill>
+          <a:schemeClr val="phClr">
+            <a:tint val="95000"/>
+            <a:satMod val="170000"/>
+          </a:schemeClr>
+        </a:solidFill>
         <a:gradFill rotWithShape="1">
           <a:gsLst>
             <a:gs pos="0">
               <a:schemeClr val="phClr">
-                <a:tint val="40000"/>
-                <a:satMod val="350000"/>
+                <a:tint val="93000"/>
+                <a:satMod val="150000"/>
+                <a:shade val="98000"/>
+                <a:lumMod val="102000"/>
               </a:schemeClr>
             </a:gs>
-            <a:gs pos="40000">
+            <a:gs pos="50000">
               <a:schemeClr val="phClr">
-                <a:tint val="45000"/>
-                <a:shade val="99000"/>
-                <a:satMod val="350000"/>
+                <a:tint val="98000"/>
+                <a:satMod val="130000"/>
+                <a:shade val="90000"/>
+                <a:lumMod val="103000"/>
               </a:schemeClr>
             </a:gs>
             <a:gs pos="100000">
               <a:schemeClr val="phClr">
-                <a:shade val="20000"/>
-                <a:satMod val="255000"/>
+                <a:shade val="63000"/>
+                <a:satMod val="120000"/>
               </a:schemeClr>
             </a:gs>
           </a:gsLst>
-          <a:path path="circle">
-            <a:fillToRect l="50000" t="-80000" r="50000" b="180000"/>
-          </a:path>
-        </a:gradFill>
-        <a:gradFill rotWithShape="1">
-          <a:gsLst>
-            <a:gs pos="0">
-              <a:schemeClr val="phClr">
-                <a:tint val="80000"/>
-                <a:satMod val="300000"/>
-              </a:schemeClr>
-            </a:gs>
-            <a:gs pos="100000">
-              <a:schemeClr val="phClr">
-                <a:shade val="30000"/>
-                <a:satMod val="200000"/>
-              </a:schemeClr>
-            </a:gs>
-          </a:gsLst>
-          <a:path path="circle">
-            <a:fillToRect l="50000" t="50000" r="50000" b="50000"/>
-          </a:path>
+          <a:lin ang="5400000" scaled="0"/>
         </a:gradFill>
       </a:bgFillStyleLst>
     </a:fmtScheme>
   </a:themeElements>
-  <a:objectDefaults>
-    <a:spDef>
-      <a:spPr/>
-      <a:bodyPr/>
-      <a:lstStyle/>
-      <a:style>
-        <a:lnRef idx="1">
-          <a:schemeClr val="accent1"/>
-        </a:lnRef>
-        <a:fillRef idx="3">
-          <a:schemeClr val="accent1"/>
-        </a:fillRef>
-        <a:effectRef idx="2">
-          <a:schemeClr val="accent1"/>
-        </a:effectRef>
-        <a:fontRef idx="minor">
-          <a:schemeClr val="lt1"/>
-        </a:fontRef>
-      </a:style>
-    </a:spDef>
-    <a:lnDef>
-      <a:spPr/>
-      <a:bodyPr/>
-      <a:lstStyle/>
-      <a:style>
-        <a:lnRef idx="2">
-          <a:schemeClr val="accent1"/>
-        </a:lnRef>
-        <a:fillRef idx="0">
-          <a:schemeClr val="accent1"/>
-        </a:fillRef>
-        <a:effectRef idx="1">
-          <a:schemeClr val="accent1"/>
-        </a:effectRef>
-        <a:fontRef idx="minor">
-          <a:schemeClr val="tx1"/>
-        </a:fontRef>
-      </a:style>
-    </a:lnDef>
-  </a:objectDefaults>
+  <a:objectDefaults/>
   <a:extraClrSchemeLst/>
+  <a:extLst>
+    <a:ext uri="{05A4C25C-085E-4340-85A3-A5531E510DB2}">
+      <thm15:themeFamily xmlns:thm15="http://schemas.microsoft.com/office/thememl/2012/main" name="Office Theme" id="{62F939B6-93AF-4DB8-9C6B-D6C7DFDC589F}" vid="{4A3C46E8-61CC-4603-A589-7422A47A8E4A}"/>
+    </a:ext>
+  </a:extLst>
 </a:theme>
 </file>